--- a/Clase_2/PPT/Clase02_VA_Continuas.pptx
+++ b/Clase_2/PPT/Clase02_VA_Continuas.pptx
@@ -4,6 +4,9 @@
   <p:sldMasterIdLst>
     <p:sldMasterId id="2147483648" r:id="rId1"/>
   </p:sldMasterIdLst>
+  <p:notesMasterIdLst>
+    <p:notesMasterId r:id="rId20"/>
+  </p:notesMasterIdLst>
   <p:sldIdLst>
     <p:sldId id="256" r:id="rId2"/>
     <p:sldId id="257" r:id="rId3"/>
@@ -24,9 +27,6 @@
     <p:sldId id="272" r:id="rId18"/>
     <p:sldId id="273" r:id="rId19"/>
   </p:sldIdLst>
-  <p:notesMasterIdLst>
-    <p:notesMasterId r:id="rId20"/>
-  </p:notesMasterIdLst>
   <p:sldSz cx="12192000" cy="6858000"/>
   <p:notesSz cx="6858000" cy="12192000"/>
   <p:defaultTextStyle>
@@ -121,13 +121,20 @@
       </a:defRPr>
     </a:lvl9pPr>
   </p:defaultTextStyle>
+  <p:extLst>
+    <p:ext uri="{EFAFB233-063F-42B5-8137-9DF3F51BA10A}">
+      <p15:sldGuideLst xmlns:p15="http://schemas.microsoft.com/office/powerpoint/2012/main"/>
+    </p:ext>
+  </p:extLst>
 </p:presentation>
 </file>
 
 <file path=ppt/charts/chart1.xml><?xml version="1.0" encoding="utf-8"?>
-<c:chartSpace xmlns:c="http://schemas.openxmlformats.org/drawingml/2006/chart" xmlns:a="http://schemas.openxmlformats.org/drawingml/2006/main" xmlns:r="http://schemas.openxmlformats.org/officeDocument/2006/relationships">
+<c:chartSpace xmlns:c="http://schemas.openxmlformats.org/drawingml/2006/chart" xmlns:a="http://schemas.openxmlformats.org/drawingml/2006/main" xmlns:r="http://schemas.openxmlformats.org/officeDocument/2006/relationships" xmlns:c16r2="http://schemas.microsoft.com/office/drawing/2015/06/chart">
   <c:date1904 val="0"/>
+  <c:lang val="en-US"/>
   <c:roundedCorners val="1"/>
+  <c:style val="2"/>
   <c:chart>
     <c:title>
       <c:tx>
@@ -144,7 +151,7 @@
               </a:defRPr>
             </a:pPr>
             <a:r>
-              <a:rPr sz="1200" b="0" i="0" u="none" strike="noStrike">
+              <a:rPr lang="en-US" sz="1200" b="0" i="0" u="none" strike="noStrike">
                 <a:solidFill>
                   <a:srgbClr val="0E2148"/>
                 </a:solidFill>
@@ -155,7 +162,6 @@
           </a:p>
         </c:rich>
       </c:tx>
-      <c:layout/>
       <c:overlay val="0"/>
     </c:title>
     <c:autoTitleDeleted val="0"/>
@@ -186,57 +192,31 @@
             <a:effectLst/>
           </c:spPr>
           <c:invertIfNegative val="0"/>
-          <c:dLbls>
-            <c:numFmt formatCode="#,##0" sourceLinked="0"/>
-            <c:txPr>
-              <a:bodyPr/>
-              <a:lstStyle/>
-              <a:p>
-                <a:pPr>
-                  <a:defRPr b="0" i="0" strike="noStrike" sz="1200" u="none">
-                    <a:solidFill>
-                      <a:srgbClr val="000000"/>
-                    </a:solidFill>
-                    <a:latin typeface="Arial"/>
-                  </a:defRPr>
-                </a:pPr>
-              </a:p>
-            </c:txPr>
-            <c:showLegendKey val="0"/>
-            <c:showVal val="0"/>
-            <c:showCatName val="0"/>
-            <c:showSerName val="0"/>
-            <c:showPercent val="0"/>
-            <c:showBubbleSize val="0"/>
-            <c:showLeaderLines val="0"/>
-          </c:dLbls>
           <c:cat>
-            <c:multiLvlStrRef>
+            <c:strRef>
               <c:f>Sheet1!$A$2:$A$7</c:f>
-              <c:multiLvlStrCache>
+              <c:strCache>
                 <c:ptCount val="6"/>
-                <c:lvl>
-                  <c:pt idx="0">
-                    <c:v>0</c:v>
-                  </c:pt>
-                  <c:pt idx="1">
-                    <c:v>20</c:v>
-                  </c:pt>
-                  <c:pt idx="2">
-                    <c:v>40</c:v>
-                  </c:pt>
-                  <c:pt idx="3">
-                    <c:v>60</c:v>
-                  </c:pt>
-                  <c:pt idx="4">
-                    <c:v>80</c:v>
-                  </c:pt>
-                  <c:pt idx="5">
-                    <c:v>100</c:v>
-                  </c:pt>
-                </c:lvl>
-              </c:multiLvlStrCache>
-            </c:multiLvlStrRef>
+                <c:pt idx="0">
+                  <c:v>0</c:v>
+                </c:pt>
+                <c:pt idx="1">
+                  <c:v>20</c:v>
+                </c:pt>
+                <c:pt idx="2">
+                  <c:v>40</c:v>
+                </c:pt>
+                <c:pt idx="3">
+                  <c:v>60</c:v>
+                </c:pt>
+                <c:pt idx="4">
+                  <c:v>80</c:v>
+                </c:pt>
+                <c:pt idx="5">
+                  <c:v>100</c:v>
+                </c:pt>
+              </c:strCache>
+            </c:strRef>
           </c:cat>
           <c:val>
             <c:numRef>
@@ -245,56 +225,43 @@
                 <c:formatCode>General</c:formatCode>
                 <c:ptCount val="6"/>
                 <c:pt idx="0">
-                  <c:v>0.0243291440483704</c:v>
+                  <c:v>2.4329144048370398E-2</c:v>
                 </c:pt>
                 <c:pt idx="1">
-                  <c:v>0.012490999045843266</c:v>
+                  <c:v>1.2490999045843266E-2</c:v>
                 </c:pt>
                 <c:pt idx="2">
-                  <c:v>0.0064130927439557004</c:v>
+                  <c:v>6.4130927439557004E-3</c:v>
                 </c:pt>
                 <c:pt idx="3">
-                  <c:v>0.0032925916006905586</c:v>
+                  <c:v>3.2925916006905586E-3</c:v>
                 </c:pt>
                 <c:pt idx="4">
-                  <c:v>0.001690472893777456</c:v>
+                  <c:v>1.6904728937774561E-3</c:v>
                 </c:pt>
                 <c:pt idx="5">
-                  <c:v>0.0008679177229259094</c:v>
+                  <c:v>8.6791772292590941E-4</c:v>
                 </c:pt>
               </c:numCache>
             </c:numRef>
           </c:val>
+          <c:extLst>
+            <c:ext xmlns:c16="http://schemas.microsoft.com/office/drawing/2014/chart" uri="{C3380CC4-5D6E-409C-BE32-E72D297353CC}">
+              <c16:uniqueId val="{00000000-DD63-6C4C-AE4F-D18566087B65}"/>
+            </c:ext>
+          </c:extLst>
         </c:ser>
         <c:dLbls>
-          <c:numFmt formatCode="#,##0" sourceLinked="0"/>
-          <c:txPr>
-            <a:bodyPr/>
-            <a:lstStyle/>
-            <a:p>
-              <a:pPr>
-                <a:defRPr b="0" i="0" strike="noStrike" sz="1200" u="none">
-                  <a:solidFill>
-                    <a:srgbClr val="000000"/>
-                  </a:solidFill>
-                  <a:latin typeface="Arial"/>
-                </a:defRPr>
-              </a:pPr>
-            </a:p>
-          </c:txPr>
           <c:showLegendKey val="0"/>
           <c:showVal val="0"/>
           <c:showCatName val="0"/>
           <c:showSerName val="0"/>
           <c:showPercent val="0"/>
           <c:showBubbleSize val="0"/>
-          <c:showLeaderLines val="0"/>
         </c:dLbls>
         <c:gapWidth val="12"/>
-        <c:overlap val="0"/>
         <c:axId val="2094734554"/>
         <c:axId val="2094734552"/>
-        <c:axId val="2094734556"/>
       </c:barChart>
       <c:catAx>
         <c:axId val="2094734554"/>
@@ -335,6 +302,7 @@
         <c:crosses val="autoZero"/>
         <c:auto val="1"/>
         <c:lblAlgn val="ctr"/>
+        <c:lblOffset val="100"/>
         <c:noMultiLvlLbl val="1"/>
       </c:catAx>
       <c:valAx>
@@ -399,6 +367,7 @@
     </c:plotArea>
     <c:plotVisOnly val="1"/>
     <c:dispBlanksAs val="span"/>
+    <c:showDLblsOverMax val="1"/>
   </c:chart>
   <c:spPr>
     <a:noFill/>
@@ -414,9 +383,11 @@
 </file>
 
 <file path=ppt/charts/chart2.xml><?xml version="1.0" encoding="utf-8"?>
-<c:chartSpace xmlns:c="http://schemas.openxmlformats.org/drawingml/2006/chart" xmlns:a="http://schemas.openxmlformats.org/drawingml/2006/main" xmlns:r="http://schemas.openxmlformats.org/officeDocument/2006/relationships">
+<c:chartSpace xmlns:c="http://schemas.openxmlformats.org/drawingml/2006/chart" xmlns:a="http://schemas.openxmlformats.org/drawingml/2006/main" xmlns:r="http://schemas.openxmlformats.org/officeDocument/2006/relationships" xmlns:c16r2="http://schemas.microsoft.com/office/drawing/2015/06/chart">
   <c:date1904 val="0"/>
+  <c:lang val="en-US"/>
   <c:roundedCorners val="1"/>
+  <c:style val="2"/>
   <c:chart>
     <c:title>
       <c:tx>
@@ -433,7 +404,7 @@
               </a:defRPr>
             </a:pPr>
             <a:r>
-              <a:rPr sz="1200" b="0" i="0" u="none" strike="noStrike">
+              <a:rPr lang="en-US" sz="1200" b="0" i="0" u="none" strike="noStrike">
                 <a:solidFill>
                   <a:srgbClr val="0E2148"/>
                 </a:solidFill>
@@ -444,7 +415,6 @@
           </a:p>
         </c:rich>
       </c:tx>
-      <c:layout/>
       <c:overlay val="0"/>
     </c:title>
     <c:autoTitleDeleted val="0"/>
@@ -475,129 +445,31 @@
             <a:effectLst/>
           </c:spPr>
           <c:invertIfNegative val="0"/>
-          <c:dLbls>
-            <c:numFmt formatCode="#,##0" sourceLinked="0"/>
-            <c:txPr>
-              <a:bodyPr/>
-              <a:lstStyle/>
-              <a:p>
-                <a:pPr>
-                  <a:defRPr b="0" i="0" strike="noStrike" sz="1200" u="none">
-                    <a:solidFill>
-                      <a:srgbClr val="000000"/>
-                    </a:solidFill>
-                    <a:latin typeface="Arial"/>
-                  </a:defRPr>
-                </a:pPr>
-              </a:p>
-            </c:txPr>
-            <c:showLegendKey val="0"/>
-            <c:showVal val="0"/>
-            <c:showCatName val="0"/>
-            <c:showSerName val="0"/>
-            <c:showPercent val="0"/>
-            <c:showBubbleSize val="0"/>
-            <c:showLeaderLines val="0"/>
-          </c:dLbls>
           <c:cat>
-            <c:multiLvlStrRef>
+            <c:strRef>
               <c:f>Sheet1!$A$2:$A$31</c:f>
-              <c:multiLvlStrCache>
+              <c:strCache>
                 <c:ptCount val="30"/>
-                <c:lvl>
-                  <c:pt idx="0">
-                    <c:v>0</c:v>
-                  </c:pt>
-                  <c:pt idx="1">
-                    <c:v/>
-                  </c:pt>
-                  <c:pt idx="2">
-                    <c:v/>
-                  </c:pt>
-                  <c:pt idx="3">
-                    <c:v/>
-                  </c:pt>
-                  <c:pt idx="4">
-                    <c:v/>
-                  </c:pt>
-                  <c:pt idx="5">
-                    <c:v>20</c:v>
-                  </c:pt>
-                  <c:pt idx="6">
-                    <c:v/>
-                  </c:pt>
-                  <c:pt idx="7">
-                    <c:v/>
-                  </c:pt>
-                  <c:pt idx="8">
-                    <c:v/>
-                  </c:pt>
-                  <c:pt idx="9">
-                    <c:v/>
-                  </c:pt>
-                  <c:pt idx="10">
-                    <c:v>40</c:v>
-                  </c:pt>
-                  <c:pt idx="11">
-                    <c:v/>
-                  </c:pt>
-                  <c:pt idx="12">
-                    <c:v/>
-                  </c:pt>
-                  <c:pt idx="13">
-                    <c:v/>
-                  </c:pt>
-                  <c:pt idx="14">
-                    <c:v/>
-                  </c:pt>
-                  <c:pt idx="15">
-                    <c:v>60</c:v>
-                  </c:pt>
-                  <c:pt idx="16">
-                    <c:v/>
-                  </c:pt>
-                  <c:pt idx="17">
-                    <c:v/>
-                  </c:pt>
-                  <c:pt idx="18">
-                    <c:v/>
-                  </c:pt>
-                  <c:pt idx="19">
-                    <c:v/>
-                  </c:pt>
-                  <c:pt idx="20">
-                    <c:v>80</c:v>
-                  </c:pt>
-                  <c:pt idx="21">
-                    <c:v/>
-                  </c:pt>
-                  <c:pt idx="22">
-                    <c:v/>
-                  </c:pt>
-                  <c:pt idx="23">
-                    <c:v/>
-                  </c:pt>
-                  <c:pt idx="24">
-                    <c:v/>
-                  </c:pt>
-                  <c:pt idx="25">
-                    <c:v>100</c:v>
-                  </c:pt>
-                  <c:pt idx="26">
-                    <c:v/>
-                  </c:pt>
-                  <c:pt idx="27">
-                    <c:v/>
-                  </c:pt>
-                  <c:pt idx="28">
-                    <c:v/>
-                  </c:pt>
-                  <c:pt idx="29">
-                    <c:v/>
-                  </c:pt>
-                </c:lvl>
-              </c:multiLvlStrCache>
-            </c:multiLvlStrRef>
+                <c:pt idx="0">
+                  <c:v>0</c:v>
+                </c:pt>
+                <c:pt idx="5">
+                  <c:v>20</c:v>
+                </c:pt>
+                <c:pt idx="10">
+                  <c:v>40</c:v>
+                </c:pt>
+                <c:pt idx="15">
+                  <c:v>60</c:v>
+                </c:pt>
+                <c:pt idx="20">
+                  <c:v>80</c:v>
+                </c:pt>
+                <c:pt idx="25">
+                  <c:v>100</c:v>
+                </c:pt>
+              </c:strCache>
+            </c:strRef>
           </c:cat>
           <c:val>
             <c:numRef>
@@ -606,128 +478,115 @@
                 <c:formatCode>General</c:formatCode>
                 <c:ptCount val="30"/>
                 <c:pt idx="0">
-                  <c:v>0.03120667023926313</c:v>
+                  <c:v>3.1206670239263129E-2</c:v>
                 </c:pt>
                 <c:pt idx="1">
-                  <c:v>0.0273112451695747</c:v>
+                  <c:v>2.7311245169574699E-2</c:v>
                 </c:pt>
                 <c:pt idx="2">
-                  <c:v>0.02390207308225234</c:v>
+                  <c:v>2.390207308225234E-2</c:v>
                 </c:pt>
                 <c:pt idx="3">
-                  <c:v>0.020918456631401877</c:v>
+                  <c:v>2.0918456631401877E-2</c:v>
                 </c:pt>
                 <c:pt idx="4">
-                  <c:v>0.01830727511935995</c:v>
+                  <c:v>1.830727511935995E-2</c:v>
                 </c:pt>
                 <c:pt idx="5">
-                  <c:v>0.016022038728842614</c:v>
+                  <c:v>1.6022038728842614E-2</c:v>
                 </c:pt>
                 <c:pt idx="6">
-                  <c:v>0.014022060812155845</c:v>
+                  <c:v>1.4022060812155845E-2</c:v>
                 </c:pt>
                 <c:pt idx="7">
-                  <c:v>0.012271733500796439</c:v>
+                  <c:v>1.2271733500796439E-2</c:v>
                 </c:pt>
                 <c:pt idx="8">
-                  <c:v>0.010739893738302586</c:v>
+                  <c:v>1.0739893738302586E-2</c:v>
                 </c:pt>
                 <c:pt idx="9">
-                  <c:v>0.009399268449118842</c:v>
+                  <c:v>9.3992684491188416E-3</c:v>
                 </c:pt>
                 <c:pt idx="10">
-                  <c:v>0.008225988965190972</c:v>
+                  <c:v>8.2259889651909723E-3</c:v>
                 </c:pt>
                 <c:pt idx="11">
-                  <c:v>0.007199166065076867</c:v>
+                  <c:v>7.1991660650768674E-3</c:v>
                 </c:pt>
                 <c:pt idx="12">
-                  <c:v>0.006300518059514648</c:v>
+                  <c:v>6.3005180595146482E-3</c:v>
                 </c:pt>
                 <c:pt idx="13">
-                  <c:v>0.005514045301835496</c:v>
+                  <c:v>5.5140453018354962E-3</c:v>
                 </c:pt>
                 <c:pt idx="14">
-                  <c:v>0.004825745328160519</c:v>
+                  <c:v>4.8257453281605189E-3</c:v>
                 </c:pt>
                 <c:pt idx="15">
-                  <c:v>0.004223363555702242</c:v>
+                  <c:v>4.223363555702242E-3</c:v>
                 </c:pt>
                 <c:pt idx="16">
-                  <c:v>0.003696175100568966</c:v>
+                  <c:v>3.6961751005689658E-3</c:v>
                 </c:pt>
                 <c:pt idx="17">
-                  <c:v>0.0032347938305288537</c:v>
+                  <c:v>3.2347938305288537E-3</c:v>
                 </c:pt>
                 <c:pt idx="18">
-                  <c:v>0.0028310052530835517</c:v>
+                  <c:v>2.8310052530835517E-3</c:v>
                 </c:pt>
                 <c:pt idx="19">
-                  <c:v>0.00247762026356918</c:v>
+                  <c:v>2.4776202635691802E-3</c:v>
                 </c:pt>
                 <c:pt idx="20">
-                  <c:v>0.0021683471493958995</c:v>
+                  <c:v>2.1683471493958995E-3</c:v>
                 </c:pt>
                 <c:pt idx="21">
-                  <c:v>0.0018976795715741068</c:v>
+                  <c:v>1.8976795715741068E-3</c:v>
                 </c:pt>
                 <c:pt idx="22">
-                  <c:v>0.001660798529134505</c:v>
+                  <c:v>1.6607985291345051E-3</c:v>
                 </c:pt>
                 <c:pt idx="23">
-                  <c:v>0.0014534865610043302</c:v>
+                  <c:v>1.4534865610043302E-3</c:v>
                 </c:pt>
                 <c:pt idx="24">
-                  <c:v>0.0012720526577784386</c:v>
+                  <c:v>1.2720526577784386E-3</c:v>
                 </c:pt>
                 <c:pt idx="25">
-                  <c:v>0.0011132665465053704</c:v>
+                  <c:v>1.1132665465053704E-3</c:v>
                 </c:pt>
                 <c:pt idx="26">
-                  <c:v>0.000974301178484599</c:v>
+                  <c:v>9.7430117848459896E-4</c:v>
                 </c:pt>
                 <c:pt idx="27">
-                  <c:v>0.0008526823961217955</c:v>
+                  <c:v>8.5268239612179553E-4</c:v>
                 </c:pt>
                 <c:pt idx="28">
-                  <c:v>0.0007462448827034174</c:v>
+                  <c:v>7.4624488270341738E-4</c:v>
                 </c:pt>
                 <c:pt idx="29">
-                  <c:v>0.0006530936108143648</c:v>
+                  <c:v>6.5309361081436479E-4</c:v>
                 </c:pt>
               </c:numCache>
             </c:numRef>
           </c:val>
+          <c:extLst>
+            <c:ext xmlns:c16="http://schemas.microsoft.com/office/drawing/2014/chart" uri="{C3380CC4-5D6E-409C-BE32-E72D297353CC}">
+              <c16:uniqueId val="{00000000-720C-B343-8446-63FC0AAEF0D7}"/>
+            </c:ext>
+          </c:extLst>
         </c:ser>
         <c:dLbls>
-          <c:numFmt formatCode="#,##0" sourceLinked="0"/>
-          <c:txPr>
-            <a:bodyPr/>
-            <a:lstStyle/>
-            <a:p>
-              <a:pPr>
-                <a:defRPr b="0" i="0" strike="noStrike" sz="1200" u="none">
-                  <a:solidFill>
-                    <a:srgbClr val="000000"/>
-                  </a:solidFill>
-                  <a:latin typeface="Arial"/>
-                </a:defRPr>
-              </a:pPr>
-            </a:p>
-          </c:txPr>
           <c:showLegendKey val="0"/>
           <c:showVal val="0"/>
           <c:showCatName val="0"/>
           <c:showSerName val="0"/>
           <c:showPercent val="0"/>
           <c:showBubbleSize val="0"/>
-          <c:showLeaderLines val="0"/>
         </c:dLbls>
         <c:gapWidth val="6"/>
-        <c:overlap val="0"/>
         <c:axId val="2094734554"/>
         <c:axId val="2094734552"/>
-        <c:axId val="2094734556"/>
       </c:barChart>
       <c:catAx>
         <c:axId val="2094734554"/>
@@ -768,6 +627,7 @@
         <c:crosses val="autoZero"/>
         <c:auto val="1"/>
         <c:lblAlgn val="ctr"/>
+        <c:lblOffset val="100"/>
         <c:noMultiLvlLbl val="1"/>
       </c:catAx>
       <c:valAx>
@@ -832,6 +692,7 @@
     </c:plotArea>
     <c:plotVisOnly val="1"/>
     <c:dispBlanksAs val="span"/>
+    <c:showDLblsOverMax val="1"/>
   </c:chart>
   <c:spPr>
     <a:noFill/>
@@ -847,9 +708,11 @@
 </file>
 
 <file path=ppt/charts/chart3.xml><?xml version="1.0" encoding="utf-8"?>
-<c:chartSpace xmlns:c="http://schemas.openxmlformats.org/drawingml/2006/chart" xmlns:a="http://schemas.openxmlformats.org/drawingml/2006/main" xmlns:r="http://schemas.openxmlformats.org/officeDocument/2006/relationships">
+<c:chartSpace xmlns:c="http://schemas.openxmlformats.org/drawingml/2006/chart" xmlns:a="http://schemas.openxmlformats.org/drawingml/2006/main" xmlns:r="http://schemas.openxmlformats.org/officeDocument/2006/relationships" xmlns:c16r2="http://schemas.microsoft.com/office/drawing/2015/06/chart">
   <c:date1904 val="0"/>
+  <c:lang val="en-US"/>
   <c:roundedCorners val="1"/>
+  <c:style val="2"/>
   <c:chart>
     <c:title>
       <c:tx>
@@ -866,7 +729,7 @@
               </a:defRPr>
             </a:pPr>
             <a:r>
-              <a:rPr sz="1200" b="0" i="0" u="none" strike="noStrike">
+              <a:rPr lang="en-US" sz="1200" b="0" i="0" u="none" strike="noStrike">
                 <a:solidFill>
                   <a:srgbClr val="0E2148"/>
                 </a:solidFill>
@@ -877,13 +740,13 @@
           </a:p>
         </c:rich>
       </c:tx>
-      <c:layout/>
       <c:overlay val="0"/>
     </c:title>
     <c:autoTitleDeleted val="0"/>
     <c:plotArea>
       <c:layout/>
       <c:lineChart>
+        <c:grouping val="standard"/>
         <c:varyColors val="0"/>
         <c:ser>
           <c:idx val="0"/>
@@ -900,9 +763,6 @@
             </c:strRef>
           </c:tx>
           <c:spPr>
-            <a:solidFill>
-              <a:srgbClr val="2D6CDF"/>
-            </a:solidFill>
             <a:ln w="38100" cap="flat">
               <a:solidFill>
                 <a:srgbClr val="2D6CDF"/>
@@ -912,31 +772,6 @@
             </a:ln>
             <a:effectLst/>
           </c:spPr>
-          <c:invertIfNegative val="0"/>
-          <c:dLbls>
-            <c:numFmt formatCode="#,##0" sourceLinked="0"/>
-            <c:txPr>
-              <a:bodyPr/>
-              <a:lstStyle/>
-              <a:p>
-                <a:pPr>
-                  <a:defRPr b="0" i="0" strike="noStrike" sz="1200" u="none">
-                    <a:solidFill>
-                      <a:srgbClr val="000000"/>
-                    </a:solidFill>
-                    <a:latin typeface="Arial"/>
-                  </a:defRPr>
-                </a:pPr>
-              </a:p>
-            </c:txPr>
-            <c:showLegendKey val="0"/>
-            <c:showVal val="0"/>
-            <c:showCatName val="0"/>
-            <c:showSerName val="0"/>
-            <c:showPercent val="0"/>
-            <c:showBubbleSize val="0"/>
-            <c:showLeaderLines val="0"/>
-          </c:dLbls>
           <c:marker>
             <c:symbol val="circle"/>
             <c:size val="6"/>
@@ -955,197 +790,33 @@
             </c:spPr>
           </c:marker>
           <c:cat>
-            <c:multiLvlStrRef>
+            <c:strRef>
               <c:f>Sheet1!$A$2:$A$62</c:f>
-              <c:multiLvlStrCache>
+              <c:strCache>
                 <c:ptCount val="61"/>
-                <c:lvl>
-                  <c:pt idx="0">
-                    <c:v>0</c:v>
-                  </c:pt>
-                  <c:pt idx="1">
-                    <c:v/>
-                  </c:pt>
-                  <c:pt idx="2">
-                    <c:v/>
-                  </c:pt>
-                  <c:pt idx="3">
-                    <c:v/>
-                  </c:pt>
-                  <c:pt idx="4">
-                    <c:v/>
-                  </c:pt>
-                  <c:pt idx="5">
-                    <c:v/>
-                  </c:pt>
-                  <c:pt idx="6">
-                    <c:v/>
-                  </c:pt>
-                  <c:pt idx="7">
-                    <c:v/>
-                  </c:pt>
-                  <c:pt idx="8">
-                    <c:v/>
-                  </c:pt>
-                  <c:pt idx="9">
-                    <c:v/>
-                  </c:pt>
-                  <c:pt idx="10">
-                    <c:v>20</c:v>
-                  </c:pt>
-                  <c:pt idx="11">
-                    <c:v/>
-                  </c:pt>
-                  <c:pt idx="12">
-                    <c:v/>
-                  </c:pt>
-                  <c:pt idx="13">
-                    <c:v/>
-                  </c:pt>
-                  <c:pt idx="14">
-                    <c:v/>
-                  </c:pt>
-                  <c:pt idx="15">
-                    <c:v/>
-                  </c:pt>
-                  <c:pt idx="16">
-                    <c:v/>
-                  </c:pt>
-                  <c:pt idx="17">
-                    <c:v/>
-                  </c:pt>
-                  <c:pt idx="18">
-                    <c:v/>
-                  </c:pt>
-                  <c:pt idx="19">
-                    <c:v/>
-                  </c:pt>
-                  <c:pt idx="20">
-                    <c:v>40</c:v>
-                  </c:pt>
-                  <c:pt idx="21">
-                    <c:v/>
-                  </c:pt>
-                  <c:pt idx="22">
-                    <c:v/>
-                  </c:pt>
-                  <c:pt idx="23">
-                    <c:v/>
-                  </c:pt>
-                  <c:pt idx="24">
-                    <c:v/>
-                  </c:pt>
-                  <c:pt idx="25">
-                    <c:v/>
-                  </c:pt>
-                  <c:pt idx="26">
-                    <c:v/>
-                  </c:pt>
-                  <c:pt idx="27">
-                    <c:v/>
-                  </c:pt>
-                  <c:pt idx="28">
-                    <c:v/>
-                  </c:pt>
-                  <c:pt idx="29">
-                    <c:v/>
-                  </c:pt>
-                  <c:pt idx="30">
-                    <c:v>60</c:v>
-                  </c:pt>
-                  <c:pt idx="31">
-                    <c:v/>
-                  </c:pt>
-                  <c:pt idx="32">
-                    <c:v/>
-                  </c:pt>
-                  <c:pt idx="33">
-                    <c:v/>
-                  </c:pt>
-                  <c:pt idx="34">
-                    <c:v/>
-                  </c:pt>
-                  <c:pt idx="35">
-                    <c:v/>
-                  </c:pt>
-                  <c:pt idx="36">
-                    <c:v/>
-                  </c:pt>
-                  <c:pt idx="37">
-                    <c:v/>
-                  </c:pt>
-                  <c:pt idx="38">
-                    <c:v/>
-                  </c:pt>
-                  <c:pt idx="39">
-                    <c:v/>
-                  </c:pt>
-                  <c:pt idx="40">
-                    <c:v>80</c:v>
-                  </c:pt>
-                  <c:pt idx="41">
-                    <c:v/>
-                  </c:pt>
-                  <c:pt idx="42">
-                    <c:v/>
-                  </c:pt>
-                  <c:pt idx="43">
-                    <c:v/>
-                  </c:pt>
-                  <c:pt idx="44">
-                    <c:v/>
-                  </c:pt>
-                  <c:pt idx="45">
-                    <c:v/>
-                  </c:pt>
-                  <c:pt idx="46">
-                    <c:v/>
-                  </c:pt>
-                  <c:pt idx="47">
-                    <c:v/>
-                  </c:pt>
-                  <c:pt idx="48">
-                    <c:v/>
-                  </c:pt>
-                  <c:pt idx="49">
-                    <c:v/>
-                  </c:pt>
-                  <c:pt idx="50">
-                    <c:v>100</c:v>
-                  </c:pt>
-                  <c:pt idx="51">
-                    <c:v/>
-                  </c:pt>
-                  <c:pt idx="52">
-                    <c:v/>
-                  </c:pt>
-                  <c:pt idx="53">
-                    <c:v/>
-                  </c:pt>
-                  <c:pt idx="54">
-                    <c:v/>
-                  </c:pt>
-                  <c:pt idx="55">
-                    <c:v/>
-                  </c:pt>
-                  <c:pt idx="56">
-                    <c:v/>
-                  </c:pt>
-                  <c:pt idx="57">
-                    <c:v/>
-                  </c:pt>
-                  <c:pt idx="58">
-                    <c:v/>
-                  </c:pt>
-                  <c:pt idx="59">
-                    <c:v/>
-                  </c:pt>
-                  <c:pt idx="60">
-                    <c:v>120</c:v>
-                  </c:pt>
-                </c:lvl>
-              </c:multiLvlStrCache>
-            </c:multiLvlStrRef>
+                <c:pt idx="0">
+                  <c:v>0</c:v>
+                </c:pt>
+                <c:pt idx="10">
+                  <c:v>20</c:v>
+                </c:pt>
+                <c:pt idx="20">
+                  <c:v>40</c:v>
+                </c:pt>
+                <c:pt idx="30">
+                  <c:v>60</c:v>
+                </c:pt>
+                <c:pt idx="40">
+                  <c:v>80</c:v>
+                </c:pt>
+                <c:pt idx="50">
+                  <c:v>100</c:v>
+                </c:pt>
+                <c:pt idx="60">
+                  <c:v>120</c:v>
+                </c:pt>
+              </c:strCache>
+            </c:strRef>
           </c:cat>
           <c:val>
             <c:numRef>
@@ -1157,7 +828,7 @@
                   <c:v>0</c:v>
                 </c:pt>
                 <c:pt idx="1">
-                  <c:v>0.06449301496838222</c:v>
+                  <c:v>6.4493014968382223E-2</c:v>
                 </c:pt>
                 <c:pt idx="2">
                   <c:v>0.12482668095705252</c:v>
@@ -1166,82 +837,82 @@
                   <c:v>0.18126924692201818</c:v>
                 </c:pt>
                 <c:pt idx="4">
-                  <c:v>0.2340716616353513</c:v>
+                  <c:v>0.23407166163535131</c:v>
                 </c:pt>
                 <c:pt idx="5">
                   <c:v>0.28346868942621073</c:v>
                 </c:pt>
                 <c:pt idx="6">
-                  <c:v>0.3296799539643607</c:v>
+                  <c:v>0.32967995396436067</c:v>
                 </c:pt>
                 <c:pt idx="7">
-                  <c:v>0.3729109147269438</c:v>
+                  <c:v>0.37291091472694382</c:v>
                 </c:pt>
                 <c:pt idx="8">
-                  <c:v>0.4133537804899682</c:v>
+                  <c:v>0.41335378048996818</c:v>
                 </c:pt>
                 <c:pt idx="9">
                   <c:v>0.4511883639059735</c:v>
                 </c:pt>
                 <c:pt idx="10">
-                  <c:v>0.486582880967408</c:v>
+                  <c:v>0.48658288096740798</c:v>
                 </c:pt>
                 <c:pt idx="11">
-                  <c:v>0.5196946989102006</c:v>
+                  <c:v>0.51969469891020059</c:v>
                 </c:pt>
                 <c:pt idx="12">
-                  <c:v>0.5506710358827784</c:v>
+                  <c:v>0.55067103588277844</c:v>
                 </c:pt>
                 <c:pt idx="13">
                   <c:v>0.5796496154913181</c:v>
                 </c:pt>
                 <c:pt idx="14">
-                  <c:v>0.6067592791314018</c:v>
+                  <c:v>0.60675927913140182</c:v>
                 </c:pt>
                 <c:pt idx="15">
-                  <c:v>0.6321205588285577</c:v>
+                  <c:v>0.63212055882855767</c:v>
                 </c:pt>
                 <c:pt idx="16">
-                  <c:v>0.6558462131345876</c:v>
+                  <c:v>0.65584621313458757</c:v>
                 </c:pt>
                 <c:pt idx="17">
-                  <c:v>0.6780417284623241</c:v>
+                  <c:v>0.67804172846232413</c:v>
                 </c:pt>
                 <c:pt idx="18">
-                  <c:v>0.6988057880877979</c:v>
+                  <c:v>0.69880578808779792</c:v>
                 </c:pt>
                 <c:pt idx="19">
-                  <c:v>0.7182307109050416</c:v>
+                  <c:v>0.71823071090504165</c:v>
                 </c:pt>
                 <c:pt idx="20">
-                  <c:v>0.7364028618842733</c:v>
+                  <c:v>0.73640286188427329</c:v>
                 </c:pt>
                 <c:pt idx="21">
-                  <c:v>0.7534030360583935</c:v>
+                  <c:v>0.75340303605839354</c:v>
                 </c:pt>
                 <c:pt idx="22">
-                  <c:v>0.7693068177450372</c:v>
+                  <c:v>0.76930681774503717</c:v>
                 </c:pt>
                 <c:pt idx="23">
-                  <c:v>0.7841849166013102</c:v>
+                  <c:v>0.78418491660131018</c:v>
                 </c:pt>
                 <c:pt idx="24">
-                  <c:v>0.7981034820053446</c:v>
+                  <c:v>0.79810348200534464</c:v>
                 </c:pt>
                 <c:pt idx="25">
-                  <c:v>0.8111243971624382</c:v>
+                  <c:v>0.81112439716243823</c:v>
                 </c:pt>
                 <c:pt idx="26">
-                  <c:v>0.8233055542434032</c:v>
+                  <c:v>0.82330555424340324</c:v>
                 </c:pt>
                 <c:pt idx="27">
-                  <c:v>0.8347011117784134</c:v>
+                  <c:v>0.83470111177841344</c:v>
                 </c:pt>
                 <c:pt idx="28">
-                  <c:v>0.8453617354507452</c:v>
+                  <c:v>0.84536173545074522</c:v>
                 </c:pt>
                 <c:pt idx="29">
-                  <c:v>0.855334823361005</c:v>
+                  <c:v>0.85533482336100497</c:v>
                 </c:pt>
                 <c:pt idx="30">
                   <c:v>0.8646647167633873</c:v>
@@ -1250,125 +921,114 @@
                   <c:v>0.8733928972109164</c:v>
                 </c:pt>
                 <c:pt idx="32">
-                  <c:v>0.8815581709861963</c:v>
+                  <c:v>0.88155817098619627</c:v>
                 </c:pt>
                 <c:pt idx="33">
                   <c:v>0.8891968416376661</c:v>
                 </c:pt>
                 <c:pt idx="34">
-                  <c:v>0.8963428713884721</c:v>
+                  <c:v>0.89634287138847213</c:v>
                 </c:pt>
                 <c:pt idx="35">
                   <c:v>0.9030280321355949</c:v>
                 </c:pt>
                 <c:pt idx="36">
-                  <c:v>0.9092820467105875</c:v>
+                  <c:v>0.90928204671058754</c:v>
                 </c:pt>
                 <c:pt idx="37">
-                  <c:v>0.9151327210299826</c:v>
+                  <c:v>0.91513272102998255</c:v>
                 </c:pt>
                 <c:pt idx="38">
-                  <c:v>0.9206060677229218</c:v>
+                  <c:v>0.92060606772292175</c:v>
                 </c:pt>
                 <c:pt idx="39">
-                  <c:v>0.9257264217856661</c:v>
+                  <c:v>0.92572642178566611</c:v>
                 </c:pt>
                 <c:pt idx="40">
-                  <c:v>0.9305165487771985</c:v>
+                  <c:v>0.93051654877719847</c:v>
                 </c:pt>
                 <c:pt idx="41">
                   <c:v>0.9349977460369655</c:v>
                 </c:pt>
                 <c:pt idx="42">
-                  <c:v>0.9391899373747821</c:v>
+                  <c:v>0.93918993737478207</c:v>
                 </c:pt>
                 <c:pt idx="43">
-                  <c:v>0.9431117616538984</c:v>
+                  <c:v>0.94311176165389843</c:v>
                 </c:pt>
                 <c:pt idx="44">
                   <c:v>0.9467806556610785</c:v>
                 </c:pt>
                 <c:pt idx="45">
-                  <c:v>0.950212931632136</c:v>
+                  <c:v>0.95021293163213605</c:v>
                 </c:pt>
                 <c:pt idx="46">
-                  <c:v>0.9534238497776165</c:v>
+                  <c:v>0.95342384977761652</c:v>
                 </c:pt>
                 <c:pt idx="47">
-                  <c:v>0.9564276861310783</c:v>
+                  <c:v>0.95642768613107831</c:v>
                 </c:pt>
                 <c:pt idx="48">
-                  <c:v>0.9592377960216338</c:v>
+                  <c:v>0.95923779602163384</c:v>
                 </c:pt>
                 <c:pt idx="49">
-                  <c:v>0.9618666734529548</c:v>
+                  <c:v>0.96186667345295485</c:v>
                 </c:pt>
                 <c:pt idx="50">
-                  <c:v>0.9643260066527476</c:v>
+                  <c:v>0.96432600665274759</c:v>
                 </c:pt>
                 <c:pt idx="51">
-                  <c:v>0.9666267300396739</c:v>
+                  <c:v>0.96662673003967392</c:v>
                 </c:pt>
                 <c:pt idx="52">
-                  <c:v>0.9687790728387691</c:v>
+                  <c:v>0.96877907283876907</c:v>
                 </c:pt>
                 <c:pt idx="53">
-                  <c:v>0.9707926045615052</c:v>
+                  <c:v>0.97079260456150518</c:v>
                 </c:pt>
                 <c:pt idx="54">
-                  <c:v>0.9726762775527075</c:v>
+                  <c:v>0.97267627755270747</c:v>
                 </c:pt>
                 <c:pt idx="55">
-                  <c:v>0.9744384667934926</c:v>
+                  <c:v>0.97443846679349255</c:v>
                 </c:pt>
                 <c:pt idx="56">
-                  <c:v>0.9760870071371947</c:v>
+                  <c:v>0.97608700713719465</c:v>
                 </c:pt>
                 <c:pt idx="57">
-                  <c:v>0.9776292281438344</c:v>
+                  <c:v>0.97762922814383435</c:v>
                 </c:pt>
                 <c:pt idx="58">
-                  <c:v>0.9790719866680083</c:v>
+                  <c:v>0.97907198666800832</c:v>
                 </c:pt>
                 <c:pt idx="59">
                   <c:v>0.980421697345087</c:v>
                 </c:pt>
                 <c:pt idx="60">
-                  <c:v>0.9816843611112658</c:v>
+                  <c:v>0.98168436111126578</c:v>
                 </c:pt>
               </c:numCache>
             </c:numRef>
           </c:val>
           <c:smooth val="1"/>
+          <c:extLst>
+            <c:ext xmlns:c16="http://schemas.microsoft.com/office/drawing/2014/chart" uri="{C3380CC4-5D6E-409C-BE32-E72D297353CC}">
+              <c16:uniqueId val="{00000000-4335-6749-95A6-916762DE4DD8}"/>
+            </c:ext>
+          </c:extLst>
         </c:ser>
         <c:dLbls>
-          <c:numFmt formatCode="#,##0" sourceLinked="0"/>
-          <c:txPr>
-            <a:bodyPr/>
-            <a:lstStyle/>
-            <a:p>
-              <a:pPr>
-                <a:defRPr b="0" i="0" strike="noStrike" sz="1200" u="none">
-                  <a:solidFill>
-                    <a:srgbClr val="000000"/>
-                  </a:solidFill>
-                  <a:latin typeface="Arial"/>
-                </a:defRPr>
-              </a:pPr>
-            </a:p>
-          </c:txPr>
           <c:showLegendKey val="0"/>
           <c:showVal val="0"/>
           <c:showCatName val="0"/>
           <c:showSerName val="0"/>
           <c:showPercent val="0"/>
           <c:showBubbleSize val="0"/>
-          <c:showLeaderLines val="0"/>
         </c:dLbls>
         <c:marker val="1"/>
+        <c:smooth val="0"/>
         <c:axId val="2094734554"/>
         <c:axId val="2094734552"/>
-        <c:axId val="2094734556"/>
       </c:lineChart>
       <c:catAx>
         <c:axId val="2094734554"/>
@@ -1392,7 +1052,7 @@
                   </a:defRPr>
                 </a:pPr>
                 <a:r>
-                  <a:rPr sz="1000" b="0" i="0" u="none" strike="noStrike">
+                  <a:rPr lang="en-US" sz="1000" b="0" i="0" u="none" strike="noStrike">
                     <a:solidFill>
                       <a:srgbClr val="6B7C99"/>
                     </a:solidFill>
@@ -1403,7 +1063,6 @@
               </a:p>
             </c:rich>
           </c:tx>
-          <c:layout/>
           <c:overlay val="0"/>
         </c:title>
         <c:numFmt formatCode="General" sourceLinked="1"/>
@@ -1438,6 +1097,7 @@
         <c:crosses val="autoZero"/>
         <c:auto val="1"/>
         <c:lblAlgn val="ctr"/>
+        <c:lblOffset val="100"/>
         <c:noMultiLvlLbl val="1"/>
       </c:catAx>
       <c:valAx>
@@ -1504,6 +1164,7 @@
     </c:plotArea>
     <c:plotVisOnly val="1"/>
     <c:dispBlanksAs val="span"/>
+    <c:showDLblsOverMax val="1"/>
   </c:chart>
   <c:spPr>
     <a:noFill/>
@@ -1519,9 +1180,11 @@
 </file>
 
 <file path=ppt/charts/chart4.xml><?xml version="1.0" encoding="utf-8"?>
-<c:chartSpace xmlns:c="http://schemas.openxmlformats.org/drawingml/2006/chart" xmlns:a="http://schemas.openxmlformats.org/drawingml/2006/main" xmlns:r="http://schemas.openxmlformats.org/officeDocument/2006/relationships">
+<c:chartSpace xmlns:c="http://schemas.openxmlformats.org/drawingml/2006/chart" xmlns:a="http://schemas.openxmlformats.org/drawingml/2006/main" xmlns:r="http://schemas.openxmlformats.org/officeDocument/2006/relationships" xmlns:c16r2="http://schemas.microsoft.com/office/drawing/2015/06/chart">
   <c:date1904 val="0"/>
+  <c:lang val="en-US"/>
   <c:roundedCorners val="1"/>
+  <c:style val="2"/>
   <c:chart>
     <c:title>
       <c:tx>
@@ -1538,7 +1201,7 @@
               </a:defRPr>
             </a:pPr>
             <a:r>
-              <a:rPr sz="1200" b="0" i="0" u="none" strike="noStrike">
+              <a:rPr lang="en-US" sz="1200" b="0" i="0" u="none" strike="noStrike">
                 <a:solidFill>
                   <a:srgbClr val="0E2148"/>
                 </a:solidFill>
@@ -1549,13 +1212,13 @@
           </a:p>
         </c:rich>
       </c:tx>
-      <c:layout/>
       <c:overlay val="0"/>
     </c:title>
     <c:autoTitleDeleted val="0"/>
     <c:plotArea>
       <c:layout/>
       <c:lineChart>
+        <c:grouping val="standard"/>
         <c:varyColors val="0"/>
         <c:ser>
           <c:idx val="0"/>
@@ -1572,9 +1235,6 @@
             </c:strRef>
           </c:tx>
           <c:spPr>
-            <a:solidFill>
-              <a:srgbClr val="2D6CDF"/>
-            </a:solidFill>
             <a:ln w="38100" cap="flat">
               <a:solidFill>
                 <a:srgbClr val="2D6CDF"/>
@@ -1584,31 +1244,6 @@
             </a:ln>
             <a:effectLst/>
           </c:spPr>
-          <c:invertIfNegative val="0"/>
-          <c:dLbls>
-            <c:numFmt formatCode="#,##0" sourceLinked="0"/>
-            <c:txPr>
-              <a:bodyPr/>
-              <a:lstStyle/>
-              <a:p>
-                <a:pPr>
-                  <a:defRPr b="0" i="0" strike="noStrike" sz="1200" u="none">
-                    <a:solidFill>
-                      <a:srgbClr val="000000"/>
-                    </a:solidFill>
-                    <a:latin typeface="Arial"/>
-                  </a:defRPr>
-                </a:pPr>
-              </a:p>
-            </c:txPr>
-            <c:showLegendKey val="0"/>
-            <c:showVal val="0"/>
-            <c:showCatName val="0"/>
-            <c:showSerName val="0"/>
-            <c:showPercent val="0"/>
-            <c:showBubbleSize val="0"/>
-            <c:showLeaderLines val="0"/>
-          </c:dLbls>
           <c:marker>
             <c:symbol val="circle"/>
             <c:size val="6"/>
@@ -1627,161 +1262,33 @@
             </c:spPr>
           </c:marker>
           <c:cat>
-            <c:multiLvlStrRef>
+            <c:strRef>
               <c:f>Sheet1!$A$2:$A$50</c:f>
-              <c:multiLvlStrCache>
+              <c:strCache>
                 <c:ptCount val="49"/>
-                <c:lvl>
-                  <c:pt idx="0">
-                    <c:v>0.0</c:v>
-                  </c:pt>
-                  <c:pt idx="1">
-                    <c:v/>
-                  </c:pt>
-                  <c:pt idx="2">
-                    <c:v/>
-                  </c:pt>
-                  <c:pt idx="3">
-                    <c:v/>
-                  </c:pt>
-                  <c:pt idx="4">
-                    <c:v/>
-                  </c:pt>
-                  <c:pt idx="5">
-                    <c:v/>
-                  </c:pt>
-                  <c:pt idx="6">
-                    <c:v/>
-                  </c:pt>
-                  <c:pt idx="7">
-                    <c:v/>
-                  </c:pt>
-                  <c:pt idx="8">
-                    <c:v>0.2</c:v>
-                  </c:pt>
-                  <c:pt idx="9">
-                    <c:v/>
-                  </c:pt>
-                  <c:pt idx="10">
-                    <c:v/>
-                  </c:pt>
-                  <c:pt idx="11">
-                    <c:v/>
-                  </c:pt>
-                  <c:pt idx="12">
-                    <c:v/>
-                  </c:pt>
-                  <c:pt idx="13">
-                    <c:v/>
-                  </c:pt>
-                  <c:pt idx="14">
-                    <c:v/>
-                  </c:pt>
-                  <c:pt idx="15">
-                    <c:v/>
-                  </c:pt>
-                  <c:pt idx="16">
-                    <c:v>0.4</c:v>
-                  </c:pt>
-                  <c:pt idx="17">
-                    <c:v/>
-                  </c:pt>
-                  <c:pt idx="18">
-                    <c:v/>
-                  </c:pt>
-                  <c:pt idx="19">
-                    <c:v/>
-                  </c:pt>
-                  <c:pt idx="20">
-                    <c:v/>
-                  </c:pt>
-                  <c:pt idx="21">
-                    <c:v/>
-                  </c:pt>
-                  <c:pt idx="22">
-                    <c:v/>
-                  </c:pt>
-                  <c:pt idx="23">
-                    <c:v/>
-                  </c:pt>
-                  <c:pt idx="24">
-                    <c:v>0.6</c:v>
-                  </c:pt>
-                  <c:pt idx="25">
-                    <c:v/>
-                  </c:pt>
-                  <c:pt idx="26">
-                    <c:v/>
-                  </c:pt>
-                  <c:pt idx="27">
-                    <c:v/>
-                  </c:pt>
-                  <c:pt idx="28">
-                    <c:v/>
-                  </c:pt>
-                  <c:pt idx="29">
-                    <c:v/>
-                  </c:pt>
-                  <c:pt idx="30">
-                    <c:v/>
-                  </c:pt>
-                  <c:pt idx="31">
-                    <c:v/>
-                  </c:pt>
-                  <c:pt idx="32">
-                    <c:v>0.8</c:v>
-                  </c:pt>
-                  <c:pt idx="33">
-                    <c:v/>
-                  </c:pt>
-                  <c:pt idx="34">
-                    <c:v/>
-                  </c:pt>
-                  <c:pt idx="35">
-                    <c:v/>
-                  </c:pt>
-                  <c:pt idx="36">
-                    <c:v/>
-                  </c:pt>
-                  <c:pt idx="37">
-                    <c:v/>
-                  </c:pt>
-                  <c:pt idx="38">
-                    <c:v/>
-                  </c:pt>
-                  <c:pt idx="39">
-                    <c:v/>
-                  </c:pt>
-                  <c:pt idx="40">
-                    <c:v>1.0</c:v>
-                  </c:pt>
-                  <c:pt idx="41">
-                    <c:v/>
-                  </c:pt>
-                  <c:pt idx="42">
-                    <c:v/>
-                  </c:pt>
-                  <c:pt idx="43">
-                    <c:v/>
-                  </c:pt>
-                  <c:pt idx="44">
-                    <c:v/>
-                  </c:pt>
-                  <c:pt idx="45">
-                    <c:v/>
-                  </c:pt>
-                  <c:pt idx="46">
-                    <c:v/>
-                  </c:pt>
-                  <c:pt idx="47">
-                    <c:v/>
-                  </c:pt>
-                  <c:pt idx="48">
-                    <c:v>1.2</c:v>
-                  </c:pt>
-                </c:lvl>
-              </c:multiLvlStrCache>
-            </c:multiLvlStrRef>
+                <c:pt idx="0">
+                  <c:v>0.0</c:v>
+                </c:pt>
+                <c:pt idx="8">
+                  <c:v>0.2</c:v>
+                </c:pt>
+                <c:pt idx="16">
+                  <c:v>0.4</c:v>
+                </c:pt>
+                <c:pt idx="24">
+                  <c:v>0.6</c:v>
+                </c:pt>
+                <c:pt idx="32">
+                  <c:v>0.8</c:v>
+                </c:pt>
+                <c:pt idx="40">
+                  <c:v>1.0</c:v>
+                </c:pt>
+                <c:pt idx="48">
+                  <c:v>1.2</c:v>
+                </c:pt>
+              </c:strCache>
+            </c:strRef>
           </c:cat>
           <c:val>
             <c:numRef>
@@ -1940,6 +1447,11 @@
             </c:numRef>
           </c:val>
           <c:smooth val="0"/>
+          <c:extLst>
+            <c:ext xmlns:c16="http://schemas.microsoft.com/office/drawing/2014/chart" uri="{C3380CC4-5D6E-409C-BE32-E72D297353CC}">
+              <c16:uniqueId val="{00000000-E808-F84B-AC35-8B6D64603619}"/>
+            </c:ext>
+          </c:extLst>
         </c:ser>
         <c:ser>
           <c:idx val="1"/>
@@ -1956,9 +1468,6 @@
             </c:strRef>
           </c:tx>
           <c:spPr>
-            <a:solidFill>
-              <a:srgbClr val="E23C8A"/>
-            </a:solidFill>
             <a:ln w="38100" cap="flat">
               <a:solidFill>
                 <a:srgbClr val="E23C8A"/>
@@ -1968,31 +1477,6 @@
             </a:ln>
             <a:effectLst/>
           </c:spPr>
-          <c:invertIfNegative val="0"/>
-          <c:dLbls>
-            <c:numFmt formatCode="#,##0" sourceLinked="0"/>
-            <c:txPr>
-              <a:bodyPr/>
-              <a:lstStyle/>
-              <a:p>
-                <a:pPr>
-                  <a:defRPr b="0" i="0" strike="noStrike" sz="1200" u="none">
-                    <a:solidFill>
-                      <a:srgbClr val="000000"/>
-                    </a:solidFill>
-                    <a:latin typeface="Arial"/>
-                  </a:defRPr>
-                </a:pPr>
-              </a:p>
-            </c:txPr>
-            <c:showLegendKey val="0"/>
-            <c:showVal val="0"/>
-            <c:showCatName val="0"/>
-            <c:showSerName val="0"/>
-            <c:showPercent val="0"/>
-            <c:showBubbleSize val="0"/>
-            <c:showLeaderLines val="0"/>
-          </c:dLbls>
           <c:marker>
             <c:symbol val="circle"/>
             <c:size val="6"/>
@@ -2011,161 +1495,33 @@
             </c:spPr>
           </c:marker>
           <c:cat>
-            <c:multiLvlStrRef>
+            <c:strRef>
               <c:f>Sheet1!$A$2:$A$50</c:f>
-              <c:multiLvlStrCache>
+              <c:strCache>
                 <c:ptCount val="49"/>
-                <c:lvl>
-                  <c:pt idx="0">
-                    <c:v>0.0</c:v>
-                  </c:pt>
-                  <c:pt idx="1">
-                    <c:v/>
-                  </c:pt>
-                  <c:pt idx="2">
-                    <c:v/>
-                  </c:pt>
-                  <c:pt idx="3">
-                    <c:v/>
-                  </c:pt>
-                  <c:pt idx="4">
-                    <c:v/>
-                  </c:pt>
-                  <c:pt idx="5">
-                    <c:v/>
-                  </c:pt>
-                  <c:pt idx="6">
-                    <c:v/>
-                  </c:pt>
-                  <c:pt idx="7">
-                    <c:v/>
-                  </c:pt>
-                  <c:pt idx="8">
-                    <c:v>0.2</c:v>
-                  </c:pt>
-                  <c:pt idx="9">
-                    <c:v/>
-                  </c:pt>
-                  <c:pt idx="10">
-                    <c:v/>
-                  </c:pt>
-                  <c:pt idx="11">
-                    <c:v/>
-                  </c:pt>
-                  <c:pt idx="12">
-                    <c:v/>
-                  </c:pt>
-                  <c:pt idx="13">
-                    <c:v/>
-                  </c:pt>
-                  <c:pt idx="14">
-                    <c:v/>
-                  </c:pt>
-                  <c:pt idx="15">
-                    <c:v/>
-                  </c:pt>
-                  <c:pt idx="16">
-                    <c:v>0.4</c:v>
-                  </c:pt>
-                  <c:pt idx="17">
-                    <c:v/>
-                  </c:pt>
-                  <c:pt idx="18">
-                    <c:v/>
-                  </c:pt>
-                  <c:pt idx="19">
-                    <c:v/>
-                  </c:pt>
-                  <c:pt idx="20">
-                    <c:v/>
-                  </c:pt>
-                  <c:pt idx="21">
-                    <c:v/>
-                  </c:pt>
-                  <c:pt idx="22">
-                    <c:v/>
-                  </c:pt>
-                  <c:pt idx="23">
-                    <c:v/>
-                  </c:pt>
-                  <c:pt idx="24">
-                    <c:v>0.6</c:v>
-                  </c:pt>
-                  <c:pt idx="25">
-                    <c:v/>
-                  </c:pt>
-                  <c:pt idx="26">
-                    <c:v/>
-                  </c:pt>
-                  <c:pt idx="27">
-                    <c:v/>
-                  </c:pt>
-                  <c:pt idx="28">
-                    <c:v/>
-                  </c:pt>
-                  <c:pt idx="29">
-                    <c:v/>
-                  </c:pt>
-                  <c:pt idx="30">
-                    <c:v/>
-                  </c:pt>
-                  <c:pt idx="31">
-                    <c:v/>
-                  </c:pt>
-                  <c:pt idx="32">
-                    <c:v>0.8</c:v>
-                  </c:pt>
-                  <c:pt idx="33">
-                    <c:v/>
-                  </c:pt>
-                  <c:pt idx="34">
-                    <c:v/>
-                  </c:pt>
-                  <c:pt idx="35">
-                    <c:v/>
-                  </c:pt>
-                  <c:pt idx="36">
-                    <c:v/>
-                  </c:pt>
-                  <c:pt idx="37">
-                    <c:v/>
-                  </c:pt>
-                  <c:pt idx="38">
-                    <c:v/>
-                  </c:pt>
-                  <c:pt idx="39">
-                    <c:v/>
-                  </c:pt>
-                  <c:pt idx="40">
-                    <c:v>1.0</c:v>
-                  </c:pt>
-                  <c:pt idx="41">
-                    <c:v/>
-                  </c:pt>
-                  <c:pt idx="42">
-                    <c:v/>
-                  </c:pt>
-                  <c:pt idx="43">
-                    <c:v/>
-                  </c:pt>
-                  <c:pt idx="44">
-                    <c:v/>
-                  </c:pt>
-                  <c:pt idx="45">
-                    <c:v/>
-                  </c:pt>
-                  <c:pt idx="46">
-                    <c:v/>
-                  </c:pt>
-                  <c:pt idx="47">
-                    <c:v/>
-                  </c:pt>
-                  <c:pt idx="48">
-                    <c:v>1.2</c:v>
-                  </c:pt>
-                </c:lvl>
-              </c:multiLvlStrCache>
-            </c:multiLvlStrRef>
+                <c:pt idx="0">
+                  <c:v>0.0</c:v>
+                </c:pt>
+                <c:pt idx="8">
+                  <c:v>0.2</c:v>
+                </c:pt>
+                <c:pt idx="16">
+                  <c:v>0.4</c:v>
+                </c:pt>
+                <c:pt idx="24">
+                  <c:v>0.6</c:v>
+                </c:pt>
+                <c:pt idx="32">
+                  <c:v>0.8</c:v>
+                </c:pt>
+                <c:pt idx="40">
+                  <c:v>1.0</c:v>
+                </c:pt>
+                <c:pt idx="48">
+                  <c:v>1.2</c:v>
+                </c:pt>
+              </c:strCache>
+            </c:strRef>
           </c:cat>
           <c:val>
             <c:numRef>
@@ -2324,35 +1680,24 @@
             </c:numRef>
           </c:val>
           <c:smooth val="0"/>
+          <c:extLst>
+            <c:ext xmlns:c16="http://schemas.microsoft.com/office/drawing/2014/chart" uri="{C3380CC4-5D6E-409C-BE32-E72D297353CC}">
+              <c16:uniqueId val="{00000001-E808-F84B-AC35-8B6D64603619}"/>
+            </c:ext>
+          </c:extLst>
         </c:ser>
         <c:dLbls>
-          <c:numFmt formatCode="#,##0" sourceLinked="0"/>
-          <c:txPr>
-            <a:bodyPr/>
-            <a:lstStyle/>
-            <a:p>
-              <a:pPr>
-                <a:defRPr b="0" i="0" strike="noStrike" sz="1200" u="none">
-                  <a:solidFill>
-                    <a:srgbClr val="000000"/>
-                  </a:solidFill>
-                  <a:latin typeface="Arial"/>
-                </a:defRPr>
-              </a:pPr>
-            </a:p>
-          </c:txPr>
           <c:showLegendKey val="0"/>
           <c:showVal val="0"/>
           <c:showCatName val="0"/>
           <c:showSerName val="0"/>
           <c:showPercent val="0"/>
           <c:showBubbleSize val="0"/>
-          <c:showLeaderLines val="0"/>
         </c:dLbls>
         <c:marker val="1"/>
+        <c:smooth val="0"/>
         <c:axId val="2094734554"/>
         <c:axId val="2094734552"/>
-        <c:axId val="2094734556"/>
       </c:lineChart>
       <c:catAx>
         <c:axId val="2094734554"/>
@@ -2393,6 +1738,7 @@
         <c:crosses val="autoZero"/>
         <c:auto val="1"/>
         <c:lblAlgn val="ctr"/>
+        <c:lblOffset val="100"/>
         <c:noMultiLvlLbl val="1"/>
       </c:catAx>
       <c:valAx>
@@ -2479,6 +1825,7 @@
     </c:legend>
     <c:plotVisOnly val="1"/>
     <c:dispBlanksAs val="span"/>
+    <c:showDLblsOverMax val="1"/>
   </c:chart>
   <c:spPr>
     <a:noFill/>
@@ -2494,9 +1841,11 @@
 </file>
 
 <file path=ppt/charts/chart5.xml><?xml version="1.0" encoding="utf-8"?>
-<c:chartSpace xmlns:c="http://schemas.openxmlformats.org/drawingml/2006/chart" xmlns:a="http://schemas.openxmlformats.org/drawingml/2006/main" xmlns:r="http://schemas.openxmlformats.org/officeDocument/2006/relationships">
+<c:chartSpace xmlns:c="http://schemas.openxmlformats.org/drawingml/2006/chart" xmlns:a="http://schemas.openxmlformats.org/drawingml/2006/main" xmlns:r="http://schemas.openxmlformats.org/officeDocument/2006/relationships" xmlns:c16r2="http://schemas.microsoft.com/office/drawing/2015/06/chart">
   <c:date1904 val="0"/>
+  <c:lang val="en-US"/>
   <c:roundedCorners val="1"/>
+  <c:style val="2"/>
   <c:chart>
     <c:title>
       <c:tx>
@@ -2513,7 +1862,7 @@
               </a:defRPr>
             </a:pPr>
             <a:r>
-              <a:rPr sz="1200" b="0" i="0" u="none" strike="noStrike">
+              <a:rPr lang="en-US" sz="1200" b="0" i="0" u="none" strike="noStrike">
                 <a:solidFill>
                   <a:srgbClr val="0E2148"/>
                 </a:solidFill>
@@ -2524,13 +1873,13 @@
           </a:p>
         </c:rich>
       </c:tx>
-      <c:layout/>
       <c:overlay val="0"/>
     </c:title>
     <c:autoTitleDeleted val="0"/>
     <c:plotArea>
       <c:layout/>
       <c:lineChart>
+        <c:grouping val="standard"/>
         <c:varyColors val="0"/>
         <c:ser>
           <c:idx val="0"/>
@@ -2547,9 +1896,6 @@
             </c:strRef>
           </c:tx>
           <c:spPr>
-            <a:solidFill>
-              <a:srgbClr val="2D6CDF"/>
-            </a:solidFill>
             <a:ln w="31750" cap="flat">
               <a:solidFill>
                 <a:srgbClr val="2D6CDF"/>
@@ -2559,31 +1905,6 @@
             </a:ln>
             <a:effectLst/>
           </c:spPr>
-          <c:invertIfNegative val="0"/>
-          <c:dLbls>
-            <c:numFmt formatCode="#,##0" sourceLinked="0"/>
-            <c:txPr>
-              <a:bodyPr/>
-              <a:lstStyle/>
-              <a:p>
-                <a:pPr>
-                  <a:defRPr b="0" i="0" strike="noStrike" sz="1200" u="none">
-                    <a:solidFill>
-                      <a:srgbClr val="000000"/>
-                    </a:solidFill>
-                    <a:latin typeface="Arial"/>
-                  </a:defRPr>
-                </a:pPr>
-              </a:p>
-            </c:txPr>
-            <c:showLegendKey val="0"/>
-            <c:showVal val="0"/>
-            <c:showCatName val="0"/>
-            <c:showSerName val="0"/>
-            <c:showPercent val="0"/>
-            <c:showBubbleSize val="0"/>
-            <c:showLeaderLines val="0"/>
-          </c:dLbls>
           <c:marker>
             <c:symbol val="circle"/>
             <c:size val="6"/>
@@ -2602,167 +1923,30 @@
             </c:spPr>
           </c:marker>
           <c:cat>
-            <c:multiLvlStrRef>
+            <c:strRef>
               <c:f>Sheet1!$A$2:$A$52</c:f>
-              <c:multiLvlStrCache>
+              <c:strCache>
                 <c:ptCount val="51"/>
-                <c:lvl>
-                  <c:pt idx="0">
-                    <c:v>0</c:v>
-                  </c:pt>
-                  <c:pt idx="1">
-                    <c:v/>
-                  </c:pt>
-                  <c:pt idx="2">
-                    <c:v/>
-                  </c:pt>
-                  <c:pt idx="3">
-                    <c:v/>
-                  </c:pt>
-                  <c:pt idx="4">
-                    <c:v/>
-                  </c:pt>
-                  <c:pt idx="5">
-                    <c:v/>
-                  </c:pt>
-                  <c:pt idx="6">
-                    <c:v/>
-                  </c:pt>
-                  <c:pt idx="7">
-                    <c:v/>
-                  </c:pt>
-                  <c:pt idx="8">
-                    <c:v/>
-                  </c:pt>
-                  <c:pt idx="9">
-                    <c:v/>
-                  </c:pt>
-                  <c:pt idx="10">
-                    <c:v>20</c:v>
-                  </c:pt>
-                  <c:pt idx="11">
-                    <c:v/>
-                  </c:pt>
-                  <c:pt idx="12">
-                    <c:v/>
-                  </c:pt>
-                  <c:pt idx="13">
-                    <c:v/>
-                  </c:pt>
-                  <c:pt idx="14">
-                    <c:v/>
-                  </c:pt>
-                  <c:pt idx="15">
-                    <c:v/>
-                  </c:pt>
-                  <c:pt idx="16">
-                    <c:v/>
-                  </c:pt>
-                  <c:pt idx="17">
-                    <c:v/>
-                  </c:pt>
-                  <c:pt idx="18">
-                    <c:v/>
-                  </c:pt>
-                  <c:pt idx="19">
-                    <c:v/>
-                  </c:pt>
-                  <c:pt idx="20">
-                    <c:v>40</c:v>
-                  </c:pt>
-                  <c:pt idx="21">
-                    <c:v/>
-                  </c:pt>
-                  <c:pt idx="22">
-                    <c:v/>
-                  </c:pt>
-                  <c:pt idx="23">
-                    <c:v/>
-                  </c:pt>
-                  <c:pt idx="24">
-                    <c:v/>
-                  </c:pt>
-                  <c:pt idx="25">
-                    <c:v/>
-                  </c:pt>
-                  <c:pt idx="26">
-                    <c:v/>
-                  </c:pt>
-                  <c:pt idx="27">
-                    <c:v/>
-                  </c:pt>
-                  <c:pt idx="28">
-                    <c:v/>
-                  </c:pt>
-                  <c:pt idx="29">
-                    <c:v/>
-                  </c:pt>
-                  <c:pt idx="30">
-                    <c:v>60</c:v>
-                  </c:pt>
-                  <c:pt idx="31">
-                    <c:v/>
-                  </c:pt>
-                  <c:pt idx="32">
-                    <c:v/>
-                  </c:pt>
-                  <c:pt idx="33">
-                    <c:v/>
-                  </c:pt>
-                  <c:pt idx="34">
-                    <c:v/>
-                  </c:pt>
-                  <c:pt idx="35">
-                    <c:v/>
-                  </c:pt>
-                  <c:pt idx="36">
-                    <c:v/>
-                  </c:pt>
-                  <c:pt idx="37">
-                    <c:v/>
-                  </c:pt>
-                  <c:pt idx="38">
-                    <c:v/>
-                  </c:pt>
-                  <c:pt idx="39">
-                    <c:v/>
-                  </c:pt>
-                  <c:pt idx="40">
-                    <c:v>80</c:v>
-                  </c:pt>
-                  <c:pt idx="41">
-                    <c:v/>
-                  </c:pt>
-                  <c:pt idx="42">
-                    <c:v/>
-                  </c:pt>
-                  <c:pt idx="43">
-                    <c:v/>
-                  </c:pt>
-                  <c:pt idx="44">
-                    <c:v/>
-                  </c:pt>
-                  <c:pt idx="45">
-                    <c:v/>
-                  </c:pt>
-                  <c:pt idx="46">
-                    <c:v/>
-                  </c:pt>
-                  <c:pt idx="47">
-                    <c:v/>
-                  </c:pt>
-                  <c:pt idx="48">
-                    <c:v/>
-                  </c:pt>
-                  <c:pt idx="49">
-                    <c:v/>
-                  </c:pt>
-                  <c:pt idx="50">
-                    <c:v>100</c:v>
-                  </c:pt>
-                </c:lvl>
-              </c:multiLvlStrCache>
-            </c:multiLvlStrRef>
+                <c:pt idx="0">
+                  <c:v>0</c:v>
+                </c:pt>
+                <c:pt idx="10">
+                  <c:v>20</c:v>
+                </c:pt>
+                <c:pt idx="20">
+                  <c:v>40</c:v>
+                </c:pt>
+                <c:pt idx="30">
+                  <c:v>60</c:v>
+                </c:pt>
+                <c:pt idx="40">
+                  <c:v>80</c:v>
+                </c:pt>
+                <c:pt idx="50">
+                  <c:v>100</c:v>
+                </c:pt>
+              </c:strCache>
+            </c:strRef>
           </c:cat>
           <c:val>
             <c:numRef>
@@ -2774,159 +1958,164 @@
                   <c:v>0.1</c:v>
                 </c:pt>
                 <c:pt idx="1">
-                  <c:v>0.0818730753077982</c:v>
+                  <c:v>8.1873075307798193E-2</c:v>
                 </c:pt>
                 <c:pt idx="2">
-                  <c:v>0.06703200460356394</c:v>
+                  <c:v>6.7032004603563941E-2</c:v>
                 </c:pt>
                 <c:pt idx="3">
-                  <c:v>0.05488116360940264</c:v>
+                  <c:v>5.4881163609402643E-2</c:v>
                 </c:pt>
                 <c:pt idx="4">
-                  <c:v>0.044932896411722156</c:v>
+                  <c:v>4.4932896411722156E-2</c:v>
                 </c:pt>
                 <c:pt idx="5">
-                  <c:v>0.036787944117144235</c:v>
+                  <c:v>3.6787944117144235E-2</c:v>
                 </c:pt>
                 <c:pt idx="6">
-                  <c:v>0.030119421191220203</c:v>
+                  <c:v>3.0119421191220203E-2</c:v>
                 </c:pt>
                 <c:pt idx="7">
-                  <c:v>0.024659696394160643</c:v>
+                  <c:v>2.4659696394160643E-2</c:v>
                 </c:pt>
                 <c:pt idx="8">
-                  <c:v>0.02018965179946554</c:v>
+                  <c:v>2.0189651799465538E-2</c:v>
                 </c:pt>
                 <c:pt idx="9">
-                  <c:v>0.016529888822158653</c:v>
+                  <c:v>1.6529888822158653E-2</c:v>
                 </c:pt>
                 <c:pt idx="10">
-                  <c:v>0.013533528323661271</c:v>
+                  <c:v>1.3533528323661271E-2</c:v>
                 </c:pt>
                 <c:pt idx="11">
-                  <c:v>0.011080315836233388</c:v>
+                  <c:v>1.1080315836233388E-2</c:v>
                 </c:pt>
                 <c:pt idx="12">
-                  <c:v>0.009071795328941248</c:v>
+                  <c:v>9.0717953289412481E-3</c:v>
                 </c:pt>
                 <c:pt idx="13">
-                  <c:v>0.007427357821433388</c:v>
+                  <c:v>7.4273578214333882E-3</c:v>
                 </c:pt>
                 <c:pt idx="14">
-                  <c:v>0.006081006262521796</c:v>
+                  <c:v>6.0810062625217959E-3</c:v>
                 </c:pt>
                 <c:pt idx="15">
-                  <c:v>0.004978706836786395</c:v>
+                  <c:v>4.9787068367863948E-3</c:v>
                 </c:pt>
                 <c:pt idx="16">
-                  <c:v>0.004076220397836621</c:v>
+                  <c:v>4.0762203978366206E-3</c:v>
                 </c:pt>
                 <c:pt idx="17">
-                  <c:v>0.003337326996032607</c:v>
+                  <c:v>3.3373269960326069E-3</c:v>
                 </c:pt>
                 <c:pt idx="18">
-                  <c:v>0.0027323722447292562</c:v>
+                  <c:v>2.7323722447292562E-3</c:v>
                 </c:pt>
                 <c:pt idx="19">
-                  <c:v>0.002237077185616559</c:v>
+                  <c:v>2.2370771856165591E-3</c:v>
                 </c:pt>
                 <c:pt idx="20">
-                  <c:v>0.001831563888873418</c:v>
+                  <c:v>1.831563888873418E-3</c:v>
                 </c:pt>
                 <c:pt idx="21">
-                  <c:v>0.0014995576820477704</c:v>
+                  <c:v>1.4995576820477704E-3</c:v>
                 </c:pt>
                 <c:pt idx="22">
-                  <c:v>0.0012277339903068439</c:v>
+                  <c:v>1.2277339903068439E-3</c:v>
                 </c:pt>
                 <c:pt idx="23">
-                  <c:v>0.0010051835744633575</c:v>
+                  <c:v>1.0051835744633575E-3</c:v>
                 </c:pt>
                 <c:pt idx="24">
-                  <c:v>0.0008229747049020024</c:v>
+                  <c:v>8.2297470490200241E-4</c:v>
                 </c:pt>
                 <c:pt idx="25">
-                  <c:v>0.0006737946999085467</c:v>
+                  <c:v>6.7379469990854672E-4</c:v>
                 </c:pt>
                 <c:pt idx="26">
-                  <c:v>0.0005516564420760772</c:v>
+                  <c:v>5.5165644207607722E-4</c:v>
                 </c:pt>
                 <c:pt idx="27">
-                  <c:v>0.0004516580942612666</c:v>
+                  <c:v>4.5165809426126662E-4</c:v>
                 </c:pt>
                 <c:pt idx="28">
-                  <c:v>0.0003697863716482929</c:v>
+                  <c:v>3.6978637164829291E-4</c:v>
                 </c:pt>
                 <c:pt idx="29">
-                  <c:v>0.0003027554745375813</c:v>
+                  <c:v>3.0275547453758131E-4</c:v>
                 </c:pt>
                 <c:pt idx="30">
-                  <c:v>0.00024787521766663585</c:v>
+                  <c:v>2.4787521766663585E-4</c:v>
                 </c:pt>
                 <c:pt idx="31">
-                  <c:v>0.00020294306362957342</c:v>
+                  <c:v>2.0294306362957342E-4</c:v>
                 </c:pt>
                 <c:pt idx="32">
-                  <c:v>0.0001661557273173934</c:v>
+                  <c:v>1.661557273173934E-4</c:v>
                 </c:pt>
                 <c:pt idx="33">
-                  <c:v>0.00013603680375478926</c:v>
+                  <c:v>1.3603680375478926E-4</c:v>
                 </c:pt>
                 <c:pt idx="34">
-                  <c:v>0.00011137751478448025</c:v>
+                  <c:v>1.1137751478448025E-4</c:v>
                 </c:pt>
                 <c:pt idx="35">
-                  <c:v>0.00009118819655545162</c:v>
+                  <c:v>9.1188196555451624E-5</c:v>
                 </c:pt>
                 <c:pt idx="36">
-                  <c:v>0.00007465858083766792</c:v>
+                  <c:v>7.4658580837667923E-5</c:v>
                 </c:pt>
                 <c:pt idx="37">
-                  <c:v>0.00006112527611295723</c:v>
+                  <c:v>6.1125276112957227E-5</c:v>
                 </c:pt>
                 <c:pt idx="38">
-                  <c:v>0.00005004514334406104</c:v>
+                  <c:v>5.004514334406104E-5</c:v>
                 </c:pt>
                 <c:pt idx="39">
-                  <c:v>0.00004097349789797865</c:v>
+                  <c:v>4.0973497897978647E-5</c:v>
                 </c:pt>
                 <c:pt idx="40">
-                  <c:v>0.00003354626279025119</c:v>
+                  <c:v>3.3546262790251189E-5</c:v>
                 </c:pt>
                 <c:pt idx="41">
-                  <c:v>0.000027465356997214206</c:v>
+                  <c:v>2.7465356997214206E-5</c:v>
                 </c:pt>
                 <c:pt idx="42">
-                  <c:v>0.00002248673241788482</c:v>
+                  <c:v>2.2486732417884819E-5</c:v>
                 </c:pt>
                 <c:pt idx="43">
-                  <c:v>0.00001841057936675792</c:v>
+                  <c:v>1.8410579366757919E-5</c:v>
                 </c:pt>
                 <c:pt idx="44">
-                  <c:v>0.000015073307509547651</c:v>
+                  <c:v>1.5073307509547651E-5</c:v>
                 </c:pt>
                 <c:pt idx="45">
-                  <c:v>0.000012340980408667957</c:v>
+                  <c:v>1.2340980408667957E-5</c:v>
                 </c:pt>
                 <c:pt idx="46">
-                  <c:v>0.000010103940183709325</c:v>
+                  <c:v>1.0103940183709325E-5</c:v>
                 </c:pt>
                 <c:pt idx="47">
-                  <c:v>0.000008272406555663223</c:v>
+                  <c:v>8.2724065556632225E-6</c:v>
                 </c:pt>
                 <c:pt idx="48">
-                  <c:v>0.000006772873649085378</c:v>
+                  <c:v>6.772873649085378E-6</c:v>
                 </c:pt>
                 <c:pt idx="49">
-                  <c:v>0.000005545159943217695</c:v>
+                  <c:v>5.545159943217695E-6</c:v>
                 </c:pt>
                 <c:pt idx="50">
-                  <c:v>0.000004539992976248485</c:v>
+                  <c:v>4.5399929762484852E-6</c:v>
                 </c:pt>
               </c:numCache>
             </c:numRef>
           </c:val>
           <c:smooth val="1"/>
+          <c:extLst>
+            <c:ext xmlns:c16="http://schemas.microsoft.com/office/drawing/2014/chart" uri="{C3380CC4-5D6E-409C-BE32-E72D297353CC}">
+              <c16:uniqueId val="{00000000-E8EF-694F-A663-187CABEDD5BD}"/>
+            </c:ext>
+          </c:extLst>
         </c:ser>
         <c:ser>
           <c:idx val="1"/>
@@ -2943,9 +2132,6 @@
             </c:strRef>
           </c:tx>
           <c:spPr>
-            <a:solidFill>
-              <a:srgbClr val="E23C8A"/>
-            </a:solidFill>
             <a:ln w="31750" cap="flat">
               <a:solidFill>
                 <a:srgbClr val="E23C8A"/>
@@ -2955,31 +2141,6 @@
             </a:ln>
             <a:effectLst/>
           </c:spPr>
-          <c:invertIfNegative val="0"/>
-          <c:dLbls>
-            <c:numFmt formatCode="#,##0" sourceLinked="0"/>
-            <c:txPr>
-              <a:bodyPr/>
-              <a:lstStyle/>
-              <a:p>
-                <a:pPr>
-                  <a:defRPr b="0" i="0" strike="noStrike" sz="1200" u="none">
-                    <a:solidFill>
-                      <a:srgbClr val="000000"/>
-                    </a:solidFill>
-                    <a:latin typeface="Arial"/>
-                  </a:defRPr>
-                </a:pPr>
-              </a:p>
-            </c:txPr>
-            <c:showLegendKey val="0"/>
-            <c:showVal val="0"/>
-            <c:showCatName val="0"/>
-            <c:showSerName val="0"/>
-            <c:showPercent val="0"/>
-            <c:showBubbleSize val="0"/>
-            <c:showLeaderLines val="0"/>
-          </c:dLbls>
           <c:marker>
             <c:symbol val="circle"/>
             <c:size val="6"/>
@@ -2998,167 +2159,30 @@
             </c:spPr>
           </c:marker>
           <c:cat>
-            <c:multiLvlStrRef>
+            <c:strRef>
               <c:f>Sheet1!$A$2:$A$52</c:f>
-              <c:multiLvlStrCache>
+              <c:strCache>
                 <c:ptCount val="51"/>
-                <c:lvl>
-                  <c:pt idx="0">
-                    <c:v>0</c:v>
-                  </c:pt>
-                  <c:pt idx="1">
-                    <c:v/>
-                  </c:pt>
-                  <c:pt idx="2">
-                    <c:v/>
-                  </c:pt>
-                  <c:pt idx="3">
-                    <c:v/>
-                  </c:pt>
-                  <c:pt idx="4">
-                    <c:v/>
-                  </c:pt>
-                  <c:pt idx="5">
-                    <c:v/>
-                  </c:pt>
-                  <c:pt idx="6">
-                    <c:v/>
-                  </c:pt>
-                  <c:pt idx="7">
-                    <c:v/>
-                  </c:pt>
-                  <c:pt idx="8">
-                    <c:v/>
-                  </c:pt>
-                  <c:pt idx="9">
-                    <c:v/>
-                  </c:pt>
-                  <c:pt idx="10">
-                    <c:v>20</c:v>
-                  </c:pt>
-                  <c:pt idx="11">
-                    <c:v/>
-                  </c:pt>
-                  <c:pt idx="12">
-                    <c:v/>
-                  </c:pt>
-                  <c:pt idx="13">
-                    <c:v/>
-                  </c:pt>
-                  <c:pt idx="14">
-                    <c:v/>
-                  </c:pt>
-                  <c:pt idx="15">
-                    <c:v/>
-                  </c:pt>
-                  <c:pt idx="16">
-                    <c:v/>
-                  </c:pt>
-                  <c:pt idx="17">
-                    <c:v/>
-                  </c:pt>
-                  <c:pt idx="18">
-                    <c:v/>
-                  </c:pt>
-                  <c:pt idx="19">
-                    <c:v/>
-                  </c:pt>
-                  <c:pt idx="20">
-                    <c:v>40</c:v>
-                  </c:pt>
-                  <c:pt idx="21">
-                    <c:v/>
-                  </c:pt>
-                  <c:pt idx="22">
-                    <c:v/>
-                  </c:pt>
-                  <c:pt idx="23">
-                    <c:v/>
-                  </c:pt>
-                  <c:pt idx="24">
-                    <c:v/>
-                  </c:pt>
-                  <c:pt idx="25">
-                    <c:v/>
-                  </c:pt>
-                  <c:pt idx="26">
-                    <c:v/>
-                  </c:pt>
-                  <c:pt idx="27">
-                    <c:v/>
-                  </c:pt>
-                  <c:pt idx="28">
-                    <c:v/>
-                  </c:pt>
-                  <c:pt idx="29">
-                    <c:v/>
-                  </c:pt>
-                  <c:pt idx="30">
-                    <c:v>60</c:v>
-                  </c:pt>
-                  <c:pt idx="31">
-                    <c:v/>
-                  </c:pt>
-                  <c:pt idx="32">
-                    <c:v/>
-                  </c:pt>
-                  <c:pt idx="33">
-                    <c:v/>
-                  </c:pt>
-                  <c:pt idx="34">
-                    <c:v/>
-                  </c:pt>
-                  <c:pt idx="35">
-                    <c:v/>
-                  </c:pt>
-                  <c:pt idx="36">
-                    <c:v/>
-                  </c:pt>
-                  <c:pt idx="37">
-                    <c:v/>
-                  </c:pt>
-                  <c:pt idx="38">
-                    <c:v/>
-                  </c:pt>
-                  <c:pt idx="39">
-                    <c:v/>
-                  </c:pt>
-                  <c:pt idx="40">
-                    <c:v>80</c:v>
-                  </c:pt>
-                  <c:pt idx="41">
-                    <c:v/>
-                  </c:pt>
-                  <c:pt idx="42">
-                    <c:v/>
-                  </c:pt>
-                  <c:pt idx="43">
-                    <c:v/>
-                  </c:pt>
-                  <c:pt idx="44">
-                    <c:v/>
-                  </c:pt>
-                  <c:pt idx="45">
-                    <c:v/>
-                  </c:pt>
-                  <c:pt idx="46">
-                    <c:v/>
-                  </c:pt>
-                  <c:pt idx="47">
-                    <c:v/>
-                  </c:pt>
-                  <c:pt idx="48">
-                    <c:v/>
-                  </c:pt>
-                  <c:pt idx="49">
-                    <c:v/>
-                  </c:pt>
-                  <c:pt idx="50">
-                    <c:v>100</c:v>
-                  </c:pt>
-                </c:lvl>
-              </c:multiLvlStrCache>
-            </c:multiLvlStrRef>
+                <c:pt idx="0">
+                  <c:v>0</c:v>
+                </c:pt>
+                <c:pt idx="10">
+                  <c:v>20</c:v>
+                </c:pt>
+                <c:pt idx="20">
+                  <c:v>40</c:v>
+                </c:pt>
+                <c:pt idx="30">
+                  <c:v>60</c:v>
+                </c:pt>
+                <c:pt idx="40">
+                  <c:v>80</c:v>
+                </c:pt>
+                <c:pt idx="50">
+                  <c:v>100</c:v>
+                </c:pt>
+              </c:strCache>
+            </c:strRef>
           </c:cat>
           <c:val>
             <c:numRef>
@@ -3167,162 +2191,167 @@
                 <c:formatCode>General</c:formatCode>
                 <c:ptCount val="51"/>
                 <c:pt idx="0">
-                  <c:v>0.03333333333333333</c:v>
+                  <c:v>3.3333333333333333E-2</c:v>
                 </c:pt>
                 <c:pt idx="1">
-                  <c:v>0.031183566167720594</c:v>
+                  <c:v>3.1183566167720594E-2</c:v>
                 </c:pt>
                 <c:pt idx="2">
-                  <c:v>0.02917244396809825</c:v>
+                  <c:v>2.917244396809825E-2</c:v>
                 </c:pt>
                 <c:pt idx="3">
-                  <c:v>0.027291025102599394</c:v>
+                  <c:v>2.7291025102599394E-2</c:v>
                 </c:pt>
                 <c:pt idx="4">
-                  <c:v>0.025530944612154955</c:v>
+                  <c:v>2.5530944612154955E-2</c:v>
                 </c:pt>
                 <c:pt idx="5">
-                  <c:v>0.02388437701912631</c:v>
+                  <c:v>2.388437701912631E-2</c:v>
                 </c:pt>
                 <c:pt idx="6">
-                  <c:v>0.02234400153452131</c:v>
+                  <c:v>2.2344001534521311E-2</c:v>
                 </c:pt>
                 <c:pt idx="7">
-                  <c:v>0.020902969509101872</c:v>
+                  <c:v>2.0902969509101872E-2</c:v>
                 </c:pt>
                 <c:pt idx="8">
-                  <c:v>0.019554873983667728</c:v>
+                  <c:v>1.9554873983667728E-2</c:v>
                 </c:pt>
                 <c:pt idx="9">
-                  <c:v>0.018293721203134217</c:v>
+                  <c:v>1.8293721203134217E-2</c:v>
                 </c:pt>
                 <c:pt idx="10">
-                  <c:v>0.01711390396775307</c:v>
+                  <c:v>1.7113903967753068E-2</c:v>
                 </c:pt>
                 <c:pt idx="11">
-                  <c:v>0.016010176702993314</c:v>
+                  <c:v>1.6010176702993314E-2</c:v>
                 </c:pt>
                 <c:pt idx="12">
-                  <c:v>0.014977632137240718</c:v>
+                  <c:v>1.4977632137240718E-2</c:v>
                 </c:pt>
                 <c:pt idx="13">
-                  <c:v>0.01401167948362273</c:v>
+                  <c:v>1.401167948362273E-2</c:v>
                 </c:pt>
                 <c:pt idx="14">
-                  <c:v>0.013108024028953275</c:v>
+                  <c:v>1.3108024028953275E-2</c:v>
                 </c:pt>
                 <c:pt idx="15">
-                  <c:v>0.012262648039048078</c:v>
+                  <c:v>1.2262648039048078E-2</c:v>
                 </c:pt>
                 <c:pt idx="16">
-                  <c:v>0.011471792895513748</c:v>
+                  <c:v>1.1471792895513748E-2</c:v>
                 </c:pt>
                 <c:pt idx="17">
-                  <c:v>0.010731942384589197</c:v>
+                  <c:v>1.0731942384589197E-2</c:v>
                 </c:pt>
                 <c:pt idx="18">
-                  <c:v>0.01003980706374007</c:v>
+                  <c:v>1.003980706374007E-2</c:v>
                 </c:pt>
                 <c:pt idx="19">
-                  <c:v>0.009392309636498612</c:v>
+                  <c:v>9.3923096364986122E-3</c:v>
                 </c:pt>
                 <c:pt idx="20">
-                  <c:v>0.008786571270524226</c:v>
+                  <c:v>8.7865712705242262E-3</c:v>
                 </c:pt>
                 <c:pt idx="21">
-                  <c:v>0.00821989879805355</c:v>
+                  <c:v>8.2198987980535501E-3</c:v>
                 </c:pt>
                 <c:pt idx="22">
-                  <c:v>0.007689772741832095</c:v>
+                  <c:v>7.689772741832095E-3</c:v>
                 </c:pt>
                 <c:pt idx="23">
-                  <c:v>0.00719383611328966</c:v>
+                  <c:v>7.1938361132896601E-3</c:v>
                 </c:pt>
                 <c:pt idx="24">
-                  <c:v>0.00672988393315518</c:v>
+                  <c:v>6.7298839331551797E-3</c:v>
                 </c:pt>
                 <c:pt idx="25">
-                  <c:v>0.006295853427918728</c:v>
+                  <c:v>6.2958534279187279E-3</c:v>
                 </c:pt>
                 <c:pt idx="26">
-                  <c:v>0.005889814858553224</c:v>
+                  <c:v>5.8898148585532243E-3</c:v>
                 </c:pt>
                 <c:pt idx="27">
-                  <c:v>0.005509962940719551</c:v>
+                  <c:v>5.5099629407195511E-3</c:v>
                 </c:pt>
                 <c:pt idx="28">
-                  <c:v>0.005154608818308494</c:v>
+                  <c:v>5.1546088183084936E-3</c:v>
                 </c:pt>
                 <c:pt idx="29">
-                  <c:v>0.004822172554633169</c:v>
+                  <c:v>4.8221725546331688E-3</c:v>
                 </c:pt>
                 <c:pt idx="30">
-                  <c:v>0.00451117610788709</c:v>
+                  <c:v>4.5111761078870903E-3</c:v>
                 </c:pt>
                 <c:pt idx="31">
-                  <c:v>0.00422023675963612</c:v>
+                  <c:v>4.2202367596361201E-3</c:v>
                 </c:pt>
                 <c:pt idx="32">
-                  <c:v>0.00394806096712679</c:v>
+                  <c:v>3.9480609671267899E-3</c:v>
                 </c:pt>
                 <c:pt idx="33">
-                  <c:v>0.0036934386120777954</c:v>
+                  <c:v>3.6934386120777954E-3</c:v>
                 </c:pt>
                 <c:pt idx="34">
-                  <c:v>0.0034552376203842616</c:v>
+                  <c:v>3.4552376203842616E-3</c:v>
                 </c:pt>
                 <c:pt idx="35">
-                  <c:v>0.003232398928813502</c:v>
+                  <c:v>3.2323989288135018E-3</c:v>
                 </c:pt>
                 <c:pt idx="36">
-                  <c:v>0.0030239317763137504</c:v>
+                  <c:v>3.0239317763137504E-3</c:v>
                 </c:pt>
                 <c:pt idx="37">
-                  <c:v>0.0028289092990005805</c:v>
+                  <c:v>2.8289092990005805E-3</c:v>
                 </c:pt>
                 <c:pt idx="38">
-                  <c:v>0.0026464644092359406</c:v>
+                  <c:v>2.6464644092359406E-3</c:v>
                 </c:pt>
                 <c:pt idx="39">
-                  <c:v>0.0024757859404777958</c:v>
+                  <c:v>2.4757859404777958E-3</c:v>
                 </c:pt>
                 <c:pt idx="40">
-                  <c:v>0.0023161150407600513</c:v>
+                  <c:v>2.3161150407600513E-3</c:v>
                 </c:pt>
                 <c:pt idx="41">
-                  <c:v>0.0021667417987678178</c:v>
+                  <c:v>2.1667417987678178E-3</c:v>
                 </c:pt>
                 <c:pt idx="42">
-                  <c:v>0.0020270020875072657</c:v>
+                  <c:v>2.0270020875072657E-3</c:v>
                 </c:pt>
                 <c:pt idx="43">
-                  <c:v>0.0018962746115367172</c:v>
+                  <c:v>1.8962746115367172E-3</c:v>
                 </c:pt>
                 <c:pt idx="44">
-                  <c:v>0.0017739781446307167</c:v>
+                  <c:v>1.7739781446307167E-3</c:v>
                 </c:pt>
                 <c:pt idx="45">
-                  <c:v>0.0016595689455954647</c:v>
+                  <c:v>1.6595689455954647E-3</c:v>
                 </c:pt>
                 <c:pt idx="46">
-                  <c:v>0.0015525383407461145</c:v>
+                  <c:v>1.5525383407461145E-3</c:v>
                 </c:pt>
                 <c:pt idx="47">
-                  <c:v>0.0014524104622973878</c:v>
+                  <c:v>1.4524104622973878E-3</c:v>
                 </c:pt>
                 <c:pt idx="48">
-                  <c:v>0.0013587401326122068</c:v>
+                  <c:v>1.3587401326122068E-3</c:v>
                 </c:pt>
                 <c:pt idx="49">
-                  <c:v>0.0012711108849015064</c:v>
+                  <c:v>1.2711108849015064E-3</c:v>
                 </c:pt>
                 <c:pt idx="50">
-                  <c:v>0.0011891331115750799</c:v>
+                  <c:v>1.1891331115750799E-3</c:v>
                 </c:pt>
               </c:numCache>
             </c:numRef>
           </c:val>
           <c:smooth val="1"/>
+          <c:extLst>
+            <c:ext xmlns:c16="http://schemas.microsoft.com/office/drawing/2014/chart" uri="{C3380CC4-5D6E-409C-BE32-E72D297353CC}">
+              <c16:uniqueId val="{00000001-E8EF-694F-A663-187CABEDD5BD}"/>
+            </c:ext>
+          </c:extLst>
         </c:ser>
         <c:ser>
           <c:idx val="2"/>
@@ -3339,9 +2368,6 @@
             </c:strRef>
           </c:tx>
           <c:spPr>
-            <a:solidFill>
-              <a:srgbClr val="7FA6E8"/>
-            </a:solidFill>
             <a:ln w="31750" cap="flat">
               <a:solidFill>
                 <a:srgbClr val="7FA6E8"/>
@@ -3351,31 +2377,6 @@
             </a:ln>
             <a:effectLst/>
           </c:spPr>
-          <c:invertIfNegative val="0"/>
-          <c:dLbls>
-            <c:numFmt formatCode="#,##0" sourceLinked="0"/>
-            <c:txPr>
-              <a:bodyPr/>
-              <a:lstStyle/>
-              <a:p>
-                <a:pPr>
-                  <a:defRPr b="0" i="0" strike="noStrike" sz="1200" u="none">
-                    <a:solidFill>
-                      <a:srgbClr val="000000"/>
-                    </a:solidFill>
-                    <a:latin typeface="Arial"/>
-                  </a:defRPr>
-                </a:pPr>
-              </a:p>
-            </c:txPr>
-            <c:showLegendKey val="0"/>
-            <c:showVal val="0"/>
-            <c:showCatName val="0"/>
-            <c:showSerName val="0"/>
-            <c:showPercent val="0"/>
-            <c:showBubbleSize val="0"/>
-            <c:showLeaderLines val="0"/>
-          </c:dLbls>
           <c:marker>
             <c:symbol val="circle"/>
             <c:size val="6"/>
@@ -3394,167 +2395,30 @@
             </c:spPr>
           </c:marker>
           <c:cat>
-            <c:multiLvlStrRef>
+            <c:strRef>
               <c:f>Sheet1!$A$2:$A$52</c:f>
-              <c:multiLvlStrCache>
+              <c:strCache>
                 <c:ptCount val="51"/>
-                <c:lvl>
-                  <c:pt idx="0">
-                    <c:v>0</c:v>
-                  </c:pt>
-                  <c:pt idx="1">
-                    <c:v/>
-                  </c:pt>
-                  <c:pt idx="2">
-                    <c:v/>
-                  </c:pt>
-                  <c:pt idx="3">
-                    <c:v/>
-                  </c:pt>
-                  <c:pt idx="4">
-                    <c:v/>
-                  </c:pt>
-                  <c:pt idx="5">
-                    <c:v/>
-                  </c:pt>
-                  <c:pt idx="6">
-                    <c:v/>
-                  </c:pt>
-                  <c:pt idx="7">
-                    <c:v/>
-                  </c:pt>
-                  <c:pt idx="8">
-                    <c:v/>
-                  </c:pt>
-                  <c:pt idx="9">
-                    <c:v/>
-                  </c:pt>
-                  <c:pt idx="10">
-                    <c:v>20</c:v>
-                  </c:pt>
-                  <c:pt idx="11">
-                    <c:v/>
-                  </c:pt>
-                  <c:pt idx="12">
-                    <c:v/>
-                  </c:pt>
-                  <c:pt idx="13">
-                    <c:v/>
-                  </c:pt>
-                  <c:pt idx="14">
-                    <c:v/>
-                  </c:pt>
-                  <c:pt idx="15">
-                    <c:v/>
-                  </c:pt>
-                  <c:pt idx="16">
-                    <c:v/>
-                  </c:pt>
-                  <c:pt idx="17">
-                    <c:v/>
-                  </c:pt>
-                  <c:pt idx="18">
-                    <c:v/>
-                  </c:pt>
-                  <c:pt idx="19">
-                    <c:v/>
-                  </c:pt>
-                  <c:pt idx="20">
-                    <c:v>40</c:v>
-                  </c:pt>
-                  <c:pt idx="21">
-                    <c:v/>
-                  </c:pt>
-                  <c:pt idx="22">
-                    <c:v/>
-                  </c:pt>
-                  <c:pt idx="23">
-                    <c:v/>
-                  </c:pt>
-                  <c:pt idx="24">
-                    <c:v/>
-                  </c:pt>
-                  <c:pt idx="25">
-                    <c:v/>
-                  </c:pt>
-                  <c:pt idx="26">
-                    <c:v/>
-                  </c:pt>
-                  <c:pt idx="27">
-                    <c:v/>
-                  </c:pt>
-                  <c:pt idx="28">
-                    <c:v/>
-                  </c:pt>
-                  <c:pt idx="29">
-                    <c:v/>
-                  </c:pt>
-                  <c:pt idx="30">
-                    <c:v>60</c:v>
-                  </c:pt>
-                  <c:pt idx="31">
-                    <c:v/>
-                  </c:pt>
-                  <c:pt idx="32">
-                    <c:v/>
-                  </c:pt>
-                  <c:pt idx="33">
-                    <c:v/>
-                  </c:pt>
-                  <c:pt idx="34">
-                    <c:v/>
-                  </c:pt>
-                  <c:pt idx="35">
-                    <c:v/>
-                  </c:pt>
-                  <c:pt idx="36">
-                    <c:v/>
-                  </c:pt>
-                  <c:pt idx="37">
-                    <c:v/>
-                  </c:pt>
-                  <c:pt idx="38">
-                    <c:v/>
-                  </c:pt>
-                  <c:pt idx="39">
-                    <c:v/>
-                  </c:pt>
-                  <c:pt idx="40">
-                    <c:v>80</c:v>
-                  </c:pt>
-                  <c:pt idx="41">
-                    <c:v/>
-                  </c:pt>
-                  <c:pt idx="42">
-                    <c:v/>
-                  </c:pt>
-                  <c:pt idx="43">
-                    <c:v/>
-                  </c:pt>
-                  <c:pt idx="44">
-                    <c:v/>
-                  </c:pt>
-                  <c:pt idx="45">
-                    <c:v/>
-                  </c:pt>
-                  <c:pt idx="46">
-                    <c:v/>
-                  </c:pt>
-                  <c:pt idx="47">
-                    <c:v/>
-                  </c:pt>
-                  <c:pt idx="48">
-                    <c:v/>
-                  </c:pt>
-                  <c:pt idx="49">
-                    <c:v/>
-                  </c:pt>
-                  <c:pt idx="50">
-                    <c:v>100</c:v>
-                  </c:pt>
-                </c:lvl>
-              </c:multiLvlStrCache>
-            </c:multiLvlStrRef>
+                <c:pt idx="0">
+                  <c:v>0</c:v>
+                </c:pt>
+                <c:pt idx="10">
+                  <c:v>20</c:v>
+                </c:pt>
+                <c:pt idx="20">
+                  <c:v>40</c:v>
+                </c:pt>
+                <c:pt idx="30">
+                  <c:v>60</c:v>
+                </c:pt>
+                <c:pt idx="40">
+                  <c:v>80</c:v>
+                </c:pt>
+                <c:pt idx="50">
+                  <c:v>100</c:v>
+                </c:pt>
+              </c:strCache>
+            </c:strRef>
           </c:cat>
           <c:val>
             <c:numRef>
@@ -3563,191 +2427,180 @@
                 <c:formatCode>General</c:formatCode>
                 <c:ptCount val="51"/>
                 <c:pt idx="0">
-                  <c:v>0.016666666666666666</c:v>
+                  <c:v>1.6666666666666666E-2</c:v>
                 </c:pt>
                 <c:pt idx="1">
-                  <c:v>0.016120268341366765</c:v>
+                  <c:v>1.6120268341366765E-2</c:v>
                 </c:pt>
                 <c:pt idx="2">
-                  <c:v>0.015591783083860297</c:v>
+                  <c:v>1.5591783083860297E-2</c:v>
                 </c:pt>
                 <c:pt idx="3">
-                  <c:v>0.015080623633932658</c:v>
+                  <c:v>1.5080623633932658E-2</c:v>
                 </c:pt>
                 <c:pt idx="4">
-                  <c:v>0.014586221984049125</c:v>
+                  <c:v>1.4586221984049125E-2</c:v>
                 </c:pt>
                 <c:pt idx="5">
-                  <c:v>0.0141080287481769</c:v>
+                  <c:v>1.4108028748176901E-2</c:v>
                 </c:pt>
                 <c:pt idx="6">
-                  <c:v>0.013645512551299697</c:v>
+                  <c:v>1.3645512551299697E-2</c:v>
                 </c:pt>
                 <c:pt idx="7">
-                  <c:v>0.013198159438946361</c:v>
+                  <c:v>1.3198159438946361E-2</c:v>
                 </c:pt>
                 <c:pt idx="8">
-                  <c:v>0.012765472306077478</c:v>
+                  <c:v>1.2765472306077478E-2</c:v>
                 </c:pt>
                 <c:pt idx="9">
-                  <c:v>0.012346970344695297</c:v>
+                  <c:v>1.2346970344695297E-2</c:v>
                 </c:pt>
                 <c:pt idx="10">
-                  <c:v>0.011942188509563155</c:v>
+                  <c:v>1.1942188509563155E-2</c:v>
                 </c:pt>
                 <c:pt idx="11">
-                  <c:v>0.011550677001440692</c:v>
+                  <c:v>1.1550677001440692E-2</c:v>
                 </c:pt>
                 <c:pt idx="12">
-                  <c:v>0.011172000767260656</c:v>
+                  <c:v>1.1172000767260656E-2</c:v>
                 </c:pt>
                 <c:pt idx="13">
-                  <c:v>0.010805739016691828</c:v>
+                  <c:v>1.0805739016691828E-2</c:v>
                 </c:pt>
                 <c:pt idx="14">
-                  <c:v>0.010451484754550936</c:v>
+                  <c:v>1.0451484754550936E-2</c:v>
                 </c:pt>
                 <c:pt idx="15">
-                  <c:v>0.01010884432854389</c:v>
+                  <c:v>1.0108844328543891E-2</c:v>
                 </c:pt>
                 <c:pt idx="16">
-                  <c:v>0.009777436991833864</c:v>
+                  <c:v>9.7774369918338638E-3</c:v>
                 </c:pt>
                 <c:pt idx="17">
-                  <c:v>0.009456894479950064</c:v>
+                  <c:v>9.4568944799500645E-3</c:v>
                 </c:pt>
                 <c:pt idx="18">
-                  <c:v>0.009146860601567108</c:v>
+                  <c:v>9.1468606015671083E-3</c:v>
                 </c:pt>
                 <c:pt idx="19">
-                  <c:v>0.008846990842700233</c:v>
+                  <c:v>8.8469908427002333E-3</c:v>
                 </c:pt>
                 <c:pt idx="20">
-                  <c:v>0.008556951983876534</c:v>
+                  <c:v>8.5569519838765342E-3</c:v>
                 </c:pt>
                 <c:pt idx="21">
-                  <c:v>0.008276421729856825</c:v>
+                  <c:v>8.2764217298568251E-3</c:v>
                 </c:pt>
                 <c:pt idx="22">
-                  <c:v>0.008005088351496657</c:v>
+                  <c:v>8.0050883514966569E-3</c:v>
                 </c:pt>
                 <c:pt idx="23">
-                  <c:v>0.007742650339348525</c:v>
+                  <c:v>7.7426503393485252E-3</c:v>
                 </c:pt>
                 <c:pt idx="24">
-                  <c:v>0.007488816068620359</c:v>
+                  <c:v>7.4888160686203591E-3</c:v>
                 </c:pt>
                 <c:pt idx="25">
-                  <c:v>0.00724330347511797</c:v>
+                  <c:v>7.2433034751179697E-3</c:v>
                 </c:pt>
                 <c:pt idx="26">
-                  <c:v>0.007005839741811365</c:v>
+                  <c:v>7.0058397418113648E-3</c:v>
                 </c:pt>
                 <c:pt idx="27">
-                  <c:v>0.006776160995676652</c:v>
+                  <c:v>6.7761609956766521E-3</c:v>
                 </c:pt>
                 <c:pt idx="28">
-                  <c:v>0.0065540120144766375</c:v>
+                  <c:v>6.5540120144766375E-3</c:v>
                 </c:pt>
                 <c:pt idx="29">
-                  <c:v>0.00633914594315431</c:v>
+                  <c:v>6.3391459431543099E-3</c:v>
                 </c:pt>
                 <c:pt idx="30">
-                  <c:v>0.006131324019524039</c:v>
+                  <c:v>6.1313240195240391E-3</c:v>
                 </c:pt>
                 <c:pt idx="31">
-                  <c:v>0.0059303153089557</c:v>
+                  <c:v>5.9303153089556998E-3</c:v>
                 </c:pt>
                 <c:pt idx="32">
-                  <c:v>0.005735896447756874</c:v>
+                  <c:v>5.735896447756874E-3</c:v>
                 </c:pt>
                 <c:pt idx="33">
-                  <c:v>0.005547851394967992</c:v>
+                  <c:v>5.5478513949679918E-3</c:v>
                 </c:pt>
                 <c:pt idx="34">
-                  <c:v>0.005365971192294598</c:v>
+                  <c:v>5.3659711922945984E-3</c:v>
                 </c:pt>
                 <c:pt idx="35">
-                  <c:v>0.0051900537319099615</c:v>
+                  <c:v>5.1900537319099615E-3</c:v>
                 </c:pt>
                 <c:pt idx="36">
-                  <c:v>0.005019903531870035</c:v>
+                  <c:v>5.019903531870035E-3</c:v>
                 </c:pt>
                 <c:pt idx="37">
-                  <c:v>0.0048553315188911835</c:v>
+                  <c:v>4.8553315188911835E-3</c:v>
                 </c:pt>
                 <c:pt idx="38">
-                  <c:v>0.004696154818249306</c:v>
+                  <c:v>4.6961548182493061E-3</c:v>
                 </c:pt>
                 <c:pt idx="39">
-                  <c:v>0.004542196550566877</c:v>
+                  <c:v>4.5421965505668769E-3</c:v>
                 </c:pt>
                 <c:pt idx="40">
-                  <c:v>0.004393285635262113</c:v>
+                  <c:v>4.3932856352621131E-3</c:v>
                 </c:pt>
                 <c:pt idx="41">
-                  <c:v>0.004249256600441832</c:v>
+                  <c:v>4.2492566004418324E-3</c:v>
                 </c:pt>
                 <c:pt idx="42">
-                  <c:v>0.004109949399026775</c:v>
+                  <c:v>4.1099493990267751E-3</c:v>
                 </c:pt>
                 <c:pt idx="43">
-                  <c:v>0.00397520923090504</c:v>
+                  <c:v>3.9752092309050403E-3</c:v>
                 </c:pt>
                 <c:pt idx="44">
-                  <c:v>0.0038448863709160475</c:v>
+                  <c:v>3.8448863709160475E-3</c:v>
                 </c:pt>
                 <c:pt idx="45">
-                  <c:v>0.0037188360024738303</c:v>
+                  <c:v>3.7188360024738303E-3</c:v>
                 </c:pt>
                 <c:pt idx="46">
-                  <c:v>0.00359691805664483</c:v>
+                  <c:v>3.59691805664483E-3</c:v>
                 </c:pt>
                 <c:pt idx="47">
-                  <c:v>0.0034789970565013272</c:v>
+                  <c:v>3.4789970565013272E-3</c:v>
                 </c:pt>
                 <c:pt idx="48">
-                  <c:v>0.00336494196657759</c:v>
+                  <c:v>3.3649419665775899E-3</c:v>
                 </c:pt>
                 <c:pt idx="49">
-                  <c:v>0.003254626047261429</c:v>
+                  <c:v>3.2546260472614292E-3</c:v>
                 </c:pt>
                 <c:pt idx="50">
-                  <c:v>0.003147926713959364</c:v>
+                  <c:v>3.147926713959364E-3</c:v>
                 </c:pt>
               </c:numCache>
             </c:numRef>
           </c:val>
           <c:smooth val="1"/>
+          <c:extLst>
+            <c:ext xmlns:c16="http://schemas.microsoft.com/office/drawing/2014/chart" uri="{C3380CC4-5D6E-409C-BE32-E72D297353CC}">
+              <c16:uniqueId val="{00000002-E8EF-694F-A663-187CABEDD5BD}"/>
+            </c:ext>
+          </c:extLst>
         </c:ser>
         <c:dLbls>
-          <c:numFmt formatCode="#,##0" sourceLinked="0"/>
-          <c:txPr>
-            <a:bodyPr/>
-            <a:lstStyle/>
-            <a:p>
-              <a:pPr>
-                <a:defRPr b="0" i="0" strike="noStrike" sz="1200" u="none">
-                  <a:solidFill>
-                    <a:srgbClr val="000000"/>
-                  </a:solidFill>
-                  <a:latin typeface="Arial"/>
-                </a:defRPr>
-              </a:pPr>
-            </a:p>
-          </c:txPr>
           <c:showLegendKey val="0"/>
           <c:showVal val="0"/>
           <c:showCatName val="0"/>
           <c:showSerName val="0"/>
           <c:showPercent val="0"/>
           <c:showBubbleSize val="0"/>
-          <c:showLeaderLines val="0"/>
         </c:dLbls>
         <c:marker val="1"/>
+        <c:smooth val="0"/>
         <c:axId val="2094734554"/>
         <c:axId val="2094734552"/>
-        <c:axId val="2094734556"/>
       </c:lineChart>
       <c:catAx>
         <c:axId val="2094734554"/>
@@ -3771,7 +2624,7 @@
                   </a:defRPr>
                 </a:pPr>
                 <a:r>
-                  <a:rPr sz="1000" b="0" i="0" u="none" strike="noStrike">
+                  <a:rPr lang="en-US" sz="1000" b="0" i="0" u="none" strike="noStrike">
                     <a:solidFill>
                       <a:srgbClr val="6B7C99"/>
                     </a:solidFill>
@@ -3782,7 +2635,6 @@
               </a:p>
             </c:rich>
           </c:tx>
-          <c:layout/>
           <c:overlay val="0"/>
         </c:title>
         <c:numFmt formatCode="General" sourceLinked="1"/>
@@ -3817,6 +2669,7 @@
         <c:crosses val="autoZero"/>
         <c:auto val="1"/>
         <c:lblAlgn val="ctr"/>
+        <c:lblOffset val="100"/>
         <c:noMultiLvlLbl val="1"/>
       </c:catAx>
       <c:valAx>
@@ -3901,6 +2754,7 @@
     </c:legend>
     <c:plotVisOnly val="1"/>
     <c:dispBlanksAs val="span"/>
+    <c:showDLblsOverMax val="1"/>
   </c:chart>
   <c:spPr>
     <a:noFill/>
@@ -3937,234 +2791,10 @@
           <a:chExt cx="0" cy="0"/>
         </a:xfrm>
       </p:grpSpPr>
-      <p:sp>
-        <p:nvSpPr>
-          <p:cNvPr id="2" name="Header Placeholder 1"/>
-          <p:cNvSpPr>
-            <a:spLocks noGrp="1"/>
-          </p:cNvSpPr>
-          <p:nvPr>
-            <p:ph type="hdr" sz="quarter"/>
-          </p:nvPr>
-        </p:nvSpPr>
-        <p:spPr>
-          <a:xfrm>
-            <a:off x="0" y="0"/>
-            <a:ext cx="2971800" cy="458788"/>
-          </a:xfrm>
-          <a:prstGeom prst="rect">
-            <a:avLst/>
-          </a:prstGeom>
-        </p:spPr>
-        <p:txBody>
-          <a:bodyPr vert="horz" lIns="91440" tIns="45720" rIns="91440" bIns="45720" rtlCol="0"/>
-          <a:lstStyle>
-            <a:lvl1pPr algn="l">
-              <a:defRPr sz="1200"/>
-            </a:lvl1pPr>
-          </a:lstStyle>
-          <a:p>
-            <a:endParaRPr lang="en-US"/>
-          </a:p>
-        </p:txBody>
-      </p:sp>
-      <p:sp>
-        <p:nvSpPr>
-          <p:cNvPr id="3" name="Date Placeholder 2"/>
-          <p:cNvSpPr>
-            <a:spLocks noGrp="1"/>
-          </p:cNvSpPr>
-          <p:nvPr>
-            <p:ph type="dt" idx="1"/>
-          </p:nvPr>
-        </p:nvSpPr>
-        <p:spPr>
-          <a:xfrm>
-            <a:off x="3884613" y="0"/>
-            <a:ext cx="2971800" cy="458788"/>
-          </a:xfrm>
-          <a:prstGeom prst="rect">
-            <a:avLst/>
-          </a:prstGeom>
-        </p:spPr>
-        <p:txBody>
-          <a:bodyPr vert="horz" lIns="91440" tIns="45720" rIns="91440" bIns="45720" rtlCol="0"/>
-          <a:lstStyle>
-            <a:lvl1pPr algn="r">
-              <a:defRPr sz="1200"/>
-            </a:lvl1pPr>
-          </a:lstStyle>
-          <a:p>
-            <a:fld id="{5282F153-3F37-0F45-9E97-73ACFA13230C}" type="datetimeFigureOut">
-              <a:rPr lang="en-US"/>
-              <a:t>7/23/19</a:t>
-            </a:fld>
-            <a:endParaRPr lang="en-US"/>
-          </a:p>
-        </p:txBody>
-      </p:sp>
-      <p:sp>
-        <p:nvSpPr>
-          <p:cNvPr id="4" name="Slide Image Placeholder 3"/>
-          <p:cNvSpPr>
-            <a:spLocks noGrp="1" noRot="1" noChangeAspect="1"/>
-          </p:cNvSpPr>
-          <p:nvPr>
-            <p:ph type="sldImg" idx="2"/>
-          </p:nvPr>
-        </p:nvSpPr>
-        <p:spPr>
-          <a:xfrm>
-            <a:off x="685800" y="1143000"/>
-            <a:ext cx="5486400" cy="3086100"/>
-          </a:xfrm>
-          <a:prstGeom prst="rect">
-            <a:avLst/>
-          </a:prstGeom>
-          <a:noFill/>
-          <a:ln w="12700">
-            <a:solidFill>
-              <a:prstClr val="black"/>
-            </a:solidFill>
-          </a:ln>
-        </p:spPr>
-        <p:txBody>
-          <a:bodyPr vert="horz" lIns="91440" tIns="45720" rIns="91440" bIns="45720" rtlCol="0" anchor="ctr"/>
-          <a:lstStyle/>
-          <a:p>
-            <a:endParaRPr lang="en-US"/>
-          </a:p>
-        </p:txBody>
-      </p:sp>
-      <p:sp>
-        <p:nvSpPr>
-          <p:cNvPr id="5" name="Notes Placeholder 4"/>
-          <p:cNvSpPr>
-            <a:spLocks noGrp="1"/>
-          </p:cNvSpPr>
-          <p:nvPr>
-            <p:ph type="body" sz="quarter" idx="3"/>
-          </p:nvPr>
-        </p:nvSpPr>
-        <p:spPr>
-          <a:xfrm>
-            <a:off x="685800" y="4400550"/>
-            <a:ext cx="5486400" cy="3600450"/>
-          </a:xfrm>
-          <a:prstGeom prst="rect">
-            <a:avLst/>
-          </a:prstGeom>
-        </p:spPr>
-        <p:txBody>
-          <a:bodyPr vert="horz" lIns="91440" tIns="45720" rIns="91440" bIns="45720" rtlCol="0"/>
-          <a:lstStyle/>
-          <a:p>
-            <a:pPr lvl="0"/>
-            <a:r>
-              <a:rPr lang="en-US"/>
-              <a:t>Click to edit Master text styles</a:t>
-            </a:r>
-          </a:p>
-          <a:p>
-            <a:pPr lvl="1"/>
-            <a:r>
-              <a:rPr lang="en-US"/>
-              <a:t>Second level</a:t>
-            </a:r>
-          </a:p>
-          <a:p>
-            <a:pPr lvl="2"/>
-            <a:r>
-              <a:rPr lang="en-US"/>
-              <a:t>Third level</a:t>
-            </a:r>
-          </a:p>
-          <a:p>
-            <a:pPr lvl="3"/>
-            <a:r>
-              <a:rPr lang="en-US"/>
-              <a:t>Fourth level</a:t>
-            </a:r>
-          </a:p>
-          <a:p>
-            <a:pPr lvl="4"/>
-            <a:r>
-              <a:rPr lang="en-US"/>
-              <a:t>Fifth level</a:t>
-            </a:r>
-          </a:p>
-        </p:txBody>
-      </p:sp>
-      <p:sp>
-        <p:nvSpPr>
-          <p:cNvPr id="6" name="Footer Placeholder 5"/>
-          <p:cNvSpPr>
-            <a:spLocks noGrp="1"/>
-          </p:cNvSpPr>
-          <p:nvPr>
-            <p:ph type="ftr" sz="quarter" idx="4"/>
-          </p:nvPr>
-        </p:nvSpPr>
-        <p:spPr>
-          <a:xfrm>
-            <a:off x="0" y="8685213"/>
-            <a:ext cx="2971800" cy="458787"/>
-          </a:xfrm>
-          <a:prstGeom prst="rect">
-            <a:avLst/>
-          </a:prstGeom>
-        </p:spPr>
-        <p:txBody>
-          <a:bodyPr vert="horz" lIns="91440" tIns="45720" rIns="91440" bIns="45720" rtlCol="0" anchor="b"/>
-          <a:lstStyle>
-            <a:lvl1pPr algn="l">
-              <a:defRPr sz="1200"/>
-            </a:lvl1pPr>
-          </a:lstStyle>
-          <a:p>
-            <a:endParaRPr lang="en-US"/>
-          </a:p>
-        </p:txBody>
-      </p:sp>
-      <p:sp>
-        <p:nvSpPr>
-          <p:cNvPr id="7" name="Slide Number Placeholder 6"/>
-          <p:cNvSpPr>
-            <a:spLocks noGrp="1"/>
-          </p:cNvSpPr>
-          <p:nvPr>
-            <p:ph type="sldNum" sz="quarter" idx="5"/>
-          </p:nvPr>
-        </p:nvSpPr>
-        <p:spPr>
-          <a:xfrm>
-            <a:off x="3884613" y="8685213"/>
-            <a:ext cx="2971800" cy="458787"/>
-          </a:xfrm>
-          <a:prstGeom prst="rect">
-            <a:avLst/>
-          </a:prstGeom>
-        </p:spPr>
-        <p:txBody>
-          <a:bodyPr vert="horz" lIns="91440" tIns="45720" rIns="91440" bIns="45720" rtlCol="0" anchor="b"/>
-          <a:lstStyle>
-            <a:lvl1pPr algn="r">
-              <a:defRPr sz="1200"/>
-            </a:lvl1pPr>
-          </a:lstStyle>
-          <a:p>
-            <a:fld id="{CE5E9CC1-C706-0F49-92D6-E571CC5EEA8F}" type="slidenum">
-              <a:rPr lang="en-US"/>
-              <a:t>‹#›</a:t>
-            </a:fld>
-            <a:endParaRPr lang="en-US"/>
-          </a:p>
-        </p:txBody>
-      </p:sp>
     </p:spTree>
     <p:extLst>
       <p:ext uri="{BB962C8B-B14F-4D97-AF65-F5344CB8AC3E}">
-        <p14:creationId xmlns:p14="http://schemas.microsoft.com/office/powerpoint/2010/main" val="1024086991"/>
+        <p14:creationId xmlns:p14="http://schemas.microsoft.com/office/powerpoint/2010/main" val="2107885863"/>
       </p:ext>
     </p:extLst>
   </p:cSld>
@@ -4312,7 +2942,6 @@
               <a:rPr lang="en-US" dirty="0"/>
               <a:t>Apertura (2 min). No repetir la presentación personal. Abrir con una pregunta directa: '¿cuántos fraudes hay en 1000 transacciones?' la respondimos la clase pasada. '¿cuánto tiempo pasa entre dos fraudes?' NO la podemos responder todavía. Eso es la clase de hoy. Pedir que abran Colab ANTES de empezar.</a:t>
             </a:r>
-            <a:endParaRPr lang="en-US" dirty="0"/>
           </a:p>
         </p:txBody>
       </p:sp>
@@ -4400,7 +3029,6 @@
               <a:rPr lang="en-US" dirty="0"/>
               <a:t>4 min. No derivar nada. La tabla es para que dejen de tenerle miedo a la integral: es una suma con infinitos términos. Mencionar Cauchy solo como cultura general — se retoma si alguien pregunta por colas pesadas.</a:t>
             </a:r>
-            <a:endParaRPr lang="en-US" dirty="0"/>
           </a:p>
         </p:txBody>
       </p:sp>
@@ -4488,7 +3116,6 @@
               <a:rPr lang="en-US" dirty="0"/>
               <a:t>5 min. La barra magenta es la prueba visual de que f(x)&gt;1 es legítimo — conectar explícitamente con la trampa de la slide 7. Adelantar el inverse transform sampling: es el ejercicio 3 del notebook y suele ser el momento 'ajá' de la sesión.</a:t>
             </a:r>
-            <a:endParaRPr lang="en-US" dirty="0"/>
           </a:p>
         </p:txBody>
       </p:sp>
@@ -4576,7 +3203,6 @@
               <a:rPr lang="en-US" dirty="0"/>
               <a:t>6 min. Mostrar que las tres curvas arrancan alto y caen: el tiempo de espera más probable siempre es 'poquito'. Contraintuitivo y cierto. Conectar con la slide 8: por eso el 63 % de las esperas es menor que la media. Ejemplo de riesgo: tiempo entre alertas AML por analista.</a:t>
             </a:r>
-            <a:endParaRPr lang="en-US" dirty="0"/>
           </a:p>
         </p:txBody>
       </p:sp>
@@ -4664,7 +3290,6 @@
               <a:rPr lang="en-US" dirty="0"/>
               <a:t>5 min. La mejor manera de que se les quede: preguntar '¿un cliente que lleva 5 años sin caer en default es igual de riesgoso que uno nuevo?'. Todos dicen no. Perfecto: acaban de rechazar el supuesto de falta de memoria por su cuenta. Este es el gancho para la clase de supervivencia si el curso se extiende.</a:t>
             </a:r>
-            <a:endParaRPr lang="en-US" dirty="0"/>
           </a:p>
         </p:txBody>
       </p:sp>
@@ -4752,7 +3377,6 @@
               <a:rPr lang="en-US" dirty="0"/>
               <a:t>5 min. No entrar en las fórmulas de Weibull y Gamma: solo el criterio de elección. La regla práctica que deben salir sabiendo: si el riesgo cambia con la edad, no es exponencial. Lognormal se retoma en la clase 3 cuando aparezca la normal.</a:t>
             </a:r>
-            <a:endParaRPr lang="en-US" dirty="0"/>
           </a:p>
         </p:txBody>
       </p:sp>
@@ -4840,7 +3464,6 @@
               <a:rPr lang="en-US" dirty="0"/>
               <a:t>4 min. Esta es la slide que van a fotografiar. Dejarla en pantalla mientras se pasa al Colab. Pedir un ejemplo propio por participante si el grupo es chico.</a:t>
             </a:r>
-            <a:endParaRPr lang="en-US" dirty="0"/>
           </a:p>
         </p:txBody>
       </p:sp>
@@ -4928,7 +3551,6 @@
               <a:rPr lang="en-US" dirty="0"/>
               <a:t>4 min. Contar una anécdota real y breve del error 3 o 4 — funciona mucho mejor que la lista. Cerrar aquí la parte teórica: son 40 min exactos si no se estiraron las preguntas.</a:t>
             </a:r>
-            <a:endParaRPr lang="en-US" dirty="0"/>
           </a:p>
         </p:txBody>
       </p:sp>
@@ -5016,7 +3638,6 @@
               <a:rPr lang="en-US" dirty="0"/>
               <a:t>2 min de explicación y a trabajar. Los bloques 1 y 2 son guiados; el 3 y el 4 son en parejas. Circular durante el bloque 3: el inverse transform es donde se atascan. El bloque 4 no tiene respuesta única — se evalúa el argumento, no el número.</a:t>
             </a:r>
-            <a:endParaRPr lang="en-US" dirty="0"/>
           </a:p>
         </p:txBody>
       </p:sp>
@@ -5104,7 +3725,6 @@
               <a:rPr lang="en-US" dirty="0"/>
               <a:t>3 min. Cerrar con el reto: es corto, personal y garantiza que lleguen a la clase 3 con la intuición de asimetría ya instalada. Recordar que la solución del notebook se libera hoy mismo.</a:t>
             </a:r>
-            <a:endParaRPr lang="en-US" dirty="0"/>
           </a:p>
         </p:txBody>
       </p:sp>
@@ -5192,7 +3812,6 @@
               <a:rPr lang="en-US" dirty="0"/>
               <a:t>3 min. Preguntar en voz alta por la tercera tarjeta: '¿cuál usarían para contar reclamos por día?' (Poisson). Dejar claro que hoy NO se descarta nada de la clase 1: se extiende. La exponencial de hoy es la hermana gemela de la Poisson de la semana pasada.</a:t>
             </a:r>
-            <a:endParaRPr lang="en-US" dirty="0"/>
           </a:p>
         </p:txBody>
       </p:sp>
@@ -5280,7 +3899,6 @@
               <a:rPr lang="en-US" dirty="0"/>
               <a:t>4 min. Que el grupo complete la columna derecha con un ejemplo de su propio trabajo antes de avanzar. Insistir: 'tiempo', 'monto', 'peso', 'temperatura', 'latencia' — cualquier cosa que se mide con un instrumento, no que se cuenta con los dedos.</a:t>
             </a:r>
-            <a:endParaRPr lang="en-US" dirty="0"/>
           </a:p>
         </p:txBody>
       </p:sp>
@@ -5368,7 +3986,6 @@
               <a:rPr lang="en-US" dirty="0"/>
               <a:t>1 min. Rápido. Solo marcar que el bloque 04 es el que más les va a servir en el trabajo y el que reaparece en la clase 12 (tamaño de muestra).</a:t>
             </a:r>
-            <a:endParaRPr lang="en-US" dirty="0"/>
           </a:p>
         </p:txBody>
       </p:sp>
@@ -5456,7 +4073,6 @@
               <a:rPr lang="en-US" dirty="0"/>
               <a:t>6 min. Analogía del pan: ¿cuánto pesa una rebanada de grosor cero? Cero. Pero el pan pesa 800 g. El peso vive en el grosor, no en el corte. Advertir: el detalle de ≤ vs &lt; parece trivial hoy, pero les va a ahorrar errores en la clase 7 cuando calculen p-valores.</a:t>
             </a:r>
-            <a:endParaRPr lang="en-US" dirty="0"/>
           </a:p>
         </p:txBody>
       </p:sp>
@@ -5544,7 +4160,6 @@
               <a:rPr lang="en-US" dirty="0"/>
               <a:t>5 min. Eje X = días entre alertas AML, tiempo medio 30 días. Preguntar por qué NO se grafica la probabilidad del bin directamente: porque al partir el bin en dos, la probabilidad se parte a la mitad y el gráfico se aplasta. Dividir por el ancho es lo que estabiliza la altura. Este es el gráfico que van a reproducir en el Colab con el dataset real.</a:t>
             </a:r>
-            <a:endParaRPr lang="en-US" dirty="0"/>
           </a:p>
         </p:txBody>
       </p:sp>
@@ -5632,7 +4247,6 @@
               <a:rPr lang="en-US" dirty="0"/>
               <a:t>6 min. Escribir en la pizarra las unidades: si X está en días, f(x) está en 1/días. Eso mata la confusión de raíz. Pedirles el caso de la Uniforme(0, 0.5) resuelto mentalmente: base 0.5 × altura 2 = 1.</a:t>
             </a:r>
-            <a:endParaRPr lang="en-US" dirty="0"/>
           </a:p>
         </p:txBody>
       </p:sp>
@@ -5720,7 +4334,6 @@
               <a:rPr lang="en-US" dirty="0"/>
               <a:t>6 min. Leer el gráfico juntos: en x=30 la curva va por 0.63 — es decir, el 63 % de los intervalos entre alertas dura menos que el promedio. Ese dato desconcierta y es la mejor entrada al tema de asimetría. Pregunta para el grupo: ¿por qué no es 0.50?</a:t>
             </a:r>
-            <a:endParaRPr lang="en-US" dirty="0"/>
           </a:p>
         </p:txBody>
       </p:sp>
@@ -5808,7 +4421,6 @@
               <a:rPr lang="en-US" dirty="0"/>
               <a:t>6 min. Que noten el salto de la tabla: del 95 % al 99.9 % el cuantil se multiplica por 2.3, y frente a la media por casi 7. Ahí está la razón por la que las colas se modelan aparte. Este ejemplo se retoma en la clase 6 cuando aparezcan los intervalos de confianza — mismo objeto matemático, otro uso.</a:t>
             </a:r>
-            <a:endParaRPr lang="en-US" dirty="0"/>
           </a:p>
         </p:txBody>
       </p:sp>
@@ -5881,6 +4493,11 @@
 <file path=ppt/slideMasters/slideMaster1.xml><?xml version="1.0" encoding="utf-8"?>
 <p:sldMaster xmlns:a="http://schemas.openxmlformats.org/drawingml/2006/main" xmlns:r="http://schemas.openxmlformats.org/officeDocument/2006/relationships" xmlns:p="http://schemas.openxmlformats.org/presentationml/2006/main">
   <p:cSld>
+    <p:bg>
+      <p:bgRef idx="1001">
+        <a:schemeClr val="bg1"/>
+      </p:bgRef>
+    </p:bg>
     <p:spTree>
       <p:nvGrpSpPr>
         <p:cNvPr id="1" name=""/>
@@ -6163,6 +4780,7 @@
         <a:solidFill>
           <a:srgbClr val="0E2148"/>
         </a:solidFill>
+        <a:effectLst/>
       </p:bgPr>
     </p:bg>
     <p:spTree>
@@ -6285,7 +4903,7 @@
           <a:bodyPr wrap="square" lIns="0" tIns="0" rIns="0" bIns="0" rtlCol="0" anchor="ctr"/>
           <a:lstStyle/>
           <a:p>
-            <a:pPr algn="ctr" indent="0" marL="0">
+            <a:pPr marL="0" indent="0" algn="ctr">
               <a:buNone/>
             </a:pPr>
             <a:r>
@@ -6324,7 +4942,7 @@
           <a:bodyPr wrap="square" lIns="0" tIns="0" rIns="0" bIns="0" rtlCol="0" anchor="ctr"/>
           <a:lstStyle/>
           <a:p>
-            <a:pPr indent="0" marL="0">
+            <a:pPr marL="0" indent="0">
               <a:lnSpc>
                 <a:spcPts val="5000"/>
               </a:lnSpc>
@@ -6344,7 +4962,7 @@
             <a:endParaRPr lang="en-US" sz="4600" dirty="0"/>
           </a:p>
           <a:p>
-            <a:pPr indent="0" marL="0">
+            <a:pPr marL="0" indent="0">
               <a:lnSpc>
                 <a:spcPts val="5000"/>
               </a:lnSpc>
@@ -6386,7 +5004,7 @@
           <a:bodyPr wrap="square" lIns="0" tIns="0" rIns="0" bIns="0" rtlCol="0" anchor="ctr"/>
           <a:lstStyle/>
           <a:p>
-            <a:pPr indent="0" marL="0">
+            <a:pPr marL="0" indent="0">
               <a:buNone/>
             </a:pPr>
             <a:r>
@@ -6448,7 +5066,7 @@
           <a:bodyPr wrap="square" lIns="0" tIns="0" rIns="0" bIns="0" rtlCol="0" anchor="ctr"/>
           <a:lstStyle/>
           <a:p>
-            <a:pPr indent="0" marL="0">
+            <a:pPr marL="0" indent="0">
               <a:buNone/>
             </a:pPr>
             <a:r>
@@ -6482,6 +5100,7 @@
         <a:solidFill>
           <a:srgbClr val="F4F7FC"/>
         </a:solidFill>
+        <a:effectLst/>
       </p:bgPr>
     </p:bg>
     <p:spTree>
@@ -6519,7 +5138,7 @@
           <a:bodyPr wrap="square" lIns="0" tIns="0" rIns="0" bIns="0" rtlCol="0" anchor="ctr"/>
           <a:lstStyle/>
           <a:p>
-            <a:pPr indent="0" marL="0">
+            <a:pPr marL="0" indent="0">
               <a:buNone/>
             </a:pPr>
             <a:r>
@@ -6558,7 +5177,7 @@
           <a:bodyPr wrap="square" lIns="0" tIns="0" rIns="0" bIns="0" rtlCol="0" anchor="t"/>
           <a:lstStyle/>
           <a:p>
-            <a:pPr indent="0" marL="0">
+            <a:pPr marL="0" indent="0">
               <a:buNone/>
             </a:pPr>
             <a:r>
@@ -6592,17 +5211,41 @@
         </p:nvGraphicFramePr>
         <p:xfrm>
           <a:off x="548640" y="2194560"/>
-          <a:ext cx="11064240" cy="914400"/>
+          <a:ext cx="11064240" cy="2121408"/>
         </p:xfrm>
         <a:graphic>
           <a:graphicData uri="http://schemas.openxmlformats.org/drawingml/2006/table">
             <a:tbl>
               <a:tblPr/>
               <a:tblGrid>
-                <a:gridCol w="1737360"/>
-                <a:gridCol w="2926080"/>
-                <a:gridCol w="2926080"/>
-                <a:gridCol w="3474720"/>
+                <a:gridCol w="1737360">
+                  <a:extLst>
+                    <a:ext uri="{9D8B030D-6E8A-4147-A177-3AD203B41FA5}">
+                      <a16:colId xmlns:a16="http://schemas.microsoft.com/office/drawing/2014/main" val="20000"/>
+                    </a:ext>
+                  </a:extLst>
+                </a:gridCol>
+                <a:gridCol w="2926080">
+                  <a:extLst>
+                    <a:ext uri="{9D8B030D-6E8A-4147-A177-3AD203B41FA5}">
+                      <a16:colId xmlns:a16="http://schemas.microsoft.com/office/drawing/2014/main" val="20001"/>
+                    </a:ext>
+                  </a:extLst>
+                </a:gridCol>
+                <a:gridCol w="2926080">
+                  <a:extLst>
+                    <a:ext uri="{9D8B030D-6E8A-4147-A177-3AD203B41FA5}">
+                      <a16:colId xmlns:a16="http://schemas.microsoft.com/office/drawing/2014/main" val="20002"/>
+                    </a:ext>
+                  </a:extLst>
+                </a:gridCol>
+                <a:gridCol w="3474720">
+                  <a:extLst>
+                    <a:ext uri="{9D8B030D-6E8A-4147-A177-3AD203B41FA5}">
+                      <a16:colId xmlns:a16="http://schemas.microsoft.com/office/drawing/2014/main" val="20003"/>
+                    </a:ext>
+                  </a:extLst>
+                </a:gridCol>
               </a:tblGrid>
               <a:tr h="530352">
                 <a:tc>
@@ -6610,7 +5253,7 @@
                     <a:bodyPr/>
                     <a:lstStyle/>
                     <a:p>
-                      <a:pPr indent="0" marL="0">
+                      <a:pPr marL="0" indent="0">
                         <a:buNone/>
                       </a:pPr>
                       <a:endParaRPr lang="en-US" sz="1150" dirty="0">
@@ -6620,7 +5263,7 @@
                       </a:endParaRPr>
                     </a:p>
                   </a:txBody>
-                  <a:tcPr marL="91440" marR="91440" marT="91440" marB="91440" anchor="ctr">
+                  <a:tcPr marT="91440" marB="91440" anchor="ctr">
                     <a:lnL w="12700" cap="flat" cmpd="sng" algn="ctr">
                       <a:solidFill>
                         <a:srgbClr val="DCE3F0"/>
@@ -6667,7 +5310,7 @@
                     <a:bodyPr/>
                     <a:lstStyle/>
                     <a:p>
-                      <a:pPr indent="0" marL="0">
+                      <a:pPr marL="0" indent="0">
                         <a:buNone/>
                       </a:pPr>
                       <a:r>
@@ -6688,7 +5331,7 @@
                       </a:endParaRPr>
                     </a:p>
                   </a:txBody>
-                  <a:tcPr marL="91440" marR="91440" marT="91440" marB="91440" anchor="ctr">
+                  <a:tcPr marT="91440" marB="91440" anchor="ctr">
                     <a:lnL w="12700" cap="flat" cmpd="sng" algn="ctr">
                       <a:solidFill>
                         <a:srgbClr val="DCE3F0"/>
@@ -6735,7 +5378,7 @@
                     <a:bodyPr/>
                     <a:lstStyle/>
                     <a:p>
-                      <a:pPr indent="0" marL="0">
+                      <a:pPr marL="0" indent="0">
                         <a:buNone/>
                       </a:pPr>
                       <a:r>
@@ -6756,7 +5399,7 @@
                       </a:endParaRPr>
                     </a:p>
                   </a:txBody>
-                  <a:tcPr marL="91440" marR="91440" marT="91440" marB="91440" anchor="ctr">
+                  <a:tcPr marT="91440" marB="91440" anchor="ctr">
                     <a:lnL w="12700" cap="flat" cmpd="sng" algn="ctr">
                       <a:solidFill>
                         <a:srgbClr val="DCE3F0"/>
@@ -6803,7 +5446,7 @@
                     <a:bodyPr/>
                     <a:lstStyle/>
                     <a:p>
-                      <a:pPr indent="0" marL="0">
+                      <a:pPr marL="0" indent="0">
                         <a:buNone/>
                       </a:pPr>
                       <a:r>
@@ -6824,7 +5467,7 @@
                       </a:endParaRPr>
                     </a:p>
                   </a:txBody>
-                  <a:tcPr marL="91440" marR="91440" marT="91440" marB="91440" anchor="ctr">
+                  <a:tcPr marT="91440" marB="91440" anchor="ctr">
                     <a:lnL w="12700" cap="flat" cmpd="sng" algn="ctr">
                       <a:solidFill>
                         <a:srgbClr val="DCE3F0"/>
@@ -6866,6 +5509,11 @@
                     </a:solidFill>
                   </a:tcPr>
                 </a:tc>
+                <a:extLst>
+                  <a:ext uri="{0D108BD9-81ED-4DB2-BD59-A6C34878D82A}">
+                    <a16:rowId xmlns:a16="http://schemas.microsoft.com/office/drawing/2014/main" val="10000"/>
+                  </a:ext>
+                </a:extLst>
               </a:tr>
               <a:tr h="530352">
                 <a:tc>
@@ -6873,7 +5521,7 @@
                     <a:bodyPr/>
                     <a:lstStyle/>
                     <a:p>
-                      <a:pPr indent="0" marL="0">
+                      <a:pPr marL="0" indent="0">
                         <a:buNone/>
                       </a:pPr>
                       <a:r>
@@ -6894,7 +5542,7 @@
                       </a:endParaRPr>
                     </a:p>
                   </a:txBody>
-                  <a:tcPr marL="91440" marR="91440" marT="91440" marB="91440" anchor="ctr">
+                  <a:tcPr marT="91440" marB="91440" anchor="ctr">
                     <a:lnL w="12700" cap="flat" cmpd="sng" algn="ctr">
                       <a:solidFill>
                         <a:srgbClr val="DCE3F0"/>
@@ -6941,7 +5589,7 @@
                     <a:bodyPr/>
                     <a:lstStyle/>
                     <a:p>
-                      <a:pPr indent="0" marL="0">
+                      <a:pPr marL="0" indent="0">
                         <a:buNone/>
                       </a:pPr>
                       <a:r>
@@ -6962,7 +5610,7 @@
                       </a:endParaRPr>
                     </a:p>
                   </a:txBody>
-                  <a:tcPr marL="91440" marR="91440" marT="91440" marB="91440" anchor="ctr">
+                  <a:tcPr marT="91440" marB="91440" anchor="ctr">
                     <a:lnL w="12700" cap="flat" cmpd="sng" algn="ctr">
                       <a:solidFill>
                         <a:srgbClr val="DCE3F0"/>
@@ -7009,7 +5657,7 @@
                     <a:bodyPr/>
                     <a:lstStyle/>
                     <a:p>
-                      <a:pPr indent="0" marL="0">
+                      <a:pPr marL="0" indent="0">
                         <a:buNone/>
                       </a:pPr>
                       <a:r>
@@ -7030,7 +5678,7 @@
                       </a:endParaRPr>
                     </a:p>
                   </a:txBody>
-                  <a:tcPr marL="91440" marR="91440" marT="91440" marB="91440" anchor="ctr">
+                  <a:tcPr marT="91440" marB="91440" anchor="ctr">
                     <a:lnL w="12700" cap="flat" cmpd="sng" algn="ctr">
                       <a:solidFill>
                         <a:srgbClr val="DCE3F0"/>
@@ -7077,7 +5725,7 @@
                     <a:bodyPr/>
                     <a:lstStyle/>
                     <a:p>
-                      <a:pPr indent="0" marL="0">
+                      <a:pPr marL="0" indent="0">
                         <a:buNone/>
                       </a:pPr>
                       <a:r>
@@ -7098,7 +5746,7 @@
                       </a:endParaRPr>
                     </a:p>
                   </a:txBody>
-                  <a:tcPr marL="91440" marR="91440" marT="91440" marB="91440" anchor="ctr">
+                  <a:tcPr marT="91440" marB="91440" anchor="ctr">
                     <a:lnL w="12700" cap="flat" cmpd="sng" algn="ctr">
                       <a:solidFill>
                         <a:srgbClr val="DCE3F0"/>
@@ -7140,6 +5788,11 @@
                     </a:solidFill>
                   </a:tcPr>
                 </a:tc>
+                <a:extLst>
+                  <a:ext uri="{0D108BD9-81ED-4DB2-BD59-A6C34878D82A}">
+                    <a16:rowId xmlns:a16="http://schemas.microsoft.com/office/drawing/2014/main" val="10001"/>
+                  </a:ext>
+                </a:extLst>
               </a:tr>
               <a:tr h="530352">
                 <a:tc>
@@ -7147,7 +5800,7 @@
                     <a:bodyPr/>
                     <a:lstStyle/>
                     <a:p>
-                      <a:pPr indent="0" marL="0">
+                      <a:pPr marL="0" indent="0">
                         <a:buNone/>
                       </a:pPr>
                       <a:r>
@@ -7168,7 +5821,7 @@
                       </a:endParaRPr>
                     </a:p>
                   </a:txBody>
-                  <a:tcPr marL="91440" marR="91440" marT="91440" marB="91440" anchor="ctr">
+                  <a:tcPr marT="91440" marB="91440" anchor="ctr">
                     <a:lnL w="12700" cap="flat" cmpd="sng" algn="ctr">
                       <a:solidFill>
                         <a:srgbClr val="DCE3F0"/>
@@ -7215,7 +5868,7 @@
                     <a:bodyPr/>
                     <a:lstStyle/>
                     <a:p>
-                      <a:pPr indent="0" marL="0">
+                      <a:pPr marL="0" indent="0">
                         <a:buNone/>
                       </a:pPr>
                       <a:r>
@@ -7236,7 +5889,7 @@
                       </a:endParaRPr>
                     </a:p>
                   </a:txBody>
-                  <a:tcPr marL="91440" marR="91440" marT="91440" marB="91440" anchor="ctr">
+                  <a:tcPr marT="91440" marB="91440" anchor="ctr">
                     <a:lnL w="12700" cap="flat" cmpd="sng" algn="ctr">
                       <a:solidFill>
                         <a:srgbClr val="DCE3F0"/>
@@ -7283,7 +5936,7 @@
                     <a:bodyPr/>
                     <a:lstStyle/>
                     <a:p>
-                      <a:pPr indent="0" marL="0">
+                      <a:pPr marL="0" indent="0">
                         <a:buNone/>
                       </a:pPr>
                       <a:r>
@@ -7304,7 +5957,7 @@
                       </a:endParaRPr>
                     </a:p>
                   </a:txBody>
-                  <a:tcPr marL="91440" marR="91440" marT="91440" marB="91440" anchor="ctr">
+                  <a:tcPr marT="91440" marB="91440" anchor="ctr">
                     <a:lnL w="12700" cap="flat" cmpd="sng" algn="ctr">
                       <a:solidFill>
                         <a:srgbClr val="DCE3F0"/>
@@ -7351,7 +6004,7 @@
                     <a:bodyPr/>
                     <a:lstStyle/>
                     <a:p>
-                      <a:pPr indent="0" marL="0">
+                      <a:pPr marL="0" indent="0">
                         <a:buNone/>
                       </a:pPr>
                       <a:r>
@@ -7372,7 +6025,7 @@
                       </a:endParaRPr>
                     </a:p>
                   </a:txBody>
-                  <a:tcPr marL="91440" marR="91440" marT="91440" marB="91440" anchor="ctr">
+                  <a:tcPr marT="91440" marB="91440" anchor="ctr">
                     <a:lnL w="12700" cap="flat" cmpd="sng" algn="ctr">
                       <a:solidFill>
                         <a:srgbClr val="DCE3F0"/>
@@ -7414,6 +6067,11 @@
                     </a:solidFill>
                   </a:tcPr>
                 </a:tc>
+                <a:extLst>
+                  <a:ext uri="{0D108BD9-81ED-4DB2-BD59-A6C34878D82A}">
+                    <a16:rowId xmlns:a16="http://schemas.microsoft.com/office/drawing/2014/main" val="10002"/>
+                  </a:ext>
+                </a:extLst>
               </a:tr>
               <a:tr h="530352">
                 <a:tc>
@@ -7421,7 +6079,7 @@
                     <a:bodyPr/>
                     <a:lstStyle/>
                     <a:p>
-                      <a:pPr indent="0" marL="0">
+                      <a:pPr marL="0" indent="0">
                         <a:buNone/>
                       </a:pPr>
                       <a:r>
@@ -7442,7 +6100,7 @@
                       </a:endParaRPr>
                     </a:p>
                   </a:txBody>
-                  <a:tcPr marL="91440" marR="91440" marT="91440" marB="91440" anchor="ctr">
+                  <a:tcPr marT="91440" marB="91440" anchor="ctr">
                     <a:lnL w="12700" cap="flat" cmpd="sng" algn="ctr">
                       <a:solidFill>
                         <a:srgbClr val="DCE3F0"/>
@@ -7489,7 +6147,7 @@
                     <a:bodyPr/>
                     <a:lstStyle/>
                     <a:p>
-                      <a:pPr indent="0" marL="0">
+                      <a:pPr marL="0" indent="0">
                         <a:buNone/>
                       </a:pPr>
                       <a:r>
@@ -7510,7 +6168,7 @@
                       </a:endParaRPr>
                     </a:p>
                   </a:txBody>
-                  <a:tcPr marL="91440" marR="91440" marT="91440" marB="91440" anchor="ctr">
+                  <a:tcPr marT="91440" marB="91440" anchor="ctr">
                     <a:lnL w="12700" cap="flat" cmpd="sng" algn="ctr">
                       <a:solidFill>
                         <a:srgbClr val="DCE3F0"/>
@@ -7557,7 +6215,7 @@
                     <a:bodyPr/>
                     <a:lstStyle/>
                     <a:p>
-                      <a:pPr indent="0" marL="0">
+                      <a:pPr marL="0" indent="0">
                         <a:buNone/>
                       </a:pPr>
                       <a:r>
@@ -7578,7 +6236,7 @@
                       </a:endParaRPr>
                     </a:p>
                   </a:txBody>
-                  <a:tcPr marL="91440" marR="91440" marT="91440" marB="91440" anchor="ctr">
+                  <a:tcPr marT="91440" marB="91440" anchor="ctr">
                     <a:lnL w="12700" cap="flat" cmpd="sng" algn="ctr">
                       <a:solidFill>
                         <a:srgbClr val="DCE3F0"/>
@@ -7625,7 +6283,7 @@
                     <a:bodyPr/>
                     <a:lstStyle/>
                     <a:p>
-                      <a:pPr indent="0" marL="0">
+                      <a:pPr marL="0" indent="0">
                         <a:buNone/>
                       </a:pPr>
                       <a:r>
@@ -7646,7 +6304,7 @@
                       </a:endParaRPr>
                     </a:p>
                   </a:txBody>
-                  <a:tcPr marL="91440" marR="91440" marT="91440" marB="91440" anchor="ctr">
+                  <a:tcPr marT="91440" marB="91440" anchor="ctr">
                     <a:lnL w="12700" cap="flat" cmpd="sng" algn="ctr">
                       <a:solidFill>
                         <a:srgbClr val="DCE3F0"/>
@@ -7688,6 +6346,11 @@
                     </a:solidFill>
                   </a:tcPr>
                 </a:tc>
+                <a:extLst>
+                  <a:ext uri="{0D108BD9-81ED-4DB2-BD59-A6C34878D82A}">
+                    <a16:rowId xmlns:a16="http://schemas.microsoft.com/office/drawing/2014/main" val="10003"/>
+                  </a:ext>
+                </a:extLst>
               </a:tr>
             </a:tbl>
           </a:graphicData>
@@ -7741,7 +6404,7 @@
           <a:bodyPr wrap="square" lIns="0" tIns="0" rIns="0" bIns="0" rtlCol="0" anchor="ctr"/>
           <a:lstStyle/>
           <a:p>
-            <a:pPr indent="0" marL="0">
+            <a:pPr marL="0" indent="0">
               <a:lnSpc>
                 <a:spcPts val="1700"/>
               </a:lnSpc>
@@ -7788,7 +6451,7 @@
             <a:prstDash val="solid"/>
           </a:ln>
           <a:effectLst>
-            <a:outerShdw sx="100000" sy="100000" kx="0" ky="0" algn="bl" rotWithShape="0" blurRad="101600" dist="12700" dir="5400000">
+            <a:outerShdw blurRad="101600" dist="12700" dir="5400000" algn="bl" rotWithShape="0">
               <a:srgbClr val="9FB0C9">
                 <a:alpha val="18000"/>
               </a:srgbClr>
@@ -7817,7 +6480,7 @@
           <a:bodyPr wrap="square" lIns="0" tIns="0" rIns="0" bIns="0" rtlCol="0" anchor="t"/>
           <a:lstStyle/>
           <a:p>
-            <a:pPr algn="l" indent="0" marL="0">
+            <a:pPr marL="0" indent="0" algn="l">
               <a:lnSpc>
                 <a:spcPts val="1700"/>
               </a:lnSpc>
@@ -7859,7 +6522,7 @@
           <a:bodyPr wrap="square" lIns="0" tIns="0" rIns="0" bIns="0" rtlCol="0" anchor="ctr"/>
           <a:lstStyle/>
           <a:p>
-            <a:pPr indent="0" marL="0">
+            <a:pPr marL="0" indent="0">
               <a:buNone/>
             </a:pPr>
             <a:r>
@@ -7898,7 +6561,7 @@
           <a:bodyPr wrap="square" lIns="0" tIns="0" rIns="0" bIns="0" rtlCol="0" anchor="ctr"/>
           <a:lstStyle/>
           <a:p>
-            <a:pPr algn="r" indent="0" marL="0">
+            <a:pPr marL="0" indent="0" algn="r">
               <a:buNone/>
             </a:pPr>
             <a:r>
@@ -7932,6 +6595,7 @@
         <a:solidFill>
           <a:srgbClr val="F4F7FC"/>
         </a:solidFill>
+        <a:effectLst/>
       </p:bgPr>
     </p:bg>
     <p:spTree>
@@ -7969,7 +6633,7 @@
           <a:bodyPr wrap="square" lIns="0" tIns="0" rIns="0" bIns="0" rtlCol="0" anchor="ctr"/>
           <a:lstStyle/>
           <a:p>
-            <a:pPr indent="0" marL="0">
+            <a:pPr marL="0" indent="0">
               <a:buNone/>
             </a:pPr>
             <a:r>
@@ -8008,7 +6672,7 @@
           <a:bodyPr wrap="square" lIns="0" tIns="0" rIns="0" bIns="0" rtlCol="0" anchor="t"/>
           <a:lstStyle/>
           <a:p>
-            <a:pPr indent="0" marL="0">
+            <a:pPr marL="0" indent="0">
               <a:buNone/>
             </a:pPr>
             <a:r>
@@ -8028,7 +6692,7 @@
       </p:sp>
       <p:graphicFrame>
         <p:nvGraphicFramePr>
-          <p:cNvPr id="4" name="Chart 0" descr=""/>
+          <p:cNvPr id="4" name="Chart 0"/>
           <p:cNvGraphicFramePr/>
           <p:nvPr/>
         </p:nvGraphicFramePr>
@@ -8036,9 +6700,9 @@
           <a:off x="548640" y="2103120"/>
           <a:ext cx="5943600" cy="3474720"/>
         </p:xfrm>
-        <a:graphic xmlns:a="http://schemas.openxmlformats.org/drawingml/2006/main">
+        <a:graphic>
           <a:graphicData uri="http://schemas.openxmlformats.org/drawingml/2006/chart">
-            <c:chart xmlns:c="http://schemas.openxmlformats.org/drawingml/2006/chart" r:id="rId1"/>
+            <c:chart xmlns:c="http://schemas.openxmlformats.org/drawingml/2006/chart" xmlns:r="http://schemas.openxmlformats.org/officeDocument/2006/relationships" r:id="rId3"/>
           </a:graphicData>
         </a:graphic>
       </p:graphicFrame>
@@ -8068,7 +6732,7 @@
             <a:prstDash val="solid"/>
           </a:ln>
           <a:effectLst>
-            <a:outerShdw sx="100000" sy="100000" kx="0" ky="0" algn="bl" rotWithShape="0" blurRad="101600" dist="12700" dir="5400000">
+            <a:outerShdw blurRad="101600" dist="12700" dir="5400000" algn="bl" rotWithShape="0">
               <a:srgbClr val="9FB0C9">
                 <a:alpha val="18000"/>
               </a:srgbClr>
@@ -8097,7 +6761,7 @@
           <a:bodyPr wrap="square" lIns="0" tIns="0" rIns="0" bIns="0" rtlCol="0" anchor="ctr"/>
           <a:lstStyle/>
           <a:p>
-            <a:pPr indent="0" marL="0">
+            <a:pPr marL="0" indent="0">
               <a:buNone/>
             </a:pPr>
             <a:r>
@@ -8136,7 +6800,7 @@
           <a:bodyPr wrap="square" lIns="0" tIns="0" rIns="0" bIns="0" rtlCol="0" anchor="t"/>
           <a:lstStyle/>
           <a:p>
-            <a:pPr algn="l" indent="0" marL="0">
+            <a:pPr marL="0" indent="0" algn="l">
               <a:lnSpc>
                 <a:spcPts val="1600"/>
               </a:lnSpc>
@@ -8183,7 +6847,7 @@
             <a:prstDash val="solid"/>
           </a:ln>
           <a:effectLst>
-            <a:outerShdw sx="100000" sy="100000" kx="0" ky="0" algn="bl" rotWithShape="0" blurRad="101600" dist="12700" dir="5400000">
+            <a:outerShdw blurRad="101600" dist="12700" dir="5400000" algn="bl" rotWithShape="0">
               <a:srgbClr val="9FB0C9">
                 <a:alpha val="18000"/>
               </a:srgbClr>
@@ -8212,7 +6876,7 @@
           <a:bodyPr wrap="square" lIns="0" tIns="0" rIns="0" bIns="0" rtlCol="0" anchor="ctr"/>
           <a:lstStyle/>
           <a:p>
-            <a:pPr indent="0" marL="0">
+            <a:pPr marL="0" indent="0">
               <a:buNone/>
             </a:pPr>
             <a:r>
@@ -8251,7 +6915,7 @@
           <a:bodyPr wrap="square" lIns="0" tIns="0" rIns="0" bIns="0" rtlCol="0" anchor="t"/>
           <a:lstStyle/>
           <a:p>
-            <a:pPr algn="l" indent="0" marL="0">
+            <a:pPr marL="0" indent="0" algn="l">
               <a:lnSpc>
                 <a:spcPts val="1600"/>
               </a:lnSpc>
@@ -8293,7 +6957,7 @@
           <a:bodyPr wrap="square" lIns="0" tIns="0" rIns="0" bIns="0" rtlCol="0" anchor="ctr"/>
           <a:lstStyle/>
           <a:p>
-            <a:pPr indent="0" marL="0">
+            <a:pPr marL="0" indent="0">
               <a:buNone/>
             </a:pPr>
             <a:r>
@@ -8332,7 +6996,7 @@
           <a:bodyPr wrap="square" lIns="0" tIns="0" rIns="0" bIns="0" rtlCol="0" anchor="ctr"/>
           <a:lstStyle/>
           <a:p>
-            <a:pPr algn="r" indent="0" marL="0">
+            <a:pPr marL="0" indent="0" algn="r">
               <a:buNone/>
             </a:pPr>
             <a:r>
@@ -8366,6 +7030,7 @@
         <a:solidFill>
           <a:srgbClr val="F4F7FC"/>
         </a:solidFill>
+        <a:effectLst/>
       </p:bgPr>
     </p:bg>
     <p:spTree>
@@ -8403,7 +7068,7 @@
           <a:bodyPr wrap="square" lIns="0" tIns="0" rIns="0" bIns="0" rtlCol="0" anchor="ctr"/>
           <a:lstStyle/>
           <a:p>
-            <a:pPr indent="0" marL="0">
+            <a:pPr marL="0" indent="0">
               <a:buNone/>
             </a:pPr>
             <a:r>
@@ -8442,7 +7107,7 @@
           <a:bodyPr wrap="square" lIns="0" tIns="0" rIns="0" bIns="0" rtlCol="0" anchor="t"/>
           <a:lstStyle/>
           <a:p>
-            <a:pPr indent="0" marL="0">
+            <a:pPr marL="0" indent="0">
               <a:buNone/>
             </a:pPr>
             <a:r>
@@ -8462,7 +7127,7 @@
       </p:sp>
       <p:graphicFrame>
         <p:nvGraphicFramePr>
-          <p:cNvPr id="4" name="Chart 0" descr=""/>
+          <p:cNvPr id="4" name="Chart 0"/>
           <p:cNvGraphicFramePr/>
           <p:nvPr/>
         </p:nvGraphicFramePr>
@@ -8470,9 +7135,9 @@
           <a:off x="548640" y="2103120"/>
           <a:ext cx="5943600" cy="3474720"/>
         </p:xfrm>
-        <a:graphic xmlns:a="http://schemas.openxmlformats.org/drawingml/2006/main">
+        <a:graphic>
           <a:graphicData uri="http://schemas.openxmlformats.org/drawingml/2006/chart">
-            <c:chart xmlns:c="http://schemas.openxmlformats.org/drawingml/2006/chart" r:id="rId1"/>
+            <c:chart xmlns:c="http://schemas.openxmlformats.org/drawingml/2006/chart" xmlns:r="http://schemas.openxmlformats.org/officeDocument/2006/relationships" r:id="rId3"/>
           </a:graphicData>
         </a:graphic>
       </p:graphicFrame>
@@ -8502,7 +7167,7 @@
             <a:prstDash val="solid"/>
           </a:ln>
           <a:effectLst>
-            <a:outerShdw sx="100000" sy="100000" kx="0" ky="0" algn="bl" rotWithShape="0" blurRad="101600" dist="12700" dir="5400000">
+            <a:outerShdw blurRad="101600" dist="12700" dir="5400000" algn="bl" rotWithShape="0">
               <a:srgbClr val="9FB0C9">
                 <a:alpha val="18000"/>
               </a:srgbClr>
@@ -8531,7 +7196,7 @@
           <a:bodyPr wrap="square" lIns="0" tIns="0" rIns="0" bIns="0" rtlCol="0" anchor="ctr"/>
           <a:lstStyle/>
           <a:p>
-            <a:pPr indent="0" marL="0">
+            <a:pPr marL="0" indent="0">
               <a:buNone/>
             </a:pPr>
             <a:r>
@@ -8570,7 +7235,7 @@
           <a:bodyPr wrap="square" lIns="0" tIns="0" rIns="0" bIns="0" rtlCol="0" anchor="t"/>
           <a:lstStyle/>
           <a:p>
-            <a:pPr algn="l" indent="0" marL="0">
+            <a:pPr marL="0" indent="0" algn="l">
               <a:lnSpc>
                 <a:spcPts val="1600"/>
               </a:lnSpc>
@@ -8617,7 +7282,7 @@
             <a:prstDash val="solid"/>
           </a:ln>
           <a:effectLst>
-            <a:outerShdw sx="100000" sy="100000" kx="0" ky="0" algn="bl" rotWithShape="0" blurRad="101600" dist="12700" dir="5400000">
+            <a:outerShdw blurRad="101600" dist="12700" dir="5400000" algn="bl" rotWithShape="0">
               <a:srgbClr val="9FB0C9">
                 <a:alpha val="18000"/>
               </a:srgbClr>
@@ -8646,7 +7311,7 @@
           <a:bodyPr wrap="square" lIns="0" tIns="0" rIns="0" bIns="0" rtlCol="0" anchor="ctr"/>
           <a:lstStyle/>
           <a:p>
-            <a:pPr indent="0" marL="0">
+            <a:pPr marL="0" indent="0">
               <a:buNone/>
             </a:pPr>
             <a:r>
@@ -8685,7 +7350,7 @@
           <a:bodyPr wrap="square" lIns="0" tIns="0" rIns="0" bIns="0" rtlCol="0" anchor="t"/>
           <a:lstStyle/>
           <a:p>
-            <a:pPr algn="l" indent="0" marL="0">
+            <a:pPr marL="0" indent="0" algn="l">
               <a:lnSpc>
                 <a:spcPts val="1600"/>
               </a:lnSpc>
@@ -8727,7 +7392,7 @@
           <a:bodyPr wrap="square" lIns="0" tIns="0" rIns="0" bIns="0" rtlCol="0" anchor="ctr"/>
           <a:lstStyle/>
           <a:p>
-            <a:pPr indent="0" marL="0">
+            <a:pPr marL="0" indent="0">
               <a:buNone/>
             </a:pPr>
             <a:r>
@@ -8766,7 +7431,7 @@
           <a:bodyPr wrap="square" lIns="0" tIns="0" rIns="0" bIns="0" rtlCol="0" anchor="ctr"/>
           <a:lstStyle/>
           <a:p>
-            <a:pPr algn="r" indent="0" marL="0">
+            <a:pPr marL="0" indent="0" algn="r">
               <a:buNone/>
             </a:pPr>
             <a:r>
@@ -8800,6 +7465,7 @@
         <a:solidFill>
           <a:srgbClr val="F4F7FC"/>
         </a:solidFill>
+        <a:effectLst/>
       </p:bgPr>
     </p:bg>
     <p:spTree>
@@ -8837,7 +7503,7 @@
           <a:bodyPr wrap="square" lIns="0" tIns="0" rIns="0" bIns="0" rtlCol="0" anchor="ctr"/>
           <a:lstStyle/>
           <a:p>
-            <a:pPr indent="0" marL="0">
+            <a:pPr marL="0" indent="0">
               <a:buNone/>
             </a:pPr>
             <a:r>
@@ -8876,7 +7542,7 @@
           <a:bodyPr wrap="square" lIns="0" tIns="0" rIns="0" bIns="0" rtlCol="0" anchor="t"/>
           <a:lstStyle/>
           <a:p>
-            <a:pPr indent="0" marL="0">
+            <a:pPr marL="0" indent="0">
               <a:buNone/>
             </a:pPr>
             <a:r>
@@ -8920,7 +7586,7 @@
             <a:prstDash val="solid"/>
           </a:ln>
           <a:effectLst>
-            <a:outerShdw sx="100000" sy="100000" kx="0" ky="0" algn="bl" rotWithShape="0" blurRad="101600" dist="12700" dir="5400000">
+            <a:outerShdw blurRad="101600" dist="12700" dir="5400000" algn="bl" rotWithShape="0">
               <a:srgbClr val="9FB0C9">
                 <a:alpha val="18000"/>
               </a:srgbClr>
@@ -8949,7 +7615,7 @@
           <a:bodyPr wrap="square" lIns="0" tIns="0" rIns="0" bIns="0" rtlCol="0" anchor="ctr"/>
           <a:lstStyle/>
           <a:p>
-            <a:pPr algn="ctr" indent="0" marL="0">
+            <a:pPr marL="0" indent="0" algn="ctr">
               <a:buNone/>
             </a:pPr>
             <a:r>
@@ -8993,7 +7659,7 @@
             <a:prstDash val="solid"/>
           </a:ln>
           <a:effectLst>
-            <a:outerShdw sx="100000" sy="100000" kx="0" ky="0" algn="bl" rotWithShape="0" blurRad="101600" dist="12700" dir="5400000">
+            <a:outerShdw blurRad="101600" dist="12700" dir="5400000" algn="bl" rotWithShape="0">
               <a:srgbClr val="9FB0C9">
                 <a:alpha val="18000"/>
               </a:srgbClr>
@@ -9049,7 +7715,7 @@
           <a:bodyPr wrap="square" lIns="0" tIns="0" rIns="0" bIns="0" rtlCol="0" anchor="ctr"/>
           <a:lstStyle/>
           <a:p>
-            <a:pPr algn="ctr" indent="0" marL="0">
+            <a:pPr marL="0" indent="0" algn="ctr">
               <a:buNone/>
             </a:pPr>
             <a:r>
@@ -9088,7 +7754,7 @@
           <a:bodyPr wrap="square" lIns="0" tIns="0" rIns="0" bIns="0" rtlCol="0" anchor="t"/>
           <a:lstStyle/>
           <a:p>
-            <a:pPr algn="l" indent="0" marL="0">
+            <a:pPr marL="0" indent="0" algn="l">
               <a:lnSpc>
                 <a:spcPts val="1700"/>
               </a:lnSpc>
@@ -9135,7 +7801,7 @@
             <a:prstDash val="solid"/>
           </a:ln>
           <a:effectLst>
-            <a:outerShdw sx="100000" sy="100000" kx="0" ky="0" algn="bl" rotWithShape="0" blurRad="101600" dist="12700" dir="5400000">
+            <a:outerShdw blurRad="101600" dist="12700" dir="5400000" algn="bl" rotWithShape="0">
               <a:srgbClr val="9FB0C9">
                 <a:alpha val="18000"/>
               </a:srgbClr>
@@ -9191,7 +7857,7 @@
           <a:bodyPr wrap="square" lIns="0" tIns="0" rIns="0" bIns="0" rtlCol="0" anchor="ctr"/>
           <a:lstStyle/>
           <a:p>
-            <a:pPr algn="ctr" indent="0" marL="0">
+            <a:pPr marL="0" indent="0" algn="ctr">
               <a:buNone/>
             </a:pPr>
             <a:r>
@@ -9230,7 +7896,7 @@
           <a:bodyPr wrap="square" lIns="0" tIns="0" rIns="0" bIns="0" rtlCol="0" anchor="t"/>
           <a:lstStyle/>
           <a:p>
-            <a:pPr algn="l" indent="0" marL="0">
+            <a:pPr marL="0" indent="0" algn="l">
               <a:lnSpc>
                 <a:spcPts val="1700"/>
               </a:lnSpc>
@@ -9272,7 +7938,7 @@
           <a:bodyPr wrap="square" lIns="0" tIns="0" rIns="0" bIns="0" rtlCol="0" anchor="ctr"/>
           <a:lstStyle/>
           <a:p>
-            <a:pPr indent="0" marL="0">
+            <a:pPr marL="0" indent="0">
               <a:buNone/>
             </a:pPr>
             <a:r>
@@ -9311,7 +7977,7 @@
           <a:bodyPr wrap="square" lIns="0" tIns="0" rIns="0" bIns="0" rtlCol="0" anchor="ctr"/>
           <a:lstStyle/>
           <a:p>
-            <a:pPr algn="r" indent="0" marL="0">
+            <a:pPr marL="0" indent="0" algn="r">
               <a:buNone/>
             </a:pPr>
             <a:r>
@@ -9345,6 +8011,7 @@
         <a:solidFill>
           <a:srgbClr val="F4F7FC"/>
         </a:solidFill>
+        <a:effectLst/>
       </p:bgPr>
     </p:bg>
     <p:spTree>
@@ -9382,7 +8049,7 @@
           <a:bodyPr wrap="square" lIns="0" tIns="0" rIns="0" bIns="0" rtlCol="0" anchor="ctr"/>
           <a:lstStyle/>
           <a:p>
-            <a:pPr indent="0" marL="0">
+            <a:pPr marL="0" indent="0">
               <a:buNone/>
             </a:pPr>
             <a:r>
@@ -9421,7 +8088,7 @@
           <a:bodyPr wrap="square" lIns="0" tIns="0" rIns="0" bIns="0" rtlCol="0" anchor="t"/>
           <a:lstStyle/>
           <a:p>
-            <a:pPr indent="0" marL="0">
+            <a:pPr marL="0" indent="0">
               <a:buNone/>
             </a:pPr>
             <a:r>
@@ -9465,7 +8132,7 @@
             <a:prstDash val="solid"/>
           </a:ln>
           <a:effectLst>
-            <a:outerShdw sx="100000" sy="100000" kx="0" ky="0" algn="bl" rotWithShape="0" blurRad="101600" dist="12700" dir="5400000">
+            <a:outerShdw blurRad="101600" dist="12700" dir="5400000" algn="bl" rotWithShape="0">
               <a:srgbClr val="9FB0C9">
                 <a:alpha val="18000"/>
               </a:srgbClr>
@@ -9494,7 +8161,7 @@
           <a:bodyPr wrap="square" lIns="0" tIns="0" rIns="0" bIns="0" rtlCol="0" anchor="ctr"/>
           <a:lstStyle/>
           <a:p>
-            <a:pPr indent="0" marL="0">
+            <a:pPr marL="0" indent="0">
               <a:buNone/>
             </a:pPr>
             <a:r>
@@ -9533,7 +8200,7 @@
           <a:bodyPr wrap="square" lIns="0" tIns="0" rIns="0" bIns="0" rtlCol="0" anchor="ctr"/>
           <a:lstStyle/>
           <a:p>
-            <a:pPr indent="0" marL="0">
+            <a:pPr marL="0" indent="0">
               <a:buNone/>
             </a:pPr>
             <a:r>
@@ -9572,7 +8239,7 @@
           <a:bodyPr wrap="square" lIns="0" tIns="0" rIns="0" bIns="0" rtlCol="0" anchor="t"/>
           <a:lstStyle/>
           <a:p>
-            <a:pPr algn="l" indent="0" marL="0">
+            <a:pPr marL="0" indent="0" algn="l">
               <a:lnSpc>
                 <a:spcPts val="1600"/>
               </a:lnSpc>
@@ -9614,7 +8281,7 @@
           <a:bodyPr wrap="square" lIns="0" tIns="0" rIns="0" bIns="0" rtlCol="0" anchor="ctr"/>
           <a:lstStyle/>
           <a:p>
-            <a:pPr indent="0" marL="0">
+            <a:pPr marL="0" indent="0">
               <a:buNone/>
             </a:pPr>
             <a:r>
@@ -9658,7 +8325,7 @@
             <a:prstDash val="solid"/>
           </a:ln>
           <a:effectLst>
-            <a:outerShdw sx="100000" sy="100000" kx="0" ky="0" algn="bl" rotWithShape="0" blurRad="101600" dist="12700" dir="5400000">
+            <a:outerShdw blurRad="101600" dist="12700" dir="5400000" algn="bl" rotWithShape="0">
               <a:srgbClr val="9FB0C9">
                 <a:alpha val="18000"/>
               </a:srgbClr>
@@ -9687,7 +8354,7 @@
           <a:bodyPr wrap="square" lIns="0" tIns="0" rIns="0" bIns="0" rtlCol="0" anchor="ctr"/>
           <a:lstStyle/>
           <a:p>
-            <a:pPr indent="0" marL="0">
+            <a:pPr marL="0" indent="0">
               <a:buNone/>
             </a:pPr>
             <a:r>
@@ -9726,7 +8393,7 @@
           <a:bodyPr wrap="square" lIns="0" tIns="0" rIns="0" bIns="0" rtlCol="0" anchor="ctr"/>
           <a:lstStyle/>
           <a:p>
-            <a:pPr indent="0" marL="0">
+            <a:pPr marL="0" indent="0">
               <a:buNone/>
             </a:pPr>
             <a:r>
@@ -9765,7 +8432,7 @@
           <a:bodyPr wrap="square" lIns="0" tIns="0" rIns="0" bIns="0" rtlCol="0" anchor="t"/>
           <a:lstStyle/>
           <a:p>
-            <a:pPr algn="l" indent="0" marL="0">
+            <a:pPr marL="0" indent="0" algn="l">
               <a:lnSpc>
                 <a:spcPts val="1600"/>
               </a:lnSpc>
@@ -9807,7 +8474,7 @@
           <a:bodyPr wrap="square" lIns="0" tIns="0" rIns="0" bIns="0" rtlCol="0" anchor="ctr"/>
           <a:lstStyle/>
           <a:p>
-            <a:pPr indent="0" marL="0">
+            <a:pPr marL="0" indent="0">
               <a:buNone/>
             </a:pPr>
             <a:r>
@@ -9851,7 +8518,7 @@
             <a:prstDash val="solid"/>
           </a:ln>
           <a:effectLst>
-            <a:outerShdw sx="100000" sy="100000" kx="0" ky="0" algn="bl" rotWithShape="0" blurRad="101600" dist="12700" dir="5400000">
+            <a:outerShdw blurRad="101600" dist="12700" dir="5400000" algn="bl" rotWithShape="0">
               <a:srgbClr val="9FB0C9">
                 <a:alpha val="18000"/>
               </a:srgbClr>
@@ -9880,7 +8547,7 @@
           <a:bodyPr wrap="square" lIns="0" tIns="0" rIns="0" bIns="0" rtlCol="0" anchor="ctr"/>
           <a:lstStyle/>
           <a:p>
-            <a:pPr indent="0" marL="0">
+            <a:pPr marL="0" indent="0">
               <a:buNone/>
             </a:pPr>
             <a:r>
@@ -9919,7 +8586,7 @@
           <a:bodyPr wrap="square" lIns="0" tIns="0" rIns="0" bIns="0" rtlCol="0" anchor="ctr"/>
           <a:lstStyle/>
           <a:p>
-            <a:pPr indent="0" marL="0">
+            <a:pPr marL="0" indent="0">
               <a:buNone/>
             </a:pPr>
             <a:r>
@@ -9958,7 +8625,7 @@
           <a:bodyPr wrap="square" lIns="0" tIns="0" rIns="0" bIns="0" rtlCol="0" anchor="t"/>
           <a:lstStyle/>
           <a:p>
-            <a:pPr algn="l" indent="0" marL="0">
+            <a:pPr marL="0" indent="0" algn="l">
               <a:lnSpc>
                 <a:spcPts val="1600"/>
               </a:lnSpc>
@@ -10000,7 +8667,7 @@
           <a:bodyPr wrap="square" lIns="0" tIns="0" rIns="0" bIns="0" rtlCol="0" anchor="ctr"/>
           <a:lstStyle/>
           <a:p>
-            <a:pPr indent="0" marL="0">
+            <a:pPr marL="0" indent="0">
               <a:buNone/>
             </a:pPr>
             <a:r>
@@ -10044,7 +8711,7 @@
             <a:prstDash val="solid"/>
           </a:ln>
           <a:effectLst>
-            <a:outerShdw sx="100000" sy="100000" kx="0" ky="0" algn="bl" rotWithShape="0" blurRad="101600" dist="12700" dir="5400000">
+            <a:outerShdw blurRad="101600" dist="12700" dir="5400000" algn="bl" rotWithShape="0">
               <a:srgbClr val="9FB0C9">
                 <a:alpha val="18000"/>
               </a:srgbClr>
@@ -10073,7 +8740,7 @@
           <a:bodyPr wrap="square" lIns="0" tIns="0" rIns="0" bIns="0" rtlCol="0" anchor="ctr"/>
           <a:lstStyle/>
           <a:p>
-            <a:pPr indent="0" marL="0">
+            <a:pPr marL="0" indent="0">
               <a:buNone/>
             </a:pPr>
             <a:r>
@@ -10112,7 +8779,7 @@
           <a:bodyPr wrap="square" lIns="0" tIns="0" rIns="0" bIns="0" rtlCol="0" anchor="t"/>
           <a:lstStyle/>
           <a:p>
-            <a:pPr algn="l" indent="0" marL="0">
+            <a:pPr marL="0" indent="0" algn="l">
               <a:lnSpc>
                 <a:spcPts val="1500"/>
               </a:lnSpc>
@@ -10154,7 +8821,7 @@
           <a:bodyPr wrap="square" lIns="0" tIns="0" rIns="0" bIns="0" rtlCol="0" anchor="ctr"/>
           <a:lstStyle/>
           <a:p>
-            <a:pPr indent="0" marL="0">
+            <a:pPr marL="0" indent="0">
               <a:buNone/>
             </a:pPr>
             <a:r>
@@ -10193,7 +8860,7 @@
           <a:bodyPr wrap="square" lIns="0" tIns="0" rIns="0" bIns="0" rtlCol="0" anchor="ctr"/>
           <a:lstStyle/>
           <a:p>
-            <a:pPr algn="r" indent="0" marL="0">
+            <a:pPr marL="0" indent="0" algn="r">
               <a:buNone/>
             </a:pPr>
             <a:r>
@@ -10227,6 +8894,7 @@
         <a:solidFill>
           <a:srgbClr val="F4F7FC"/>
         </a:solidFill>
+        <a:effectLst/>
       </p:bgPr>
     </p:bg>
     <p:spTree>
@@ -10264,7 +8932,7 @@
           <a:bodyPr wrap="square" lIns="0" tIns="0" rIns="0" bIns="0" rtlCol="0" anchor="ctr"/>
           <a:lstStyle/>
           <a:p>
-            <a:pPr indent="0" marL="0">
+            <a:pPr marL="0" indent="0">
               <a:buNone/>
             </a:pPr>
             <a:r>
@@ -10303,7 +8971,7 @@
           <a:bodyPr wrap="square" lIns="0" tIns="0" rIns="0" bIns="0" rtlCol="0" anchor="t"/>
           <a:lstStyle/>
           <a:p>
-            <a:pPr indent="0" marL="0">
+            <a:pPr marL="0" indent="0">
               <a:buNone/>
             </a:pPr>
             <a:r>
@@ -10337,17 +9005,41 @@
         </p:nvGraphicFramePr>
         <p:xfrm>
           <a:off x="548640" y="2194560"/>
-          <a:ext cx="11064240" cy="914400"/>
+          <a:ext cx="11064240" cy="3291840"/>
         </p:xfrm>
         <a:graphic>
           <a:graphicData uri="http://schemas.openxmlformats.org/drawingml/2006/table">
             <a:tbl>
               <a:tblPr/>
               <a:tblGrid>
-                <a:gridCol w="3931920"/>
-                <a:gridCol w="2651760"/>
-                <a:gridCol w="1737360"/>
-                <a:gridCol w="2743200"/>
+                <a:gridCol w="3931920">
+                  <a:extLst>
+                    <a:ext uri="{9D8B030D-6E8A-4147-A177-3AD203B41FA5}">
+                      <a16:colId xmlns:a16="http://schemas.microsoft.com/office/drawing/2014/main" val="20000"/>
+                    </a:ext>
+                  </a:extLst>
+                </a:gridCol>
+                <a:gridCol w="2651760">
+                  <a:extLst>
+                    <a:ext uri="{9D8B030D-6E8A-4147-A177-3AD203B41FA5}">
+                      <a16:colId xmlns:a16="http://schemas.microsoft.com/office/drawing/2014/main" val="20001"/>
+                    </a:ext>
+                  </a:extLst>
+                </a:gridCol>
+                <a:gridCol w="1737360">
+                  <a:extLst>
+                    <a:ext uri="{9D8B030D-6E8A-4147-A177-3AD203B41FA5}">
+                      <a16:colId xmlns:a16="http://schemas.microsoft.com/office/drawing/2014/main" val="20002"/>
+                    </a:ext>
+                  </a:extLst>
+                </a:gridCol>
+                <a:gridCol w="2743200">
+                  <a:extLst>
+                    <a:ext uri="{9D8B030D-6E8A-4147-A177-3AD203B41FA5}">
+                      <a16:colId xmlns:a16="http://schemas.microsoft.com/office/drawing/2014/main" val="20003"/>
+                    </a:ext>
+                  </a:extLst>
+                </a:gridCol>
               </a:tblGrid>
               <a:tr h="548640">
                 <a:tc>
@@ -10355,7 +9047,7 @@
                     <a:bodyPr/>
                     <a:lstStyle/>
                     <a:p>
-                      <a:pPr indent="0" marL="0">
+                      <a:pPr marL="0" indent="0">
                         <a:buNone/>
                       </a:pPr>
                       <a:r>
@@ -10376,7 +9068,7 @@
                       </a:endParaRPr>
                     </a:p>
                   </a:txBody>
-                  <a:tcPr marL="91440" marR="91440" marT="91440" marB="91440" anchor="ctr">
+                  <a:tcPr marT="91440" marB="91440" anchor="ctr">
                     <a:lnL w="12700" cap="flat" cmpd="sng" algn="ctr">
                       <a:solidFill>
                         <a:srgbClr val="DCE3F0"/>
@@ -10423,7 +9115,7 @@
                     <a:bodyPr/>
                     <a:lstStyle/>
                     <a:p>
-                      <a:pPr indent="0" marL="0">
+                      <a:pPr marL="0" indent="0">
                         <a:buNone/>
                       </a:pPr>
                       <a:r>
@@ -10444,7 +9136,7 @@
                       </a:endParaRPr>
                     </a:p>
                   </a:txBody>
-                  <a:tcPr marL="91440" marR="91440" marT="91440" marB="91440" anchor="ctr">
+                  <a:tcPr marT="91440" marB="91440" anchor="ctr">
                     <a:lnL w="12700" cap="flat" cmpd="sng" algn="ctr">
                       <a:solidFill>
                         <a:srgbClr val="DCE3F0"/>
@@ -10491,7 +9183,7 @@
                     <a:bodyPr/>
                     <a:lstStyle/>
                     <a:p>
-                      <a:pPr indent="0" marL="0">
+                      <a:pPr marL="0" indent="0">
                         <a:buNone/>
                       </a:pPr>
                       <a:r>
@@ -10512,7 +9204,7 @@
                       </a:endParaRPr>
                     </a:p>
                   </a:txBody>
-                  <a:tcPr marL="91440" marR="91440" marT="91440" marB="91440" anchor="ctr">
+                  <a:tcPr marT="91440" marB="91440" anchor="ctr">
                     <a:lnL w="12700" cap="flat" cmpd="sng" algn="ctr">
                       <a:solidFill>
                         <a:srgbClr val="DCE3F0"/>
@@ -10559,7 +9251,7 @@
                     <a:bodyPr/>
                     <a:lstStyle/>
                     <a:p>
-                      <a:pPr indent="0" marL="0">
+                      <a:pPr marL="0" indent="0">
                         <a:buNone/>
                       </a:pPr>
                       <a:r>
@@ -10580,7 +9272,7 @@
                       </a:endParaRPr>
                     </a:p>
                   </a:txBody>
-                  <a:tcPr marL="91440" marR="91440" marT="91440" marB="91440" anchor="ctr">
+                  <a:tcPr marT="91440" marB="91440" anchor="ctr">
                     <a:lnL w="12700" cap="flat" cmpd="sng" algn="ctr">
                       <a:solidFill>
                         <a:srgbClr val="DCE3F0"/>
@@ -10622,6 +9314,11 @@
                     </a:solidFill>
                   </a:tcPr>
                 </a:tc>
+                <a:extLst>
+                  <a:ext uri="{0D108BD9-81ED-4DB2-BD59-A6C34878D82A}">
+                    <a16:rowId xmlns:a16="http://schemas.microsoft.com/office/drawing/2014/main" val="10000"/>
+                  </a:ext>
+                </a:extLst>
               </a:tr>
               <a:tr h="548640">
                 <a:tc>
@@ -10629,7 +9326,7 @@
                     <a:bodyPr/>
                     <a:lstStyle/>
                     <a:p>
-                      <a:pPr indent="0" marL="0">
+                      <a:pPr marL="0" indent="0">
                         <a:buNone/>
                       </a:pPr>
                       <a:r>
@@ -10650,7 +9347,7 @@
                       </a:endParaRPr>
                     </a:p>
                   </a:txBody>
-                  <a:tcPr marL="91440" marR="91440" marT="91440" marB="91440" anchor="ctr">
+                  <a:tcPr marT="91440" marB="91440" anchor="ctr">
                     <a:lnL w="12700" cap="flat" cmpd="sng" algn="ctr">
                       <a:solidFill>
                         <a:srgbClr val="DCE3F0"/>
@@ -10697,7 +9394,7 @@
                     <a:bodyPr/>
                     <a:lstStyle/>
                     <a:p>
-                      <a:pPr indent="0" marL="0">
+                      <a:pPr marL="0" indent="0">
                         <a:buNone/>
                       </a:pPr>
                       <a:r>
@@ -10718,7 +9415,7 @@
                       </a:endParaRPr>
                     </a:p>
                   </a:txBody>
-                  <a:tcPr marL="91440" marR="91440" marT="91440" marB="91440" anchor="ctr">
+                  <a:tcPr marT="91440" marB="91440" anchor="ctr">
                     <a:lnL w="12700" cap="flat" cmpd="sng" algn="ctr">
                       <a:solidFill>
                         <a:srgbClr val="DCE3F0"/>
@@ -10765,7 +9462,7 @@
                     <a:bodyPr/>
                     <a:lstStyle/>
                     <a:p>
-                      <a:pPr indent="0" marL="0">
+                      <a:pPr marL="0" indent="0">
                         <a:buNone/>
                       </a:pPr>
                       <a:r>
@@ -10786,7 +9483,7 @@
                       </a:endParaRPr>
                     </a:p>
                   </a:txBody>
-                  <a:tcPr marL="91440" marR="91440" marT="91440" marB="91440" anchor="ctr">
+                  <a:tcPr marT="91440" marB="91440" anchor="ctr">
                     <a:lnL w="12700" cap="flat" cmpd="sng" algn="ctr">
                       <a:solidFill>
                         <a:srgbClr val="DCE3F0"/>
@@ -10833,7 +9530,7 @@
                     <a:bodyPr/>
                     <a:lstStyle/>
                     <a:p>
-                      <a:pPr indent="0" marL="0">
+                      <a:pPr marL="0" indent="0">
                         <a:buNone/>
                       </a:pPr>
                       <a:r>
@@ -10854,7 +9551,7 @@
                       </a:endParaRPr>
                     </a:p>
                   </a:txBody>
-                  <a:tcPr marL="91440" marR="91440" marT="91440" marB="91440" anchor="ctr">
+                  <a:tcPr marT="91440" marB="91440" anchor="ctr">
                     <a:lnL w="12700" cap="flat" cmpd="sng" algn="ctr">
                       <a:solidFill>
                         <a:srgbClr val="DCE3F0"/>
@@ -10896,6 +9593,11 @@
                     </a:solidFill>
                   </a:tcPr>
                 </a:tc>
+                <a:extLst>
+                  <a:ext uri="{0D108BD9-81ED-4DB2-BD59-A6C34878D82A}">
+                    <a16:rowId xmlns:a16="http://schemas.microsoft.com/office/drawing/2014/main" val="10001"/>
+                  </a:ext>
+                </a:extLst>
               </a:tr>
               <a:tr h="548640">
                 <a:tc>
@@ -10903,7 +9605,7 @@
                     <a:bodyPr/>
                     <a:lstStyle/>
                     <a:p>
-                      <a:pPr indent="0" marL="0">
+                      <a:pPr marL="0" indent="0">
                         <a:buNone/>
                       </a:pPr>
                       <a:r>
@@ -10924,7 +9626,7 @@
                       </a:endParaRPr>
                     </a:p>
                   </a:txBody>
-                  <a:tcPr marL="91440" marR="91440" marT="91440" marB="91440" anchor="ctr">
+                  <a:tcPr marT="91440" marB="91440" anchor="ctr">
                     <a:lnL w="12700" cap="flat" cmpd="sng" algn="ctr">
                       <a:solidFill>
                         <a:srgbClr val="DCE3F0"/>
@@ -10971,7 +9673,7 @@
                     <a:bodyPr/>
                     <a:lstStyle/>
                     <a:p>
-                      <a:pPr indent="0" marL="0">
+                      <a:pPr marL="0" indent="0">
                         <a:buNone/>
                       </a:pPr>
                       <a:r>
@@ -10992,7 +9694,7 @@
                       </a:endParaRPr>
                     </a:p>
                   </a:txBody>
-                  <a:tcPr marL="91440" marR="91440" marT="91440" marB="91440" anchor="ctr">
+                  <a:tcPr marT="91440" marB="91440" anchor="ctr">
                     <a:lnL w="12700" cap="flat" cmpd="sng" algn="ctr">
                       <a:solidFill>
                         <a:srgbClr val="DCE3F0"/>
@@ -11039,7 +9741,7 @@
                     <a:bodyPr/>
                     <a:lstStyle/>
                     <a:p>
-                      <a:pPr indent="0" marL="0">
+                      <a:pPr marL="0" indent="0">
                         <a:buNone/>
                       </a:pPr>
                       <a:r>
@@ -11060,7 +9762,7 @@
                       </a:endParaRPr>
                     </a:p>
                   </a:txBody>
-                  <a:tcPr marL="91440" marR="91440" marT="91440" marB="91440" anchor="ctr">
+                  <a:tcPr marT="91440" marB="91440" anchor="ctr">
                     <a:lnL w="12700" cap="flat" cmpd="sng" algn="ctr">
                       <a:solidFill>
                         <a:srgbClr val="DCE3F0"/>
@@ -11107,7 +9809,7 @@
                     <a:bodyPr/>
                     <a:lstStyle/>
                     <a:p>
-                      <a:pPr indent="0" marL="0">
+                      <a:pPr marL="0" indent="0">
                         <a:buNone/>
                       </a:pPr>
                       <a:r>
@@ -11128,7 +9830,7 @@
                       </a:endParaRPr>
                     </a:p>
                   </a:txBody>
-                  <a:tcPr marL="91440" marR="91440" marT="91440" marB="91440" anchor="ctr">
+                  <a:tcPr marT="91440" marB="91440" anchor="ctr">
                     <a:lnL w="12700" cap="flat" cmpd="sng" algn="ctr">
                       <a:solidFill>
                         <a:srgbClr val="DCE3F0"/>
@@ -11170,6 +9872,11 @@
                     </a:solidFill>
                   </a:tcPr>
                 </a:tc>
+                <a:extLst>
+                  <a:ext uri="{0D108BD9-81ED-4DB2-BD59-A6C34878D82A}">
+                    <a16:rowId xmlns:a16="http://schemas.microsoft.com/office/drawing/2014/main" val="10002"/>
+                  </a:ext>
+                </a:extLst>
               </a:tr>
               <a:tr h="548640">
                 <a:tc>
@@ -11177,7 +9884,7 @@
                     <a:bodyPr/>
                     <a:lstStyle/>
                     <a:p>
-                      <a:pPr indent="0" marL="0">
+                      <a:pPr marL="0" indent="0">
                         <a:buNone/>
                       </a:pPr>
                       <a:r>
@@ -11198,7 +9905,7 @@
                       </a:endParaRPr>
                     </a:p>
                   </a:txBody>
-                  <a:tcPr marL="91440" marR="91440" marT="91440" marB="91440" anchor="ctr">
+                  <a:tcPr marT="91440" marB="91440" anchor="ctr">
                     <a:lnL w="12700" cap="flat" cmpd="sng" algn="ctr">
                       <a:solidFill>
                         <a:srgbClr val="DCE3F0"/>
@@ -11245,7 +9952,7 @@
                     <a:bodyPr/>
                     <a:lstStyle/>
                     <a:p>
-                      <a:pPr indent="0" marL="0">
+                      <a:pPr marL="0" indent="0">
                         <a:buNone/>
                       </a:pPr>
                       <a:r>
@@ -11266,7 +9973,7 @@
                       </a:endParaRPr>
                     </a:p>
                   </a:txBody>
-                  <a:tcPr marL="91440" marR="91440" marT="91440" marB="91440" anchor="ctr">
+                  <a:tcPr marT="91440" marB="91440" anchor="ctr">
                     <a:lnL w="12700" cap="flat" cmpd="sng" algn="ctr">
                       <a:solidFill>
                         <a:srgbClr val="DCE3F0"/>
@@ -11313,7 +10020,7 @@
                     <a:bodyPr/>
                     <a:lstStyle/>
                     <a:p>
-                      <a:pPr indent="0" marL="0">
+                      <a:pPr marL="0" indent="0">
                         <a:buNone/>
                       </a:pPr>
                       <a:r>
@@ -11334,7 +10041,7 @@
                       </a:endParaRPr>
                     </a:p>
                   </a:txBody>
-                  <a:tcPr marL="91440" marR="91440" marT="91440" marB="91440" anchor="ctr">
+                  <a:tcPr marT="91440" marB="91440" anchor="ctr">
                     <a:lnL w="12700" cap="flat" cmpd="sng" algn="ctr">
                       <a:solidFill>
                         <a:srgbClr val="DCE3F0"/>
@@ -11381,7 +10088,7 @@
                     <a:bodyPr/>
                     <a:lstStyle/>
                     <a:p>
-                      <a:pPr indent="0" marL="0">
+                      <a:pPr marL="0" indent="0">
                         <a:buNone/>
                       </a:pPr>
                       <a:r>
@@ -11402,7 +10109,7 @@
                       </a:endParaRPr>
                     </a:p>
                   </a:txBody>
-                  <a:tcPr marL="91440" marR="91440" marT="91440" marB="91440" anchor="ctr">
+                  <a:tcPr marT="91440" marB="91440" anchor="ctr">
                     <a:lnL w="12700" cap="flat" cmpd="sng" algn="ctr">
                       <a:solidFill>
                         <a:srgbClr val="DCE3F0"/>
@@ -11444,6 +10151,11 @@
                     </a:solidFill>
                   </a:tcPr>
                 </a:tc>
+                <a:extLst>
+                  <a:ext uri="{0D108BD9-81ED-4DB2-BD59-A6C34878D82A}">
+                    <a16:rowId xmlns:a16="http://schemas.microsoft.com/office/drawing/2014/main" val="10003"/>
+                  </a:ext>
+                </a:extLst>
               </a:tr>
               <a:tr h="548640">
                 <a:tc>
@@ -11451,7 +10163,7 @@
                     <a:bodyPr/>
                     <a:lstStyle/>
                     <a:p>
-                      <a:pPr indent="0" marL="0">
+                      <a:pPr marL="0" indent="0">
                         <a:buNone/>
                       </a:pPr>
                       <a:r>
@@ -11472,7 +10184,7 @@
                       </a:endParaRPr>
                     </a:p>
                   </a:txBody>
-                  <a:tcPr marL="91440" marR="91440" marT="91440" marB="91440" anchor="ctr">
+                  <a:tcPr marT="91440" marB="91440" anchor="ctr">
                     <a:lnL w="12700" cap="flat" cmpd="sng" algn="ctr">
                       <a:solidFill>
                         <a:srgbClr val="DCE3F0"/>
@@ -11519,7 +10231,7 @@
                     <a:bodyPr/>
                     <a:lstStyle/>
                     <a:p>
-                      <a:pPr indent="0" marL="0">
+                      <a:pPr marL="0" indent="0">
                         <a:buNone/>
                       </a:pPr>
                       <a:r>
@@ -11540,7 +10252,7 @@
                       </a:endParaRPr>
                     </a:p>
                   </a:txBody>
-                  <a:tcPr marL="91440" marR="91440" marT="91440" marB="91440" anchor="ctr">
+                  <a:tcPr marT="91440" marB="91440" anchor="ctr">
                     <a:lnL w="12700" cap="flat" cmpd="sng" algn="ctr">
                       <a:solidFill>
                         <a:srgbClr val="DCE3F0"/>
@@ -11587,7 +10299,7 @@
                     <a:bodyPr/>
                     <a:lstStyle/>
                     <a:p>
-                      <a:pPr indent="0" marL="0">
+                      <a:pPr marL="0" indent="0">
                         <a:buNone/>
                       </a:pPr>
                       <a:r>
@@ -11608,7 +10320,7 @@
                       </a:endParaRPr>
                     </a:p>
                   </a:txBody>
-                  <a:tcPr marL="91440" marR="91440" marT="91440" marB="91440" anchor="ctr">
+                  <a:tcPr marT="91440" marB="91440" anchor="ctr">
                     <a:lnL w="12700" cap="flat" cmpd="sng" algn="ctr">
                       <a:solidFill>
                         <a:srgbClr val="DCE3F0"/>
@@ -11655,7 +10367,7 @@
                     <a:bodyPr/>
                     <a:lstStyle/>
                     <a:p>
-                      <a:pPr indent="0" marL="0">
+                      <a:pPr marL="0" indent="0">
                         <a:buNone/>
                       </a:pPr>
                       <a:r>
@@ -11676,7 +10388,7 @@
                       </a:endParaRPr>
                     </a:p>
                   </a:txBody>
-                  <a:tcPr marL="91440" marR="91440" marT="91440" marB="91440" anchor="ctr">
+                  <a:tcPr marT="91440" marB="91440" anchor="ctr">
                     <a:lnL w="12700" cap="flat" cmpd="sng" algn="ctr">
                       <a:solidFill>
                         <a:srgbClr val="DCE3F0"/>
@@ -11718,6 +10430,11 @@
                     </a:solidFill>
                   </a:tcPr>
                 </a:tc>
+                <a:extLst>
+                  <a:ext uri="{0D108BD9-81ED-4DB2-BD59-A6C34878D82A}">
+                    <a16:rowId xmlns:a16="http://schemas.microsoft.com/office/drawing/2014/main" val="10004"/>
+                  </a:ext>
+                </a:extLst>
               </a:tr>
               <a:tr h="548640">
                 <a:tc>
@@ -11725,7 +10442,7 @@
                     <a:bodyPr/>
                     <a:lstStyle/>
                     <a:p>
-                      <a:pPr indent="0" marL="0">
+                      <a:pPr marL="0" indent="0">
                         <a:buNone/>
                       </a:pPr>
                       <a:r>
@@ -11746,7 +10463,7 @@
                       </a:endParaRPr>
                     </a:p>
                   </a:txBody>
-                  <a:tcPr marL="91440" marR="91440" marT="91440" marB="91440" anchor="ctr">
+                  <a:tcPr marT="91440" marB="91440" anchor="ctr">
                     <a:lnL w="12700" cap="flat" cmpd="sng" algn="ctr">
                       <a:solidFill>
                         <a:srgbClr val="DCE3F0"/>
@@ -11793,7 +10510,7 @@
                     <a:bodyPr/>
                     <a:lstStyle/>
                     <a:p>
-                      <a:pPr indent="0" marL="0">
+                      <a:pPr marL="0" indent="0">
                         <a:buNone/>
                       </a:pPr>
                       <a:r>
@@ -11814,7 +10531,7 @@
                       </a:endParaRPr>
                     </a:p>
                   </a:txBody>
-                  <a:tcPr marL="91440" marR="91440" marT="91440" marB="91440" anchor="ctr">
+                  <a:tcPr marT="91440" marB="91440" anchor="ctr">
                     <a:lnL w="12700" cap="flat" cmpd="sng" algn="ctr">
                       <a:solidFill>
                         <a:srgbClr val="DCE3F0"/>
@@ -11861,7 +10578,7 @@
                     <a:bodyPr/>
                     <a:lstStyle/>
                     <a:p>
-                      <a:pPr indent="0" marL="0">
+                      <a:pPr marL="0" indent="0">
                         <a:buNone/>
                       </a:pPr>
                       <a:r>
@@ -11882,7 +10599,7 @@
                       </a:endParaRPr>
                     </a:p>
                   </a:txBody>
-                  <a:tcPr marL="91440" marR="91440" marT="91440" marB="91440" anchor="ctr">
+                  <a:tcPr marT="91440" marB="91440" anchor="ctr">
                     <a:lnL w="12700" cap="flat" cmpd="sng" algn="ctr">
                       <a:solidFill>
                         <a:srgbClr val="DCE3F0"/>
@@ -11929,7 +10646,7 @@
                     <a:bodyPr/>
                     <a:lstStyle/>
                     <a:p>
-                      <a:pPr indent="0" marL="0">
+                      <a:pPr marL="0" indent="0">
                         <a:buNone/>
                       </a:pPr>
                       <a:r>
@@ -11950,7 +10667,7 @@
                       </a:endParaRPr>
                     </a:p>
                   </a:txBody>
-                  <a:tcPr marL="91440" marR="91440" marT="91440" marB="91440" anchor="ctr">
+                  <a:tcPr marT="91440" marB="91440" anchor="ctr">
                     <a:lnL w="12700" cap="flat" cmpd="sng" algn="ctr">
                       <a:solidFill>
                         <a:srgbClr val="DCE3F0"/>
@@ -11992,6 +10709,11 @@
                     </a:solidFill>
                   </a:tcPr>
                 </a:tc>
+                <a:extLst>
+                  <a:ext uri="{0D108BD9-81ED-4DB2-BD59-A6C34878D82A}">
+                    <a16:rowId xmlns:a16="http://schemas.microsoft.com/office/drawing/2014/main" val="10005"/>
+                  </a:ext>
+                </a:extLst>
               </a:tr>
             </a:tbl>
           </a:graphicData>
@@ -12045,7 +10767,7 @@
           <a:bodyPr wrap="square" lIns="0" tIns="0" rIns="0" bIns="0" rtlCol="0" anchor="ctr"/>
           <a:lstStyle/>
           <a:p>
-            <a:pPr indent="0" marL="0">
+            <a:pPr marL="0" indent="0">
               <a:lnSpc>
                 <a:spcPts val="1700"/>
               </a:lnSpc>
@@ -12087,7 +10809,7 @@
           <a:bodyPr wrap="square" lIns="0" tIns="0" rIns="0" bIns="0" rtlCol="0" anchor="ctr"/>
           <a:lstStyle/>
           <a:p>
-            <a:pPr indent="0" marL="0">
+            <a:pPr marL="0" indent="0">
               <a:buNone/>
             </a:pPr>
             <a:r>
@@ -12126,7 +10848,7 @@
           <a:bodyPr wrap="square" lIns="0" tIns="0" rIns="0" bIns="0" rtlCol="0" anchor="ctr"/>
           <a:lstStyle/>
           <a:p>
-            <a:pPr algn="r" indent="0" marL="0">
+            <a:pPr marL="0" indent="0" algn="r">
               <a:buNone/>
             </a:pPr>
             <a:r>
@@ -12160,6 +10882,7 @@
         <a:solidFill>
           <a:srgbClr val="F4F7FC"/>
         </a:solidFill>
+        <a:effectLst/>
       </p:bgPr>
     </p:bg>
     <p:spTree>
@@ -12197,7 +10920,7 @@
           <a:bodyPr wrap="square" lIns="0" tIns="0" rIns="0" bIns="0" rtlCol="0" anchor="ctr"/>
           <a:lstStyle/>
           <a:p>
-            <a:pPr indent="0" marL="0">
+            <a:pPr marL="0" indent="0">
               <a:buNone/>
             </a:pPr>
             <a:r>
@@ -12236,7 +10959,7 @@
           <a:bodyPr wrap="square" lIns="0" tIns="0" rIns="0" bIns="0" rtlCol="0" anchor="t"/>
           <a:lstStyle/>
           <a:p>
-            <a:pPr indent="0" marL="0">
+            <a:pPr marL="0" indent="0">
               <a:buNone/>
             </a:pPr>
             <a:r>
@@ -12280,7 +11003,7 @@
             <a:prstDash val="solid"/>
           </a:ln>
           <a:effectLst>
-            <a:outerShdw sx="100000" sy="100000" kx="0" ky="0" algn="bl" rotWithShape="0" blurRad="101600" dist="12700" dir="5400000">
+            <a:outerShdw blurRad="101600" dist="12700" dir="5400000" algn="bl" rotWithShape="0">
               <a:srgbClr val="9FB0C9">
                 <a:alpha val="18000"/>
               </a:srgbClr>
@@ -12336,7 +11059,7 @@
           <a:bodyPr wrap="square" lIns="0" tIns="0" rIns="0" bIns="0" rtlCol="0" anchor="ctr"/>
           <a:lstStyle/>
           <a:p>
-            <a:pPr algn="ctr" indent="0" marL="0">
+            <a:pPr marL="0" indent="0" algn="ctr">
               <a:buNone/>
             </a:pPr>
             <a:r>
@@ -12375,7 +11098,7 @@
           <a:bodyPr wrap="square" lIns="0" tIns="0" rIns="0" bIns="0" rtlCol="0" anchor="ctr"/>
           <a:lstStyle/>
           <a:p>
-            <a:pPr indent="0" marL="0">
+            <a:pPr marL="0" indent="0">
               <a:buNone/>
             </a:pPr>
             <a:r>
@@ -12414,7 +11137,7 @@
           <a:bodyPr wrap="square" lIns="0" tIns="0" rIns="0" bIns="0" rtlCol="0" anchor="t"/>
           <a:lstStyle/>
           <a:p>
-            <a:pPr algn="l" indent="0" marL="0">
+            <a:pPr marL="0" indent="0" algn="l">
               <a:lnSpc>
                 <a:spcPts val="1600"/>
               </a:lnSpc>
@@ -12461,7 +11184,7 @@
             <a:prstDash val="solid"/>
           </a:ln>
           <a:effectLst>
-            <a:outerShdw sx="100000" sy="100000" kx="0" ky="0" algn="bl" rotWithShape="0" blurRad="101600" dist="12700" dir="5400000">
+            <a:outerShdw blurRad="101600" dist="12700" dir="5400000" algn="bl" rotWithShape="0">
               <a:srgbClr val="9FB0C9">
                 <a:alpha val="18000"/>
               </a:srgbClr>
@@ -12517,7 +11240,7 @@
           <a:bodyPr wrap="square" lIns="0" tIns="0" rIns="0" bIns="0" rtlCol="0" anchor="ctr"/>
           <a:lstStyle/>
           <a:p>
-            <a:pPr algn="ctr" indent="0" marL="0">
+            <a:pPr marL="0" indent="0" algn="ctr">
               <a:buNone/>
             </a:pPr>
             <a:r>
@@ -12556,7 +11279,7 @@
           <a:bodyPr wrap="square" lIns="0" tIns="0" rIns="0" bIns="0" rtlCol="0" anchor="ctr"/>
           <a:lstStyle/>
           <a:p>
-            <a:pPr indent="0" marL="0">
+            <a:pPr marL="0" indent="0">
               <a:buNone/>
             </a:pPr>
             <a:r>
@@ -12595,7 +11318,7 @@
           <a:bodyPr wrap="square" lIns="0" tIns="0" rIns="0" bIns="0" rtlCol="0" anchor="t"/>
           <a:lstStyle/>
           <a:p>
-            <a:pPr algn="l" indent="0" marL="0">
+            <a:pPr marL="0" indent="0" algn="l">
               <a:lnSpc>
                 <a:spcPts val="1600"/>
               </a:lnSpc>
@@ -12642,7 +11365,7 @@
             <a:prstDash val="solid"/>
           </a:ln>
           <a:effectLst>
-            <a:outerShdw sx="100000" sy="100000" kx="0" ky="0" algn="bl" rotWithShape="0" blurRad="101600" dist="12700" dir="5400000">
+            <a:outerShdw blurRad="101600" dist="12700" dir="5400000" algn="bl" rotWithShape="0">
               <a:srgbClr val="9FB0C9">
                 <a:alpha val="18000"/>
               </a:srgbClr>
@@ -12698,7 +11421,7 @@
           <a:bodyPr wrap="square" lIns="0" tIns="0" rIns="0" bIns="0" rtlCol="0" anchor="ctr"/>
           <a:lstStyle/>
           <a:p>
-            <a:pPr algn="ctr" indent="0" marL="0">
+            <a:pPr marL="0" indent="0" algn="ctr">
               <a:buNone/>
             </a:pPr>
             <a:r>
@@ -12737,7 +11460,7 @@
           <a:bodyPr wrap="square" lIns="0" tIns="0" rIns="0" bIns="0" rtlCol="0" anchor="ctr"/>
           <a:lstStyle/>
           <a:p>
-            <a:pPr indent="0" marL="0">
+            <a:pPr marL="0" indent="0">
               <a:buNone/>
             </a:pPr>
             <a:r>
@@ -12776,7 +11499,7 @@
           <a:bodyPr wrap="square" lIns="0" tIns="0" rIns="0" bIns="0" rtlCol="0" anchor="t"/>
           <a:lstStyle/>
           <a:p>
-            <a:pPr algn="l" indent="0" marL="0">
+            <a:pPr marL="0" indent="0" algn="l">
               <a:lnSpc>
                 <a:spcPts val="1600"/>
               </a:lnSpc>
@@ -12823,7 +11546,7 @@
             <a:prstDash val="solid"/>
           </a:ln>
           <a:effectLst>
-            <a:outerShdw sx="100000" sy="100000" kx="0" ky="0" algn="bl" rotWithShape="0" blurRad="101600" dist="12700" dir="5400000">
+            <a:outerShdw blurRad="101600" dist="12700" dir="5400000" algn="bl" rotWithShape="0">
               <a:srgbClr val="9FB0C9">
                 <a:alpha val="18000"/>
               </a:srgbClr>
@@ -12879,7 +11602,7 @@
           <a:bodyPr wrap="square" lIns="0" tIns="0" rIns="0" bIns="0" rtlCol="0" anchor="ctr"/>
           <a:lstStyle/>
           <a:p>
-            <a:pPr algn="ctr" indent="0" marL="0">
+            <a:pPr marL="0" indent="0" algn="ctr">
               <a:buNone/>
             </a:pPr>
             <a:r>
@@ -12918,7 +11641,7 @@
           <a:bodyPr wrap="square" lIns="0" tIns="0" rIns="0" bIns="0" rtlCol="0" anchor="ctr"/>
           <a:lstStyle/>
           <a:p>
-            <a:pPr indent="0" marL="0">
+            <a:pPr marL="0" indent="0">
               <a:buNone/>
             </a:pPr>
             <a:r>
@@ -12957,7 +11680,7 @@
           <a:bodyPr wrap="square" lIns="0" tIns="0" rIns="0" bIns="0" rtlCol="0" anchor="t"/>
           <a:lstStyle/>
           <a:p>
-            <a:pPr algn="l" indent="0" marL="0">
+            <a:pPr marL="0" indent="0" algn="l">
               <a:lnSpc>
                 <a:spcPts val="1600"/>
               </a:lnSpc>
@@ -12999,7 +11722,7 @@
           <a:bodyPr wrap="square" lIns="0" tIns="0" rIns="0" bIns="0" rtlCol="0" anchor="t"/>
           <a:lstStyle/>
           <a:p>
-            <a:pPr algn="l" indent="0" marL="0">
+            <a:pPr marL="0" indent="0" algn="l">
               <a:lnSpc>
                 <a:spcPts val="1700"/>
               </a:lnSpc>
@@ -13041,7 +11764,7 @@
           <a:bodyPr wrap="square" lIns="0" tIns="0" rIns="0" bIns="0" rtlCol="0" anchor="ctr"/>
           <a:lstStyle/>
           <a:p>
-            <a:pPr indent="0" marL="0">
+            <a:pPr marL="0" indent="0">
               <a:buNone/>
             </a:pPr>
             <a:r>
@@ -13080,7 +11803,7 @@
           <a:bodyPr wrap="square" lIns="0" tIns="0" rIns="0" bIns="0" rtlCol="0" anchor="ctr"/>
           <a:lstStyle/>
           <a:p>
-            <a:pPr algn="r" indent="0" marL="0">
+            <a:pPr marL="0" indent="0" algn="r">
               <a:buNone/>
             </a:pPr>
             <a:r>
@@ -13114,6 +11837,7 @@
         <a:solidFill>
           <a:srgbClr val="F4F7FC"/>
         </a:solidFill>
+        <a:effectLst/>
       </p:bgPr>
     </p:bg>
     <p:spTree>
@@ -13151,7 +11875,7 @@
           <a:bodyPr wrap="square" lIns="0" tIns="0" rIns="0" bIns="0" rtlCol="0" anchor="ctr"/>
           <a:lstStyle/>
           <a:p>
-            <a:pPr indent="0" marL="0">
+            <a:pPr marL="0" indent="0">
               <a:buNone/>
             </a:pPr>
             <a:r>
@@ -13190,7 +11914,7 @@
           <a:bodyPr wrap="square" lIns="0" tIns="0" rIns="0" bIns="0" rtlCol="0" anchor="t"/>
           <a:lstStyle/>
           <a:p>
-            <a:pPr indent="0" marL="0">
+            <a:pPr marL="0" indent="0">
               <a:buNone/>
             </a:pPr>
             <a:r>
@@ -13234,7 +11958,7 @@
             <a:prstDash val="solid"/>
           </a:ln>
           <a:effectLst>
-            <a:outerShdw sx="100000" sy="100000" kx="0" ky="0" algn="bl" rotWithShape="0" blurRad="101600" dist="12700" dir="5400000">
+            <a:outerShdw blurRad="101600" dist="12700" dir="5400000" algn="bl" rotWithShape="0">
               <a:srgbClr val="9FB0C9">
                 <a:alpha val="18000"/>
               </a:srgbClr>
@@ -13263,7 +11987,7 @@
           <a:bodyPr wrap="square" lIns="0" tIns="0" rIns="0" bIns="0" rtlCol="0" anchor="ctr"/>
           <a:lstStyle/>
           <a:p>
-            <a:pPr indent="0" marL="0">
+            <a:pPr marL="0" indent="0">
               <a:buNone/>
             </a:pPr>
             <a:r>
@@ -13302,7 +12026,7 @@
           <a:bodyPr wrap="square" lIns="0" tIns="0" rIns="0" bIns="0" rtlCol="0" anchor="ctr"/>
           <a:lstStyle/>
           <a:p>
-            <a:pPr indent="0" marL="0">
+            <a:pPr marL="0" indent="0">
               <a:buNone/>
             </a:pPr>
             <a:r>
@@ -13341,7 +12065,7 @@
           <a:bodyPr wrap="square" lIns="0" tIns="0" rIns="0" bIns="0" rtlCol="0" anchor="t"/>
           <a:lstStyle/>
           <a:p>
-            <a:pPr algn="l" indent="0" marL="0">
+            <a:pPr marL="0" indent="0" algn="l">
               <a:lnSpc>
                 <a:spcPts val="1400"/>
               </a:lnSpc>
@@ -13383,7 +12107,7 @@
           <a:bodyPr wrap="square" lIns="0" tIns="0" rIns="0" bIns="0" rtlCol="0" anchor="ctr"/>
           <a:lstStyle/>
           <a:p>
-            <a:pPr algn="r" indent="0" marL="0">
+            <a:pPr marL="0" indent="0" algn="r">
               <a:buNone/>
             </a:pPr>
             <a:r>
@@ -13427,7 +12151,7 @@
             <a:prstDash val="solid"/>
           </a:ln>
           <a:effectLst>
-            <a:outerShdw sx="100000" sy="100000" kx="0" ky="0" algn="bl" rotWithShape="0" blurRad="101600" dist="12700" dir="5400000">
+            <a:outerShdw blurRad="101600" dist="12700" dir="5400000" algn="bl" rotWithShape="0">
               <a:srgbClr val="9FB0C9">
                 <a:alpha val="18000"/>
               </a:srgbClr>
@@ -13456,7 +12180,7 @@
           <a:bodyPr wrap="square" lIns="0" tIns="0" rIns="0" bIns="0" rtlCol="0" anchor="ctr"/>
           <a:lstStyle/>
           <a:p>
-            <a:pPr indent="0" marL="0">
+            <a:pPr marL="0" indent="0">
               <a:buNone/>
             </a:pPr>
             <a:r>
@@ -13495,7 +12219,7 @@
           <a:bodyPr wrap="square" lIns="0" tIns="0" rIns="0" bIns="0" rtlCol="0" anchor="ctr"/>
           <a:lstStyle/>
           <a:p>
-            <a:pPr indent="0" marL="0">
+            <a:pPr marL="0" indent="0">
               <a:buNone/>
             </a:pPr>
             <a:r>
@@ -13534,7 +12258,7 @@
           <a:bodyPr wrap="square" lIns="0" tIns="0" rIns="0" bIns="0" rtlCol="0" anchor="t"/>
           <a:lstStyle/>
           <a:p>
-            <a:pPr algn="l" indent="0" marL="0">
+            <a:pPr marL="0" indent="0" algn="l">
               <a:lnSpc>
                 <a:spcPts val="1400"/>
               </a:lnSpc>
@@ -13576,7 +12300,7 @@
           <a:bodyPr wrap="square" lIns="0" tIns="0" rIns="0" bIns="0" rtlCol="0" anchor="ctr"/>
           <a:lstStyle/>
           <a:p>
-            <a:pPr algn="r" indent="0" marL="0">
+            <a:pPr marL="0" indent="0" algn="r">
               <a:buNone/>
             </a:pPr>
             <a:r>
@@ -13620,7 +12344,7 @@
             <a:prstDash val="solid"/>
           </a:ln>
           <a:effectLst>
-            <a:outerShdw sx="100000" sy="100000" kx="0" ky="0" algn="bl" rotWithShape="0" blurRad="101600" dist="12700" dir="5400000">
+            <a:outerShdw blurRad="101600" dist="12700" dir="5400000" algn="bl" rotWithShape="0">
               <a:srgbClr val="9FB0C9">
                 <a:alpha val="18000"/>
               </a:srgbClr>
@@ -13649,7 +12373,7 @@
           <a:bodyPr wrap="square" lIns="0" tIns="0" rIns="0" bIns="0" rtlCol="0" anchor="ctr"/>
           <a:lstStyle/>
           <a:p>
-            <a:pPr indent="0" marL="0">
+            <a:pPr marL="0" indent="0">
               <a:buNone/>
             </a:pPr>
             <a:r>
@@ -13688,7 +12412,7 @@
           <a:bodyPr wrap="square" lIns="0" tIns="0" rIns="0" bIns="0" rtlCol="0" anchor="ctr"/>
           <a:lstStyle/>
           <a:p>
-            <a:pPr indent="0" marL="0">
+            <a:pPr marL="0" indent="0">
               <a:buNone/>
             </a:pPr>
             <a:r>
@@ -13727,7 +12451,7 @@
           <a:bodyPr wrap="square" lIns="0" tIns="0" rIns="0" bIns="0" rtlCol="0" anchor="t"/>
           <a:lstStyle/>
           <a:p>
-            <a:pPr algn="l" indent="0" marL="0">
+            <a:pPr marL="0" indent="0" algn="l">
               <a:lnSpc>
                 <a:spcPts val="1400"/>
               </a:lnSpc>
@@ -13769,7 +12493,7 @@
           <a:bodyPr wrap="square" lIns="0" tIns="0" rIns="0" bIns="0" rtlCol="0" anchor="ctr"/>
           <a:lstStyle/>
           <a:p>
-            <a:pPr algn="r" indent="0" marL="0">
+            <a:pPr marL="0" indent="0" algn="r">
               <a:buNone/>
             </a:pPr>
             <a:r>
@@ -13813,7 +12537,7 @@
             <a:prstDash val="solid"/>
           </a:ln>
           <a:effectLst>
-            <a:outerShdw sx="100000" sy="100000" kx="0" ky="0" algn="bl" rotWithShape="0" blurRad="101600" dist="12700" dir="5400000">
+            <a:outerShdw blurRad="101600" dist="12700" dir="5400000" algn="bl" rotWithShape="0">
               <a:srgbClr val="9FB0C9">
                 <a:alpha val="18000"/>
               </a:srgbClr>
@@ -13842,7 +12566,7 @@
           <a:bodyPr wrap="square" lIns="0" tIns="0" rIns="0" bIns="0" rtlCol="0" anchor="ctr"/>
           <a:lstStyle/>
           <a:p>
-            <a:pPr indent="0" marL="0">
+            <a:pPr marL="0" indent="0">
               <a:buNone/>
             </a:pPr>
             <a:r>
@@ -13881,7 +12605,7 @@
           <a:bodyPr wrap="square" lIns="0" tIns="0" rIns="0" bIns="0" rtlCol="0" anchor="ctr"/>
           <a:lstStyle/>
           <a:p>
-            <a:pPr indent="0" marL="0">
+            <a:pPr marL="0" indent="0">
               <a:buNone/>
             </a:pPr>
             <a:r>
@@ -13920,7 +12644,7 @@
           <a:bodyPr wrap="square" lIns="0" tIns="0" rIns="0" bIns="0" rtlCol="0" anchor="t"/>
           <a:lstStyle/>
           <a:p>
-            <a:pPr algn="l" indent="0" marL="0">
+            <a:pPr marL="0" indent="0" algn="l">
               <a:lnSpc>
                 <a:spcPts val="1400"/>
               </a:lnSpc>
@@ -13962,7 +12686,7 @@
           <a:bodyPr wrap="square" lIns="0" tIns="0" rIns="0" bIns="0" rtlCol="0" anchor="ctr"/>
           <a:lstStyle/>
           <a:p>
-            <a:pPr algn="r" indent="0" marL="0">
+            <a:pPr marL="0" indent="0" algn="r">
               <a:buNone/>
             </a:pPr>
             <a:r>
@@ -14006,7 +12730,7 @@
             <a:prstDash val="solid"/>
           </a:ln>
           <a:effectLst>
-            <a:outerShdw sx="100000" sy="100000" kx="0" ky="0" algn="bl" rotWithShape="0" blurRad="101600" dist="12700" dir="5400000">
+            <a:outerShdw blurRad="101600" dist="12700" dir="5400000" algn="bl" rotWithShape="0">
               <a:srgbClr val="9FB0C9">
                 <a:alpha val="18000"/>
               </a:srgbClr>
@@ -14035,7 +12759,7 @@
           <a:bodyPr wrap="square" lIns="0" tIns="0" rIns="0" bIns="0" rtlCol="0" anchor="ctr"/>
           <a:lstStyle/>
           <a:p>
-            <a:pPr indent="0" marL="0">
+            <a:pPr marL="0" indent="0">
               <a:buNone/>
             </a:pPr>
             <a:r>
@@ -14168,7 +12892,7 @@
           <a:bodyPr wrap="square" lIns="0" tIns="0" rIns="0" bIns="0" rtlCol="0" anchor="ctr"/>
           <a:lstStyle/>
           <a:p>
-            <a:pPr indent="0" marL="0">
+            <a:pPr marL="0" indent="0">
               <a:buNone/>
             </a:pPr>
             <a:r>
@@ -14207,7 +12931,7 @@
           <a:bodyPr wrap="square" lIns="0" tIns="0" rIns="0" bIns="0" rtlCol="0" anchor="ctr"/>
           <a:lstStyle/>
           <a:p>
-            <a:pPr indent="0" marL="0">
+            <a:pPr marL="0" indent="0">
               <a:buNone/>
             </a:pPr>
             <a:r>
@@ -14246,7 +12970,7 @@
           <a:bodyPr wrap="square" lIns="0" tIns="0" rIns="0" bIns="0" rtlCol="0" anchor="ctr"/>
           <a:lstStyle/>
           <a:p>
-            <a:pPr algn="r" indent="0" marL="0">
+            <a:pPr marL="0" indent="0" algn="r">
               <a:buNone/>
             </a:pPr>
             <a:r>
@@ -14280,6 +13004,7 @@
         <a:solidFill>
           <a:srgbClr val="0E2148"/>
         </a:solidFill>
+        <a:effectLst/>
       </p:bgPr>
     </p:bg>
     <p:spTree>
@@ -14402,7 +13127,7 @@
           <a:bodyPr wrap="square" lIns="0" tIns="0" rIns="0" bIns="0" rtlCol="0" anchor="ctr"/>
           <a:lstStyle/>
           <a:p>
-            <a:pPr algn="ctr" indent="0" marL="0">
+            <a:pPr marL="0" indent="0" algn="ctr">
               <a:buNone/>
             </a:pPr>
             <a:r>
@@ -14441,7 +13166,7 @@
           <a:bodyPr wrap="square" lIns="0" tIns="0" rIns="0" bIns="0" rtlCol="0" anchor="ctr"/>
           <a:lstStyle/>
           <a:p>
-            <a:pPr indent="0" marL="0">
+            <a:pPr marL="0" indent="0">
               <a:buNone/>
             </a:pPr>
             <a:r>
@@ -14480,7 +13205,7 @@
           <a:bodyPr wrap="square" lIns="0" tIns="0" rIns="0" bIns="0" rtlCol="0" anchor="ctr"/>
           <a:lstStyle/>
           <a:p>
-            <a:pPr indent="0" marL="0">
+            <a:pPr marL="0" indent="0">
               <a:buNone/>
             </a:pPr>
             <a:r>
@@ -14519,7 +13244,7 @@
           <a:bodyPr wrap="square" lIns="0" tIns="0" rIns="0" bIns="0" rtlCol="0" anchor="ctr"/>
           <a:lstStyle/>
           <a:p>
-            <a:pPr indent="0" marL="0">
+            <a:pPr marL="0" indent="0">
               <a:buNone/>
             </a:pPr>
             <a:r>
@@ -14558,7 +13283,7 @@
           <a:bodyPr wrap="square" lIns="0" tIns="0" rIns="0" bIns="0" rtlCol="0" anchor="ctr"/>
           <a:lstStyle/>
           <a:p>
-            <a:pPr indent="0" marL="0">
+            <a:pPr marL="0" indent="0">
               <a:lnSpc>
                 <a:spcPts val="1600"/>
               </a:lnSpc>
@@ -14600,7 +13325,7 @@
           <a:bodyPr wrap="square" lIns="0" tIns="0" rIns="0" bIns="0" rtlCol="0" anchor="ctr"/>
           <a:lstStyle/>
           <a:p>
-            <a:pPr indent="0" marL="0">
+            <a:pPr marL="0" indent="0">
               <a:buNone/>
             </a:pPr>
             <a:r>
@@ -14639,7 +13364,7 @@
           <a:bodyPr wrap="square" lIns="0" tIns="0" rIns="0" bIns="0" rtlCol="0" anchor="ctr"/>
           <a:lstStyle/>
           <a:p>
-            <a:pPr indent="0" marL="0">
+            <a:pPr marL="0" indent="0">
               <a:buNone/>
             </a:pPr>
             <a:r>
@@ -14678,7 +13403,7 @@
           <a:bodyPr wrap="square" lIns="0" tIns="0" rIns="0" bIns="0" rtlCol="0" anchor="ctr"/>
           <a:lstStyle/>
           <a:p>
-            <a:pPr indent="0" marL="0">
+            <a:pPr marL="0" indent="0">
               <a:lnSpc>
                 <a:spcPts val="1600"/>
               </a:lnSpc>
@@ -14720,7 +13445,7 @@
           <a:bodyPr wrap="square" lIns="0" tIns="0" rIns="0" bIns="0" rtlCol="0" anchor="ctr"/>
           <a:lstStyle/>
           <a:p>
-            <a:pPr indent="0" marL="0">
+            <a:pPr marL="0" indent="0">
               <a:buNone/>
             </a:pPr>
             <a:r>
@@ -14759,7 +13484,7 @@
           <a:bodyPr wrap="square" lIns="0" tIns="0" rIns="0" bIns="0" rtlCol="0" anchor="ctr"/>
           <a:lstStyle/>
           <a:p>
-            <a:pPr indent="0" marL="0">
+            <a:pPr marL="0" indent="0">
               <a:buNone/>
             </a:pPr>
             <a:r>
@@ -14798,7 +13523,7 @@
           <a:bodyPr wrap="square" lIns="0" tIns="0" rIns="0" bIns="0" rtlCol="0" anchor="ctr"/>
           <a:lstStyle/>
           <a:p>
-            <a:pPr indent="0" marL="0">
+            <a:pPr marL="0" indent="0">
               <a:lnSpc>
                 <a:spcPts val="1600"/>
               </a:lnSpc>
@@ -14867,7 +13592,7 @@
           <a:bodyPr wrap="square" lIns="0" tIns="0" rIns="0" bIns="0" rtlCol="0" anchor="ctr"/>
           <a:lstStyle/>
           <a:p>
-            <a:pPr indent="0" marL="0">
+            <a:pPr marL="0" indent="0">
               <a:buNone/>
             </a:pPr>
             <a:r>
@@ -14906,7 +13631,7 @@
           <a:bodyPr wrap="square" lIns="0" tIns="0" rIns="0" bIns="0" rtlCol="0" anchor="ctr"/>
           <a:lstStyle/>
           <a:p>
-            <a:pPr indent="0" marL="0">
+            <a:pPr marL="0" indent="0">
               <a:lnSpc>
                 <a:spcPts val="1500"/>
               </a:lnSpc>
@@ -14975,7 +13700,7 @@
           <a:bodyPr wrap="square" lIns="0" tIns="0" rIns="0" bIns="0" rtlCol="0" anchor="ctr"/>
           <a:lstStyle/>
           <a:p>
-            <a:pPr indent="0" marL="0">
+            <a:pPr marL="0" indent="0">
               <a:buNone/>
             </a:pPr>
             <a:r>
@@ -15014,7 +13739,7 @@
           <a:bodyPr wrap="square" lIns="0" tIns="0" rIns="0" bIns="0" rtlCol="0" anchor="ctr"/>
           <a:lstStyle/>
           <a:p>
-            <a:pPr indent="0" marL="0">
+            <a:pPr marL="0" indent="0">
               <a:lnSpc>
                 <a:spcPts val="1500"/>
               </a:lnSpc>
@@ -15056,7 +13781,7 @@
           <a:bodyPr wrap="square" lIns="0" tIns="0" rIns="0" bIns="0" rtlCol="0" anchor="ctr"/>
           <a:lstStyle/>
           <a:p>
-            <a:pPr indent="0" marL="0">
+            <a:pPr marL="0" indent="0">
               <a:buNone/>
             </a:pPr>
             <a:r>
@@ -15090,6 +13815,7 @@
         <a:solidFill>
           <a:srgbClr val="F4F7FC"/>
         </a:solidFill>
+        <a:effectLst/>
       </p:bgPr>
     </p:bg>
     <p:spTree>
@@ -15127,7 +13853,7 @@
           <a:bodyPr wrap="square" lIns="0" tIns="0" rIns="0" bIns="0" rtlCol="0" anchor="ctr"/>
           <a:lstStyle/>
           <a:p>
-            <a:pPr indent="0" marL="0">
+            <a:pPr marL="0" indent="0">
               <a:buNone/>
             </a:pPr>
             <a:r>
@@ -15166,7 +13892,7 @@
           <a:bodyPr wrap="square" lIns="0" tIns="0" rIns="0" bIns="0" rtlCol="0" anchor="t"/>
           <a:lstStyle/>
           <a:p>
-            <a:pPr indent="0" marL="0">
+            <a:pPr marL="0" indent="0">
               <a:buNone/>
             </a:pPr>
             <a:r>
@@ -15210,7 +13936,7 @@
             <a:prstDash val="solid"/>
           </a:ln>
           <a:effectLst>
-            <a:outerShdw sx="100000" sy="100000" kx="0" ky="0" algn="bl" rotWithShape="0" blurRad="101600" dist="12700" dir="5400000">
+            <a:outerShdw blurRad="101600" dist="12700" dir="5400000" algn="bl" rotWithShape="0">
               <a:srgbClr val="9FB0C9">
                 <a:alpha val="18000"/>
               </a:srgbClr>
@@ -15266,7 +13992,7 @@
           <a:bodyPr wrap="square" lIns="0" tIns="0" rIns="0" bIns="0" rtlCol="0" anchor="ctr"/>
           <a:lstStyle/>
           <a:p>
-            <a:pPr algn="ctr" indent="0" marL="0">
+            <a:pPr marL="0" indent="0" algn="ctr">
               <a:buNone/>
             </a:pPr>
             <a:r>
@@ -15305,7 +14031,7 @@
           <a:bodyPr wrap="square" lIns="0" tIns="0" rIns="0" bIns="0" rtlCol="0" anchor="ctr"/>
           <a:lstStyle/>
           <a:p>
-            <a:pPr indent="0" marL="0">
+            <a:pPr marL="0" indent="0">
               <a:buNone/>
             </a:pPr>
             <a:r>
@@ -15419,7 +14145,7 @@
             <a:prstDash val="solid"/>
           </a:ln>
           <a:effectLst>
-            <a:outerShdw sx="100000" sy="100000" kx="0" ky="0" algn="bl" rotWithShape="0" blurRad="101600" dist="12700" dir="5400000">
+            <a:outerShdw blurRad="101600" dist="12700" dir="5400000" algn="bl" rotWithShape="0">
               <a:srgbClr val="9FB0C9">
                 <a:alpha val="18000"/>
               </a:srgbClr>
@@ -15475,7 +14201,7 @@
           <a:bodyPr wrap="square" lIns="0" tIns="0" rIns="0" bIns="0" rtlCol="0" anchor="ctr"/>
           <a:lstStyle/>
           <a:p>
-            <a:pPr algn="ctr" indent="0" marL="0">
+            <a:pPr marL="0" indent="0" algn="ctr">
               <a:buNone/>
             </a:pPr>
             <a:r>
@@ -15514,7 +14240,7 @@
           <a:bodyPr wrap="square" lIns="0" tIns="0" rIns="0" bIns="0" rtlCol="0" anchor="ctr"/>
           <a:lstStyle/>
           <a:p>
-            <a:pPr indent="0" marL="0">
+            <a:pPr marL="0" indent="0">
               <a:buNone/>
             </a:pPr>
             <a:r>
@@ -15628,7 +14354,7 @@
             <a:prstDash val="solid"/>
           </a:ln>
           <a:effectLst>
-            <a:outerShdw sx="100000" sy="100000" kx="0" ky="0" algn="bl" rotWithShape="0" blurRad="101600" dist="12700" dir="5400000">
+            <a:outerShdw blurRad="101600" dist="12700" dir="5400000" algn="bl" rotWithShape="0">
               <a:srgbClr val="9FB0C9">
                 <a:alpha val="18000"/>
               </a:srgbClr>
@@ -15684,7 +14410,7 @@
           <a:bodyPr wrap="square" lIns="0" tIns="0" rIns="0" bIns="0" rtlCol="0" anchor="ctr"/>
           <a:lstStyle/>
           <a:p>
-            <a:pPr algn="ctr" indent="0" marL="0">
+            <a:pPr marL="0" indent="0" algn="ctr">
               <a:buNone/>
             </a:pPr>
             <a:r>
@@ -15723,7 +14449,7 @@
           <a:bodyPr wrap="square" lIns="0" tIns="0" rIns="0" bIns="0" rtlCol="0" anchor="ctr"/>
           <a:lstStyle/>
           <a:p>
-            <a:pPr indent="0" marL="0">
+            <a:pPr marL="0" indent="0">
               <a:buNone/>
             </a:pPr>
             <a:r>
@@ -15883,7 +14609,7 @@
           <a:bodyPr wrap="square" lIns="0" tIns="0" rIns="0" bIns="0" rtlCol="0" anchor="ctr"/>
           <a:lstStyle/>
           <a:p>
-            <a:pPr indent="0" marL="0">
+            <a:pPr marL="0" indent="0">
               <a:lnSpc>
                 <a:spcPts val="1700"/>
               </a:lnSpc>
@@ -15925,7 +14651,7 @@
           <a:bodyPr wrap="square" lIns="0" tIns="0" rIns="0" bIns="0" rtlCol="0" anchor="ctr"/>
           <a:lstStyle/>
           <a:p>
-            <a:pPr indent="0" marL="0">
+            <a:pPr marL="0" indent="0">
               <a:buNone/>
             </a:pPr>
             <a:r>
@@ -15964,7 +14690,7 @@
           <a:bodyPr wrap="square" lIns="0" tIns="0" rIns="0" bIns="0" rtlCol="0" anchor="ctr"/>
           <a:lstStyle/>
           <a:p>
-            <a:pPr algn="r" indent="0" marL="0">
+            <a:pPr marL="0" indent="0" algn="r">
               <a:buNone/>
             </a:pPr>
             <a:r>
@@ -15998,6 +14724,7 @@
         <a:solidFill>
           <a:srgbClr val="F4F7FC"/>
         </a:solidFill>
+        <a:effectLst/>
       </p:bgPr>
     </p:bg>
     <p:spTree>
@@ -16035,7 +14762,7 @@
           <a:bodyPr wrap="square" lIns="0" tIns="0" rIns="0" bIns="0" rtlCol="0" anchor="ctr"/>
           <a:lstStyle/>
           <a:p>
-            <a:pPr indent="0" marL="0">
+            <a:pPr marL="0" indent="0">
               <a:buNone/>
             </a:pPr>
             <a:r>
@@ -16074,7 +14801,7 @@
           <a:bodyPr wrap="square" lIns="0" tIns="0" rIns="0" bIns="0" rtlCol="0" anchor="t"/>
           <a:lstStyle/>
           <a:p>
-            <a:pPr indent="0" marL="0">
+            <a:pPr marL="0" indent="0">
               <a:buNone/>
             </a:pPr>
             <a:r>
@@ -16118,7 +14845,7 @@
             <a:prstDash val="solid"/>
           </a:ln>
           <a:effectLst>
-            <a:outerShdw sx="100000" sy="100000" kx="0" ky="0" algn="bl" rotWithShape="0" blurRad="101600" dist="12700" dir="5400000">
+            <a:outerShdw blurRad="101600" dist="12700" dir="5400000" algn="bl" rotWithShape="0">
               <a:srgbClr val="9FB0C9">
                 <a:alpha val="18000"/>
               </a:srgbClr>
@@ -16174,7 +14901,7 @@
           <a:bodyPr wrap="square" lIns="0" tIns="0" rIns="0" bIns="0" rtlCol="0" anchor="ctr"/>
           <a:lstStyle/>
           <a:p>
-            <a:pPr algn="ctr" indent="0" marL="0">
+            <a:pPr marL="0" indent="0" algn="ctr">
               <a:buNone/>
             </a:pPr>
             <a:r>
@@ -16213,7 +14940,7 @@
           <a:bodyPr wrap="square" lIns="0" tIns="0" rIns="0" bIns="0" rtlCol="0" anchor="t"/>
           <a:lstStyle/>
           <a:p>
-            <a:pPr algn="l" indent="0" marL="0">
+            <a:pPr marL="0" indent="0" algn="l">
               <a:lnSpc>
                 <a:spcPts val="1700"/>
               </a:lnSpc>
@@ -16255,7 +14982,7 @@
           <a:bodyPr wrap="square" lIns="0" tIns="0" rIns="0" bIns="0" rtlCol="0" anchor="ctr"/>
           <a:lstStyle/>
           <a:p>
-            <a:pPr algn="r" indent="0" marL="0">
+            <a:pPr marL="0" indent="0" algn="r">
               <a:buNone/>
             </a:pPr>
             <a:r>
@@ -16294,7 +15021,7 @@
           <a:bodyPr wrap="square" lIns="0" tIns="0" rIns="0" bIns="0" rtlCol="0" anchor="t"/>
           <a:lstStyle/>
           <a:p>
-            <a:pPr algn="l" indent="0" marL="0">
+            <a:pPr marL="0" indent="0" algn="l">
               <a:lnSpc>
                 <a:spcPts val="1700"/>
               </a:lnSpc>
@@ -16336,7 +15063,7 @@
           <a:bodyPr wrap="square" lIns="0" tIns="0" rIns="0" bIns="0" rtlCol="0" anchor="ctr"/>
           <a:lstStyle/>
           <a:p>
-            <a:pPr algn="r" indent="0" marL="0">
+            <a:pPr marL="0" indent="0" algn="r">
               <a:buNone/>
             </a:pPr>
             <a:r>
@@ -16375,7 +15102,7 @@
           <a:bodyPr wrap="square" lIns="0" tIns="0" rIns="0" bIns="0" rtlCol="0" anchor="t"/>
           <a:lstStyle/>
           <a:p>
-            <a:pPr algn="l" indent="0" marL="0">
+            <a:pPr marL="0" indent="0" algn="l">
               <a:lnSpc>
                 <a:spcPts val="1700"/>
               </a:lnSpc>
@@ -16417,7 +15144,7 @@
           <a:bodyPr wrap="square" lIns="0" tIns="0" rIns="0" bIns="0" rtlCol="0" anchor="ctr"/>
           <a:lstStyle/>
           <a:p>
-            <a:pPr algn="r" indent="0" marL="0">
+            <a:pPr marL="0" indent="0" algn="r">
               <a:buNone/>
             </a:pPr>
             <a:r>
@@ -16461,7 +15188,7 @@
             <a:prstDash val="solid"/>
           </a:ln>
           <a:effectLst>
-            <a:outerShdw sx="100000" sy="100000" kx="0" ky="0" algn="bl" rotWithShape="0" blurRad="101600" dist="12700" dir="5400000">
+            <a:outerShdw blurRad="101600" dist="12700" dir="5400000" algn="bl" rotWithShape="0">
               <a:srgbClr val="9FB0C9">
                 <a:alpha val="18000"/>
               </a:srgbClr>
@@ -16517,7 +15244,7 @@
           <a:bodyPr wrap="square" lIns="0" tIns="0" rIns="0" bIns="0" rtlCol="0" anchor="ctr"/>
           <a:lstStyle/>
           <a:p>
-            <a:pPr algn="ctr" indent="0" marL="0">
+            <a:pPr marL="0" indent="0" algn="ctr">
               <a:buNone/>
             </a:pPr>
             <a:r>
@@ -16556,7 +15283,7 @@
           <a:bodyPr wrap="square" lIns="0" tIns="0" rIns="0" bIns="0" rtlCol="0" anchor="t"/>
           <a:lstStyle/>
           <a:p>
-            <a:pPr algn="l" indent="0" marL="0">
+            <a:pPr marL="0" indent="0" algn="l">
               <a:lnSpc>
                 <a:spcPts val="1700"/>
               </a:lnSpc>
@@ -16598,7 +15325,7 @@
           <a:bodyPr wrap="square" lIns="0" tIns="0" rIns="0" bIns="0" rtlCol="0" anchor="ctr"/>
           <a:lstStyle/>
           <a:p>
-            <a:pPr algn="r" indent="0" marL="0">
+            <a:pPr marL="0" indent="0" algn="r">
               <a:buNone/>
             </a:pPr>
             <a:r>
@@ -16637,7 +15364,7 @@
           <a:bodyPr wrap="square" lIns="0" tIns="0" rIns="0" bIns="0" rtlCol="0" anchor="t"/>
           <a:lstStyle/>
           <a:p>
-            <a:pPr algn="l" indent="0" marL="0">
+            <a:pPr marL="0" indent="0" algn="l">
               <a:lnSpc>
                 <a:spcPts val="1700"/>
               </a:lnSpc>
@@ -16679,7 +15406,7 @@
           <a:bodyPr wrap="square" lIns="0" tIns="0" rIns="0" bIns="0" rtlCol="0" anchor="ctr"/>
           <a:lstStyle/>
           <a:p>
-            <a:pPr algn="r" indent="0" marL="0">
+            <a:pPr marL="0" indent="0" algn="r">
               <a:buNone/>
             </a:pPr>
             <a:r>
@@ -16718,7 +15445,7 @@
           <a:bodyPr wrap="square" lIns="0" tIns="0" rIns="0" bIns="0" rtlCol="0" anchor="t"/>
           <a:lstStyle/>
           <a:p>
-            <a:pPr algn="l" indent="0" marL="0">
+            <a:pPr marL="0" indent="0" algn="l">
               <a:lnSpc>
                 <a:spcPts val="1700"/>
               </a:lnSpc>
@@ -16760,7 +15487,7 @@
           <a:bodyPr wrap="square" lIns="0" tIns="0" rIns="0" bIns="0" rtlCol="0" anchor="ctr"/>
           <a:lstStyle/>
           <a:p>
-            <a:pPr algn="r" indent="0" marL="0">
+            <a:pPr marL="0" indent="0" algn="r">
               <a:buNone/>
             </a:pPr>
             <a:r>
@@ -16799,7 +15526,7 @@
           <a:bodyPr wrap="square" lIns="0" tIns="0" rIns="0" bIns="0" rtlCol="0" anchor="t"/>
           <a:lstStyle/>
           <a:p>
-            <a:pPr algn="l" indent="0" marL="0">
+            <a:pPr marL="0" indent="0" algn="l">
               <a:lnSpc>
                 <a:spcPts val="1700"/>
               </a:lnSpc>
@@ -16841,7 +15568,7 @@
           <a:bodyPr wrap="square" lIns="0" tIns="0" rIns="0" bIns="0" rtlCol="0" anchor="ctr"/>
           <a:lstStyle/>
           <a:p>
-            <a:pPr indent="0" marL="0">
+            <a:pPr marL="0" indent="0">
               <a:buNone/>
             </a:pPr>
             <a:r>
@@ -16880,7 +15607,7 @@
           <a:bodyPr wrap="square" lIns="0" tIns="0" rIns="0" bIns="0" rtlCol="0" anchor="ctr"/>
           <a:lstStyle/>
           <a:p>
-            <a:pPr algn="r" indent="0" marL="0">
+            <a:pPr marL="0" indent="0" algn="r">
               <a:buNone/>
             </a:pPr>
             <a:r>
@@ -16914,6 +15641,7 @@
         <a:solidFill>
           <a:srgbClr val="F4F7FC"/>
         </a:solidFill>
+        <a:effectLst/>
       </p:bgPr>
     </p:bg>
     <p:spTree>
@@ -16951,7 +15679,7 @@
           <a:bodyPr wrap="square" lIns="0" tIns="0" rIns="0" bIns="0" rtlCol="0" anchor="ctr"/>
           <a:lstStyle/>
           <a:p>
-            <a:pPr indent="0" marL="0">
+            <a:pPr marL="0" indent="0">
               <a:buNone/>
             </a:pPr>
             <a:r>
@@ -16990,7 +15718,7 @@
           <a:bodyPr wrap="square" lIns="0" tIns="0" rIns="0" bIns="0" rtlCol="0" anchor="t"/>
           <a:lstStyle/>
           <a:p>
-            <a:pPr indent="0" marL="0">
+            <a:pPr marL="0" indent="0">
               <a:buNone/>
             </a:pPr>
             <a:r>
@@ -17034,7 +15762,7 @@
             <a:prstDash val="solid"/>
           </a:ln>
           <a:effectLst>
-            <a:outerShdw sx="100000" sy="100000" kx="0" ky="0" algn="bl" rotWithShape="0" blurRad="101600" dist="12700" dir="5400000">
+            <a:outerShdw blurRad="101600" dist="12700" dir="5400000" algn="bl" rotWithShape="0">
               <a:srgbClr val="9FB0C9">
                 <a:alpha val="18000"/>
               </a:srgbClr>
@@ -17063,7 +15791,7 @@
           <a:bodyPr wrap="square" lIns="0" tIns="0" rIns="0" bIns="0" rtlCol="0" anchor="ctr"/>
           <a:lstStyle/>
           <a:p>
-            <a:pPr indent="0" marL="0">
+            <a:pPr marL="0" indent="0">
               <a:buNone/>
             </a:pPr>
             <a:r>
@@ -17102,7 +15830,7 @@
           <a:bodyPr wrap="square" lIns="0" tIns="0" rIns="0" bIns="0" rtlCol="0" anchor="ctr"/>
           <a:lstStyle/>
           <a:p>
-            <a:pPr indent="0" marL="0">
+            <a:pPr marL="0" indent="0">
               <a:buNone/>
             </a:pPr>
             <a:r>
@@ -17141,7 +15869,7 @@
           <a:bodyPr wrap="square" lIns="0" tIns="0" rIns="0" bIns="0" rtlCol="0" anchor="t"/>
           <a:lstStyle/>
           <a:p>
-            <a:pPr algn="l" indent="0" marL="0">
+            <a:pPr marL="0" indent="0" algn="l">
               <a:lnSpc>
                 <a:spcPts val="1500"/>
               </a:lnSpc>
@@ -17183,7 +15911,7 @@
           <a:bodyPr wrap="square" lIns="0" tIns="0" rIns="0" bIns="0" rtlCol="0" anchor="ctr"/>
           <a:lstStyle/>
           <a:p>
-            <a:pPr indent="0" marL="0">
+            <a:pPr marL="0" indent="0">
               <a:buNone/>
             </a:pPr>
             <a:r>
@@ -17227,7 +15955,7 @@
             <a:prstDash val="solid"/>
           </a:ln>
           <a:effectLst>
-            <a:outerShdw sx="100000" sy="100000" kx="0" ky="0" algn="bl" rotWithShape="0" blurRad="101600" dist="12700" dir="5400000">
+            <a:outerShdw blurRad="101600" dist="12700" dir="5400000" algn="bl" rotWithShape="0">
               <a:srgbClr val="9FB0C9">
                 <a:alpha val="18000"/>
               </a:srgbClr>
@@ -17256,7 +15984,7 @@
           <a:bodyPr wrap="square" lIns="0" tIns="0" rIns="0" bIns="0" rtlCol="0" anchor="ctr"/>
           <a:lstStyle/>
           <a:p>
-            <a:pPr indent="0" marL="0">
+            <a:pPr marL="0" indent="0">
               <a:buNone/>
             </a:pPr>
             <a:r>
@@ -17295,7 +16023,7 @@
           <a:bodyPr wrap="square" lIns="0" tIns="0" rIns="0" bIns="0" rtlCol="0" anchor="ctr"/>
           <a:lstStyle/>
           <a:p>
-            <a:pPr indent="0" marL="0">
+            <a:pPr marL="0" indent="0">
               <a:buNone/>
             </a:pPr>
             <a:r>
@@ -17334,7 +16062,7 @@
           <a:bodyPr wrap="square" lIns="0" tIns="0" rIns="0" bIns="0" rtlCol="0" anchor="t"/>
           <a:lstStyle/>
           <a:p>
-            <a:pPr algn="l" indent="0" marL="0">
+            <a:pPr marL="0" indent="0" algn="l">
               <a:lnSpc>
                 <a:spcPts val="1500"/>
               </a:lnSpc>
@@ -17376,7 +16104,7 @@
           <a:bodyPr wrap="square" lIns="0" tIns="0" rIns="0" bIns="0" rtlCol="0" anchor="ctr"/>
           <a:lstStyle/>
           <a:p>
-            <a:pPr indent="0" marL="0">
+            <a:pPr marL="0" indent="0">
               <a:buNone/>
             </a:pPr>
             <a:r>
@@ -17420,7 +16148,7 @@
             <a:prstDash val="solid"/>
           </a:ln>
           <a:effectLst>
-            <a:outerShdw sx="100000" sy="100000" kx="0" ky="0" algn="bl" rotWithShape="0" blurRad="101600" dist="12700" dir="5400000">
+            <a:outerShdw blurRad="101600" dist="12700" dir="5400000" algn="bl" rotWithShape="0">
               <a:srgbClr val="9FB0C9">
                 <a:alpha val="18000"/>
               </a:srgbClr>
@@ -17449,7 +16177,7 @@
           <a:bodyPr wrap="square" lIns="0" tIns="0" rIns="0" bIns="0" rtlCol="0" anchor="ctr"/>
           <a:lstStyle/>
           <a:p>
-            <a:pPr indent="0" marL="0">
+            <a:pPr marL="0" indent="0">
               <a:buNone/>
             </a:pPr>
             <a:r>
@@ -17488,7 +16216,7 @@
           <a:bodyPr wrap="square" lIns="0" tIns="0" rIns="0" bIns="0" rtlCol="0" anchor="ctr"/>
           <a:lstStyle/>
           <a:p>
-            <a:pPr indent="0" marL="0">
+            <a:pPr marL="0" indent="0">
               <a:buNone/>
             </a:pPr>
             <a:r>
@@ -17527,7 +16255,7 @@
           <a:bodyPr wrap="square" lIns="0" tIns="0" rIns="0" bIns="0" rtlCol="0" anchor="t"/>
           <a:lstStyle/>
           <a:p>
-            <a:pPr algn="l" indent="0" marL="0">
+            <a:pPr marL="0" indent="0" algn="l">
               <a:lnSpc>
                 <a:spcPts val="1500"/>
               </a:lnSpc>
@@ -17569,7 +16297,7 @@
           <a:bodyPr wrap="square" lIns="0" tIns="0" rIns="0" bIns="0" rtlCol="0" anchor="ctr"/>
           <a:lstStyle/>
           <a:p>
-            <a:pPr indent="0" marL="0">
+            <a:pPr marL="0" indent="0">
               <a:buNone/>
             </a:pPr>
             <a:r>
@@ -17613,7 +16341,7 @@
             <a:prstDash val="solid"/>
           </a:ln>
           <a:effectLst>
-            <a:outerShdw sx="100000" sy="100000" kx="0" ky="0" algn="bl" rotWithShape="0" blurRad="101600" dist="12700" dir="5400000">
+            <a:outerShdw blurRad="101600" dist="12700" dir="5400000" algn="bl" rotWithShape="0">
               <a:srgbClr val="9FB0C9">
                 <a:alpha val="18000"/>
               </a:srgbClr>
@@ -17642,7 +16370,7 @@
           <a:bodyPr wrap="square" lIns="0" tIns="0" rIns="0" bIns="0" rtlCol="0" anchor="ctr"/>
           <a:lstStyle/>
           <a:p>
-            <a:pPr indent="0" marL="0">
+            <a:pPr marL="0" indent="0">
               <a:buNone/>
             </a:pPr>
             <a:r>
@@ -17681,7 +16409,7 @@
           <a:bodyPr wrap="square" lIns="0" tIns="0" rIns="0" bIns="0" rtlCol="0" anchor="ctr"/>
           <a:lstStyle/>
           <a:p>
-            <a:pPr indent="0" marL="0">
+            <a:pPr marL="0" indent="0">
               <a:buNone/>
             </a:pPr>
             <a:r>
@@ -17720,7 +16448,7 @@
           <a:bodyPr wrap="square" lIns="0" tIns="0" rIns="0" bIns="0" rtlCol="0" anchor="t"/>
           <a:lstStyle/>
           <a:p>
-            <a:pPr algn="l" indent="0" marL="0">
+            <a:pPr marL="0" indent="0" algn="l">
               <a:lnSpc>
                 <a:spcPts val="1500"/>
               </a:lnSpc>
@@ -17762,7 +16490,7 @@
           <a:bodyPr wrap="square" lIns="0" tIns="0" rIns="0" bIns="0" rtlCol="0" anchor="ctr"/>
           <a:lstStyle/>
           <a:p>
-            <a:pPr indent="0" marL="0">
+            <a:pPr marL="0" indent="0">
               <a:buNone/>
             </a:pPr>
             <a:r>
@@ -17806,7 +16534,7 @@
             <a:prstDash val="solid"/>
           </a:ln>
           <a:effectLst>
-            <a:outerShdw sx="100000" sy="100000" kx="0" ky="0" algn="bl" rotWithShape="0" blurRad="101600" dist="12700" dir="5400000">
+            <a:outerShdw blurRad="101600" dist="12700" dir="5400000" algn="bl" rotWithShape="0">
               <a:srgbClr val="9FB0C9">
                 <a:alpha val="18000"/>
               </a:srgbClr>
@@ -17835,7 +16563,7 @@
           <a:bodyPr wrap="square" lIns="0" tIns="0" rIns="0" bIns="0" rtlCol="0" anchor="ctr"/>
           <a:lstStyle/>
           <a:p>
-            <a:pPr indent="0" marL="0">
+            <a:pPr marL="0" indent="0">
               <a:buNone/>
             </a:pPr>
             <a:r>
@@ -17874,7 +16602,7 @@
           <a:bodyPr wrap="square" lIns="0" tIns="0" rIns="0" bIns="0" rtlCol="0" anchor="ctr"/>
           <a:lstStyle/>
           <a:p>
-            <a:pPr indent="0" marL="0">
+            <a:pPr marL="0" indent="0">
               <a:buNone/>
             </a:pPr>
             <a:r>
@@ -17913,7 +16641,7 @@
           <a:bodyPr wrap="square" lIns="0" tIns="0" rIns="0" bIns="0" rtlCol="0" anchor="t"/>
           <a:lstStyle/>
           <a:p>
-            <a:pPr algn="l" indent="0" marL="0">
+            <a:pPr marL="0" indent="0" algn="l">
               <a:lnSpc>
                 <a:spcPts val="1500"/>
               </a:lnSpc>
@@ -17955,7 +16683,7 @@
           <a:bodyPr wrap="square" lIns="0" tIns="0" rIns="0" bIns="0" rtlCol="0" anchor="ctr"/>
           <a:lstStyle/>
           <a:p>
-            <a:pPr indent="0" marL="0">
+            <a:pPr marL="0" indent="0">
               <a:buNone/>
             </a:pPr>
             <a:r>
@@ -18021,7 +16749,7 @@
           <a:bodyPr wrap="square" lIns="0" tIns="0" rIns="0" bIns="0" rtlCol="0" anchor="ctr"/>
           <a:lstStyle/>
           <a:p>
-            <a:pPr indent="0" marL="0">
+            <a:pPr marL="0" indent="0">
               <a:lnSpc>
                 <a:spcPts val="1700"/>
               </a:lnSpc>
@@ -18063,7 +16791,7 @@
           <a:bodyPr wrap="square" lIns="0" tIns="0" rIns="0" bIns="0" rtlCol="0" anchor="ctr"/>
           <a:lstStyle/>
           <a:p>
-            <a:pPr indent="0" marL="0">
+            <a:pPr marL="0" indent="0">
               <a:buNone/>
             </a:pPr>
             <a:r>
@@ -18102,7 +16830,7 @@
           <a:bodyPr wrap="square" lIns="0" tIns="0" rIns="0" bIns="0" rtlCol="0" anchor="ctr"/>
           <a:lstStyle/>
           <a:p>
-            <a:pPr algn="r" indent="0" marL="0">
+            <a:pPr marL="0" indent="0" algn="r">
               <a:buNone/>
             </a:pPr>
             <a:r>
@@ -18136,6 +16864,7 @@
         <a:solidFill>
           <a:srgbClr val="F4F7FC"/>
         </a:solidFill>
+        <a:effectLst/>
       </p:bgPr>
     </p:bg>
     <p:spTree>
@@ -18173,7 +16902,7 @@
           <a:bodyPr wrap="square" lIns="0" tIns="0" rIns="0" bIns="0" rtlCol="0" anchor="ctr"/>
           <a:lstStyle/>
           <a:p>
-            <a:pPr indent="0" marL="0">
+            <a:pPr marL="0" indent="0">
               <a:buNone/>
             </a:pPr>
             <a:r>
@@ -18212,7 +16941,7 @@
           <a:bodyPr wrap="square" lIns="0" tIns="0" rIns="0" bIns="0" rtlCol="0" anchor="t"/>
           <a:lstStyle/>
           <a:p>
-            <a:pPr indent="0" marL="0">
+            <a:pPr marL="0" indent="0">
               <a:buNone/>
             </a:pPr>
             <a:r>
@@ -18256,7 +16985,7 @@
             <a:prstDash val="solid"/>
           </a:ln>
           <a:effectLst>
-            <a:outerShdw sx="100000" sy="100000" kx="0" ky="0" algn="bl" rotWithShape="0" blurRad="101600" dist="12700" dir="5400000">
+            <a:outerShdw blurRad="101600" dist="12700" dir="5400000" algn="bl" rotWithShape="0">
               <a:srgbClr val="9FB0C9">
                 <a:alpha val="18000"/>
               </a:srgbClr>
@@ -18285,7 +17014,7 @@
           <a:bodyPr wrap="square" lIns="0" tIns="0" rIns="0" bIns="0" rtlCol="0" anchor="ctr"/>
           <a:lstStyle/>
           <a:p>
-            <a:pPr algn="ctr" indent="0" marL="0">
+            <a:pPr marL="0" indent="0" algn="ctr">
               <a:buNone/>
             </a:pPr>
             <a:r>
@@ -18324,7 +17053,7 @@
           <a:bodyPr wrap="square" lIns="0" tIns="0" rIns="0" bIns="0" rtlCol="0" anchor="t"/>
           <a:lstStyle/>
           <a:p>
-            <a:pPr algn="l" indent="0" marL="0">
+            <a:pPr marL="0" indent="0" algn="l">
               <a:lnSpc>
                 <a:spcPts val="1700"/>
               </a:lnSpc>
@@ -18366,7 +17095,7 @@
           <a:bodyPr wrap="square" lIns="0" tIns="0" rIns="0" bIns="0" rtlCol="0" anchor="t"/>
           <a:lstStyle/>
           <a:p>
-            <a:pPr algn="l" indent="0" marL="0">
+            <a:pPr marL="0" indent="0" algn="l">
               <a:lnSpc>
                 <a:spcPts val="1700"/>
               </a:lnSpc>
@@ -18413,7 +17142,7 @@
             <a:prstDash val="solid"/>
           </a:ln>
           <a:effectLst>
-            <a:outerShdw sx="100000" sy="100000" kx="0" ky="0" algn="bl" rotWithShape="0" blurRad="101600" dist="12700" dir="5400000">
+            <a:outerShdw blurRad="101600" dist="12700" dir="5400000" algn="bl" rotWithShape="0">
               <a:srgbClr val="9FB0C9">
                 <a:alpha val="18000"/>
               </a:srgbClr>
@@ -18442,7 +17171,7 @@
           <a:bodyPr wrap="square" lIns="0" tIns="0" rIns="0" bIns="0" rtlCol="0" anchor="ctr"/>
           <a:lstStyle/>
           <a:p>
-            <a:pPr indent="0" marL="0">
+            <a:pPr marL="0" indent="0">
               <a:buNone/>
             </a:pPr>
             <a:r>
@@ -18481,7 +17210,7 @@
           <a:bodyPr wrap="square" lIns="0" tIns="0" rIns="0" bIns="0" rtlCol="0" anchor="t"/>
           <a:lstStyle/>
           <a:p>
-            <a:pPr algn="l" indent="0" marL="0">
+            <a:pPr marL="0" indent="0" algn="l">
               <a:lnSpc>
                 <a:spcPts val="1700"/>
               </a:lnSpc>
@@ -18528,7 +17257,7 @@
             <a:prstDash val="solid"/>
           </a:ln>
           <a:effectLst>
-            <a:outerShdw sx="100000" sy="100000" kx="0" ky="0" algn="bl" rotWithShape="0" blurRad="101600" dist="12700" dir="5400000">
+            <a:outerShdw blurRad="101600" dist="12700" dir="5400000" algn="bl" rotWithShape="0">
               <a:srgbClr val="9FB0C9">
                 <a:alpha val="18000"/>
               </a:srgbClr>
@@ -18557,7 +17286,7 @@
           <a:bodyPr wrap="square" lIns="0" tIns="0" rIns="0" bIns="0" rtlCol="0" anchor="ctr"/>
           <a:lstStyle/>
           <a:p>
-            <a:pPr indent="0" marL="0">
+            <a:pPr marL="0" indent="0">
               <a:buNone/>
             </a:pPr>
             <a:r>
@@ -18596,7 +17325,7 @@
           <a:bodyPr wrap="square" lIns="0" tIns="0" rIns="0" bIns="0" rtlCol="0" anchor="t"/>
           <a:lstStyle/>
           <a:p>
-            <a:pPr algn="l" indent="0" marL="0">
+            <a:pPr marL="0" indent="0" algn="l">
               <a:lnSpc>
                 <a:spcPts val="1700"/>
               </a:lnSpc>
@@ -18638,7 +17367,7 @@
           <a:bodyPr wrap="square" lIns="0" tIns="0" rIns="0" bIns="0" rtlCol="0" anchor="ctr"/>
           <a:lstStyle/>
           <a:p>
-            <a:pPr indent="0" marL="0">
+            <a:pPr marL="0" indent="0">
               <a:buNone/>
             </a:pPr>
             <a:r>
@@ -18677,7 +17406,7 @@
           <a:bodyPr wrap="square" lIns="0" tIns="0" rIns="0" bIns="0" rtlCol="0" anchor="ctr"/>
           <a:lstStyle/>
           <a:p>
-            <a:pPr algn="r" indent="0" marL="0">
+            <a:pPr marL="0" indent="0" algn="r">
               <a:buNone/>
             </a:pPr>
             <a:r>
@@ -18711,6 +17440,7 @@
         <a:solidFill>
           <a:srgbClr val="F4F7FC"/>
         </a:solidFill>
+        <a:effectLst/>
       </p:bgPr>
     </p:bg>
     <p:spTree>
@@ -18748,7 +17478,7 @@
           <a:bodyPr wrap="square" lIns="0" tIns="0" rIns="0" bIns="0" rtlCol="0" anchor="ctr"/>
           <a:lstStyle/>
           <a:p>
-            <a:pPr indent="0" marL="0">
+            <a:pPr marL="0" indent="0">
               <a:buNone/>
             </a:pPr>
             <a:r>
@@ -18787,7 +17517,7 @@
           <a:bodyPr wrap="square" lIns="0" tIns="0" rIns="0" bIns="0" rtlCol="0" anchor="t"/>
           <a:lstStyle/>
           <a:p>
-            <a:pPr indent="0" marL="0">
+            <a:pPr marL="0" indent="0">
               <a:buNone/>
             </a:pPr>
             <a:r>
@@ -18807,7 +17537,7 @@
       </p:sp>
       <p:graphicFrame>
         <p:nvGraphicFramePr>
-          <p:cNvPr id="4" name="Chart 0" descr=""/>
+          <p:cNvPr id="4" name="Chart 0"/>
           <p:cNvGraphicFramePr/>
           <p:nvPr/>
         </p:nvGraphicFramePr>
@@ -18815,15 +17545,15 @@
           <a:off x="548640" y="2011680"/>
           <a:ext cx="5394960" cy="3063240"/>
         </p:xfrm>
-        <a:graphic xmlns:a="http://schemas.openxmlformats.org/drawingml/2006/main">
+        <a:graphic>
           <a:graphicData uri="http://schemas.openxmlformats.org/drawingml/2006/chart">
-            <c:chart xmlns:c="http://schemas.openxmlformats.org/drawingml/2006/chart" r:id="rId1"/>
+            <c:chart xmlns:c="http://schemas.openxmlformats.org/drawingml/2006/chart" xmlns:r="http://schemas.openxmlformats.org/officeDocument/2006/relationships" r:id="rId3"/>
           </a:graphicData>
         </a:graphic>
       </p:graphicFrame>
       <p:graphicFrame>
         <p:nvGraphicFramePr>
-          <p:cNvPr id="5" name="Chart 1" descr=""/>
+          <p:cNvPr id="5" name="Chart 1"/>
           <p:cNvGraphicFramePr/>
           <p:nvPr/>
         </p:nvGraphicFramePr>
@@ -18831,9 +17561,9 @@
           <a:off x="6245352" y="2011680"/>
           <a:ext cx="5394960" cy="3063240"/>
         </p:xfrm>
-        <a:graphic xmlns:a="http://schemas.openxmlformats.org/drawingml/2006/main">
+        <a:graphic>
           <a:graphicData uri="http://schemas.openxmlformats.org/drawingml/2006/chart">
-            <c:chart xmlns:c="http://schemas.openxmlformats.org/drawingml/2006/chart" r:id="rId2"/>
+            <c:chart xmlns:c="http://schemas.openxmlformats.org/drawingml/2006/chart" xmlns:r="http://schemas.openxmlformats.org/officeDocument/2006/relationships" r:id="rId4"/>
           </a:graphicData>
         </a:graphic>
       </p:graphicFrame>
@@ -18885,7 +17615,7 @@
           <a:bodyPr wrap="square" lIns="0" tIns="0" rIns="0" bIns="0" rtlCol="0" anchor="ctr"/>
           <a:lstStyle/>
           <a:p>
-            <a:pPr indent="0" marL="0">
+            <a:pPr marL="0" indent="0">
               <a:lnSpc>
                 <a:spcPts val="1700"/>
               </a:lnSpc>
@@ -18927,7 +17657,7 @@
           <a:bodyPr wrap="square" lIns="0" tIns="0" rIns="0" bIns="0" rtlCol="0" anchor="ctr"/>
           <a:lstStyle/>
           <a:p>
-            <a:pPr indent="0" marL="0">
+            <a:pPr marL="0" indent="0">
               <a:buNone/>
             </a:pPr>
             <a:r>
@@ -18966,7 +17696,7 @@
           <a:bodyPr wrap="square" lIns="0" tIns="0" rIns="0" bIns="0" rtlCol="0" anchor="ctr"/>
           <a:lstStyle/>
           <a:p>
-            <a:pPr algn="r" indent="0" marL="0">
+            <a:pPr marL="0" indent="0" algn="r">
               <a:buNone/>
             </a:pPr>
             <a:r>
@@ -19000,6 +17730,7 @@
         <a:solidFill>
           <a:srgbClr val="F4F7FC"/>
         </a:solidFill>
+        <a:effectLst/>
       </p:bgPr>
     </p:bg>
     <p:spTree>
@@ -19037,7 +17768,7 @@
           <a:bodyPr wrap="square" lIns="0" tIns="0" rIns="0" bIns="0" rtlCol="0" anchor="ctr"/>
           <a:lstStyle/>
           <a:p>
-            <a:pPr indent="0" marL="0">
+            <a:pPr marL="0" indent="0">
               <a:buNone/>
             </a:pPr>
             <a:r>
@@ -19076,7 +17807,7 @@
           <a:bodyPr wrap="square" lIns="0" tIns="0" rIns="0" bIns="0" rtlCol="0" anchor="t"/>
           <a:lstStyle/>
           <a:p>
-            <a:pPr indent="0" marL="0">
+            <a:pPr marL="0" indent="0">
               <a:buNone/>
             </a:pPr>
             <a:r>
@@ -19120,7 +17851,7 @@
             <a:prstDash val="solid"/>
           </a:ln>
           <a:effectLst>
-            <a:outerShdw sx="100000" sy="100000" kx="0" ky="0" algn="bl" rotWithShape="0" blurRad="101600" dist="12700" dir="5400000">
+            <a:outerShdw blurRad="101600" dist="12700" dir="5400000" algn="bl" rotWithShape="0">
               <a:srgbClr val="9FB0C9">
                 <a:alpha val="18000"/>
               </a:srgbClr>
@@ -19149,7 +17880,7 @@
           <a:bodyPr wrap="square" lIns="0" tIns="0" rIns="0" bIns="0" rtlCol="0" anchor="ctr"/>
           <a:lstStyle/>
           <a:p>
-            <a:pPr indent="0" marL="0">
+            <a:pPr marL="0" indent="0">
               <a:buNone/>
             </a:pPr>
             <a:r>
@@ -19188,7 +17919,7 @@
           <a:bodyPr wrap="square" lIns="0" tIns="0" rIns="0" bIns="0" rtlCol="0" anchor="ctr"/>
           <a:lstStyle/>
           <a:p>
-            <a:pPr indent="0" marL="0">
+            <a:pPr marL="0" indent="0">
               <a:buNone/>
             </a:pPr>
             <a:r>
@@ -19227,7 +17958,7 @@
           <a:bodyPr wrap="square" lIns="0" tIns="0" rIns="0" bIns="0" rtlCol="0" anchor="t"/>
           <a:lstStyle/>
           <a:p>
-            <a:pPr algn="l" indent="0" marL="0">
+            <a:pPr marL="0" indent="0" algn="l">
               <a:lnSpc>
                 <a:spcPts val="1600"/>
               </a:lnSpc>
@@ -19274,7 +18005,7 @@
             <a:prstDash val="solid"/>
           </a:ln>
           <a:effectLst>
-            <a:outerShdw sx="100000" sy="100000" kx="0" ky="0" algn="bl" rotWithShape="0" blurRad="101600" dist="12700" dir="5400000">
+            <a:outerShdw blurRad="101600" dist="12700" dir="5400000" algn="bl" rotWithShape="0">
               <a:srgbClr val="9FB0C9">
                 <a:alpha val="18000"/>
               </a:srgbClr>
@@ -19303,7 +18034,7 @@
           <a:bodyPr wrap="square" lIns="0" tIns="0" rIns="0" bIns="0" rtlCol="0" anchor="ctr"/>
           <a:lstStyle/>
           <a:p>
-            <a:pPr indent="0" marL="0">
+            <a:pPr marL="0" indent="0">
               <a:buNone/>
             </a:pPr>
             <a:r>
@@ -19342,7 +18073,7 @@
           <a:bodyPr wrap="square" lIns="0" tIns="0" rIns="0" bIns="0" rtlCol="0" anchor="ctr"/>
           <a:lstStyle/>
           <a:p>
-            <a:pPr indent="0" marL="0">
+            <a:pPr marL="0" indent="0">
               <a:buNone/>
             </a:pPr>
             <a:r>
@@ -19381,7 +18112,7 @@
           <a:bodyPr wrap="square" lIns="0" tIns="0" rIns="0" bIns="0" rtlCol="0" anchor="t"/>
           <a:lstStyle/>
           <a:p>
-            <a:pPr algn="l" indent="0" marL="0">
+            <a:pPr marL="0" indent="0" algn="l">
               <a:lnSpc>
                 <a:spcPts val="1600"/>
               </a:lnSpc>
@@ -19396,7 +18127,161 @@
                 <a:ea typeface="Arial" pitchFamily="34" charset="-122"/>
                 <a:cs typeface="Arial" pitchFamily="34" charset="-120"/>
               </a:rPr>
-              <a:t>El área total bajo la curva es toda la probabilidad. Es el análogo directo de «la suma de las masas da 1».</a:t>
+              <a:t>El </a:t>
+            </a:r>
+            <a:r>
+              <a:rPr lang="en-US" sz="1150" dirty="0" err="1">
+                <a:solidFill>
+                  <a:srgbClr val="1B2A44"/>
+                </a:solidFill>
+                <a:latin typeface="Arial" pitchFamily="34" charset="0"/>
+                <a:ea typeface="Arial" pitchFamily="34" charset="-122"/>
+                <a:cs typeface="Arial" pitchFamily="34" charset="-120"/>
+              </a:rPr>
+              <a:t>área</a:t>
+            </a:r>
+            <a:r>
+              <a:rPr lang="en-US" sz="1150" dirty="0">
+                <a:solidFill>
+                  <a:srgbClr val="1B2A44"/>
+                </a:solidFill>
+                <a:latin typeface="Arial" pitchFamily="34" charset="0"/>
+                <a:ea typeface="Arial" pitchFamily="34" charset="-122"/>
+                <a:cs typeface="Arial" pitchFamily="34" charset="-120"/>
+              </a:rPr>
+              <a:t> total bajo la curva es </a:t>
+            </a:r>
+            <a:r>
+              <a:rPr lang="en-US" sz="1150" dirty="0" err="1">
+                <a:solidFill>
+                  <a:srgbClr val="1B2A44"/>
+                </a:solidFill>
+                <a:latin typeface="Arial" pitchFamily="34" charset="0"/>
+                <a:ea typeface="Arial" pitchFamily="34" charset="-122"/>
+                <a:cs typeface="Arial" pitchFamily="34" charset="-120"/>
+              </a:rPr>
+              <a:t>toda</a:t>
+            </a:r>
+            <a:r>
+              <a:rPr lang="en-US" sz="1150" dirty="0">
+                <a:solidFill>
+                  <a:srgbClr val="1B2A44"/>
+                </a:solidFill>
+                <a:latin typeface="Arial" pitchFamily="34" charset="0"/>
+                <a:ea typeface="Arial" pitchFamily="34" charset="-122"/>
+                <a:cs typeface="Arial" pitchFamily="34" charset="-120"/>
+              </a:rPr>
+              <a:t> la </a:t>
+            </a:r>
+            <a:r>
+              <a:rPr lang="en-US" sz="1150" dirty="0" err="1">
+                <a:solidFill>
+                  <a:srgbClr val="1B2A44"/>
+                </a:solidFill>
+                <a:latin typeface="Arial" pitchFamily="34" charset="0"/>
+                <a:ea typeface="Arial" pitchFamily="34" charset="-122"/>
+                <a:cs typeface="Arial" pitchFamily="34" charset="-120"/>
+              </a:rPr>
+              <a:t>probabilidad</a:t>
+            </a:r>
+            <a:r>
+              <a:rPr lang="en-US" sz="1150" dirty="0">
+                <a:solidFill>
+                  <a:srgbClr val="1B2A44"/>
+                </a:solidFill>
+                <a:latin typeface="Arial" pitchFamily="34" charset="0"/>
+                <a:ea typeface="Arial" pitchFamily="34" charset="-122"/>
+                <a:cs typeface="Arial" pitchFamily="34" charset="-120"/>
+              </a:rPr>
+              <a:t>. Es el </a:t>
+            </a:r>
+            <a:r>
+              <a:rPr lang="en-US" sz="1150" dirty="0" err="1">
+                <a:solidFill>
+                  <a:srgbClr val="1B2A44"/>
+                </a:solidFill>
+                <a:latin typeface="Arial" pitchFamily="34" charset="0"/>
+                <a:ea typeface="Arial" pitchFamily="34" charset="-122"/>
+                <a:cs typeface="Arial" pitchFamily="34" charset="-120"/>
+              </a:rPr>
+              <a:t>análogo</a:t>
+            </a:r>
+            <a:r>
+              <a:rPr lang="en-US" sz="1150" dirty="0">
+                <a:solidFill>
+                  <a:srgbClr val="1B2A44"/>
+                </a:solidFill>
+                <a:latin typeface="Arial" pitchFamily="34" charset="0"/>
+                <a:ea typeface="Arial" pitchFamily="34" charset="-122"/>
+                <a:cs typeface="Arial" pitchFamily="34" charset="-120"/>
+              </a:rPr>
+              <a:t> </a:t>
+            </a:r>
+            <a:r>
+              <a:rPr lang="en-US" sz="1150" dirty="0" err="1">
+                <a:solidFill>
+                  <a:srgbClr val="1B2A44"/>
+                </a:solidFill>
+                <a:latin typeface="Arial" pitchFamily="34" charset="0"/>
+                <a:ea typeface="Arial" pitchFamily="34" charset="-122"/>
+                <a:cs typeface="Arial" pitchFamily="34" charset="-120"/>
+              </a:rPr>
+              <a:t>directo</a:t>
+            </a:r>
+            <a:r>
+              <a:rPr lang="en-US" sz="1150" dirty="0">
+                <a:solidFill>
+                  <a:srgbClr val="1B2A44"/>
+                </a:solidFill>
+                <a:latin typeface="Arial" pitchFamily="34" charset="0"/>
+                <a:ea typeface="Arial" pitchFamily="34" charset="-122"/>
+                <a:cs typeface="Arial" pitchFamily="34" charset="-120"/>
+              </a:rPr>
+              <a:t> de «la </a:t>
+            </a:r>
+            <a:r>
+              <a:rPr lang="en-US" sz="1150" dirty="0" err="1">
+                <a:solidFill>
+                  <a:srgbClr val="1B2A44"/>
+                </a:solidFill>
+                <a:latin typeface="Arial" pitchFamily="34" charset="0"/>
+                <a:ea typeface="Arial" pitchFamily="34" charset="-122"/>
+                <a:cs typeface="Arial" pitchFamily="34" charset="-120"/>
+              </a:rPr>
+              <a:t>suma</a:t>
+            </a:r>
+            <a:r>
+              <a:rPr lang="en-US" sz="1150" dirty="0">
+                <a:solidFill>
+                  <a:srgbClr val="1B2A44"/>
+                </a:solidFill>
+                <a:latin typeface="Arial" pitchFamily="34" charset="0"/>
+                <a:ea typeface="Arial" pitchFamily="34" charset="-122"/>
+                <a:cs typeface="Arial" pitchFamily="34" charset="-120"/>
+              </a:rPr>
+              <a:t> de las </a:t>
+            </a:r>
+            <a:r>
+              <a:rPr lang="en-US" sz="1150" dirty="0" err="1">
+                <a:solidFill>
+                  <a:srgbClr val="1B2A44"/>
+                </a:solidFill>
+                <a:latin typeface="Arial" pitchFamily="34" charset="0"/>
+                <a:ea typeface="Arial" pitchFamily="34" charset="-122"/>
+                <a:cs typeface="Arial" pitchFamily="34" charset="-120"/>
+              </a:rPr>
+              <a:t>masas</a:t>
+            </a:r>
+            <a:r>
+              <a:rPr lang="en-US" sz="1150" dirty="0">
+                <a:solidFill>
+                  <a:srgbClr val="1B2A44"/>
+                </a:solidFill>
+                <a:latin typeface="Arial" pitchFamily="34" charset="0"/>
+                <a:ea typeface="Arial" pitchFamily="34" charset="-122"/>
+                <a:cs typeface="Arial" pitchFamily="34" charset="-120"/>
+              </a:rPr>
+              <a:t> da 1».</a:t>
             </a:r>
             <a:endParaRPr lang="en-US" sz="1150" dirty="0"/>
           </a:p>
@@ -19428,7 +18313,7 @@
             <a:prstDash val="solid"/>
           </a:ln>
           <a:effectLst>
-            <a:outerShdw sx="100000" sy="100000" kx="0" ky="0" algn="bl" rotWithShape="0" blurRad="101600" dist="12700" dir="5400000">
+            <a:outerShdw blurRad="101600" dist="12700" dir="5400000" algn="bl" rotWithShape="0">
               <a:srgbClr val="9FB0C9">
                 <a:alpha val="18000"/>
               </a:srgbClr>
@@ -19457,7 +18342,7 @@
           <a:bodyPr wrap="square" lIns="0" tIns="0" rIns="0" bIns="0" rtlCol="0" anchor="ctr"/>
           <a:lstStyle/>
           <a:p>
-            <a:pPr indent="0" marL="0">
+            <a:pPr marL="0" indent="0">
               <a:buNone/>
             </a:pPr>
             <a:r>
@@ -19496,7 +18381,7 @@
           <a:bodyPr wrap="square" lIns="0" tIns="0" rIns="0" bIns="0" rtlCol="0" anchor="ctr"/>
           <a:lstStyle/>
           <a:p>
-            <a:pPr indent="0" marL="0">
+            <a:pPr marL="0" indent="0">
               <a:buNone/>
             </a:pPr>
             <a:r>
@@ -19535,7 +18420,7 @@
           <a:bodyPr wrap="square" lIns="0" tIns="0" rIns="0" bIns="0" rtlCol="0" anchor="t"/>
           <a:lstStyle/>
           <a:p>
-            <a:pPr algn="l" indent="0" marL="0">
+            <a:pPr marL="0" indent="0" algn="l">
               <a:lnSpc>
                 <a:spcPts val="1600"/>
               </a:lnSpc>
@@ -19582,7 +18467,7 @@
             <a:prstDash val="solid"/>
           </a:ln>
           <a:effectLst>
-            <a:outerShdw sx="100000" sy="100000" kx="0" ky="0" algn="bl" rotWithShape="0" blurRad="101600" dist="12700" dir="5400000">
+            <a:outerShdw blurRad="101600" dist="12700" dir="5400000" algn="bl" rotWithShape="0">
               <a:srgbClr val="9FB0C9">
                 <a:alpha val="18000"/>
               </a:srgbClr>
@@ -19638,7 +18523,7 @@
           <a:bodyPr wrap="square" lIns="0" tIns="0" rIns="0" bIns="0" rtlCol="0" anchor="ctr"/>
           <a:lstStyle/>
           <a:p>
-            <a:pPr algn="ctr" indent="0" marL="0">
+            <a:pPr marL="0" indent="0" algn="ctr">
               <a:buNone/>
             </a:pPr>
             <a:r>
@@ -19677,7 +18562,7 @@
           <a:bodyPr wrap="square" lIns="0" tIns="0" rIns="0" bIns="0" rtlCol="0" anchor="t"/>
           <a:lstStyle/>
           <a:p>
-            <a:pPr algn="l" indent="0" marL="0">
+            <a:pPr marL="0" indent="0" algn="l">
               <a:lnSpc>
                 <a:spcPts val="1600"/>
               </a:lnSpc>
@@ -19719,7 +18604,7 @@
           <a:bodyPr wrap="square" lIns="0" tIns="0" rIns="0" bIns="0" rtlCol="0" anchor="ctr"/>
           <a:lstStyle/>
           <a:p>
-            <a:pPr indent="0" marL="0">
+            <a:pPr marL="0" indent="0">
               <a:buNone/>
             </a:pPr>
             <a:r>
@@ -19758,7 +18643,7 @@
           <a:bodyPr wrap="square" lIns="0" tIns="0" rIns="0" bIns="0" rtlCol="0" anchor="ctr"/>
           <a:lstStyle/>
           <a:p>
-            <a:pPr algn="r" indent="0" marL="0">
+            <a:pPr marL="0" indent="0" algn="r">
               <a:buNone/>
             </a:pPr>
             <a:r>
@@ -19792,6 +18677,7 @@
         <a:solidFill>
           <a:srgbClr val="F4F7FC"/>
         </a:solidFill>
+        <a:effectLst/>
       </p:bgPr>
     </p:bg>
     <p:spTree>
@@ -19829,7 +18715,7 @@
           <a:bodyPr wrap="square" lIns="0" tIns="0" rIns="0" bIns="0" rtlCol="0" anchor="ctr"/>
           <a:lstStyle/>
           <a:p>
-            <a:pPr indent="0" marL="0">
+            <a:pPr marL="0" indent="0">
               <a:buNone/>
             </a:pPr>
             <a:r>
@@ -19868,7 +18754,7 @@
           <a:bodyPr wrap="square" lIns="0" tIns="0" rIns="0" bIns="0" rtlCol="0" anchor="t"/>
           <a:lstStyle/>
           <a:p>
-            <a:pPr indent="0" marL="0">
+            <a:pPr marL="0" indent="0">
               <a:buNone/>
             </a:pPr>
             <a:r>
@@ -19912,7 +18798,7 @@
             <a:prstDash val="solid"/>
           </a:ln>
           <a:effectLst>
-            <a:outerShdw sx="100000" sy="100000" kx="0" ky="0" algn="bl" rotWithShape="0" blurRad="101600" dist="12700" dir="5400000">
+            <a:outerShdw blurRad="101600" dist="12700" dir="5400000" algn="bl" rotWithShape="0">
               <a:srgbClr val="9FB0C9">
                 <a:alpha val="18000"/>
               </a:srgbClr>
@@ -19941,7 +18827,7 @@
           <a:bodyPr wrap="square" lIns="0" tIns="0" rIns="0" bIns="0" rtlCol="0" anchor="ctr"/>
           <a:lstStyle/>
           <a:p>
-            <a:pPr indent="0" marL="0">
+            <a:pPr marL="0" indent="0">
               <a:buNone/>
             </a:pPr>
             <a:r>
@@ -20103,7 +18989,7 @@
       </p:sp>
       <p:graphicFrame>
         <p:nvGraphicFramePr>
-          <p:cNvPr id="7" name="Chart 0" descr=""/>
+          <p:cNvPr id="7" name="Chart 0"/>
           <p:cNvGraphicFramePr/>
           <p:nvPr/>
         </p:nvGraphicFramePr>
@@ -20111,9 +18997,9 @@
           <a:off x="5669280" y="2057400"/>
           <a:ext cx="5971032" cy="3611880"/>
         </p:xfrm>
-        <a:graphic xmlns:a="http://schemas.openxmlformats.org/drawingml/2006/main">
+        <a:graphic>
           <a:graphicData uri="http://schemas.openxmlformats.org/drawingml/2006/chart">
-            <c:chart xmlns:c="http://schemas.openxmlformats.org/drawingml/2006/chart" r:id="rId1"/>
+            <c:chart xmlns:c="http://schemas.openxmlformats.org/drawingml/2006/chart" xmlns:r="http://schemas.openxmlformats.org/officeDocument/2006/relationships" r:id="rId3"/>
           </a:graphicData>
         </a:graphic>
       </p:graphicFrame>
@@ -20138,7 +19024,7 @@
           <a:bodyPr wrap="square" lIns="0" tIns="0" rIns="0" bIns="0" rtlCol="0" anchor="ctr"/>
           <a:lstStyle/>
           <a:p>
-            <a:pPr indent="0" marL="0">
+            <a:pPr marL="0" indent="0">
               <a:buNone/>
             </a:pPr>
             <a:r>
@@ -20177,7 +19063,7 @@
           <a:bodyPr wrap="square" lIns="0" tIns="0" rIns="0" bIns="0" rtlCol="0" anchor="ctr"/>
           <a:lstStyle/>
           <a:p>
-            <a:pPr algn="r" indent="0" marL="0">
+            <a:pPr marL="0" indent="0" algn="r">
               <a:buNone/>
             </a:pPr>
             <a:r>
@@ -20211,6 +19097,7 @@
         <a:solidFill>
           <a:srgbClr val="F4F7FC"/>
         </a:solidFill>
+        <a:effectLst/>
       </p:bgPr>
     </p:bg>
     <p:spTree>
@@ -20248,7 +19135,7 @@
           <a:bodyPr wrap="square" lIns="0" tIns="0" rIns="0" bIns="0" rtlCol="0" anchor="ctr"/>
           <a:lstStyle/>
           <a:p>
-            <a:pPr indent="0" marL="0">
+            <a:pPr marL="0" indent="0">
               <a:buNone/>
             </a:pPr>
             <a:r>
@@ -20287,7 +19174,7 @@
           <a:bodyPr wrap="square" lIns="0" tIns="0" rIns="0" bIns="0" rtlCol="0" anchor="t"/>
           <a:lstStyle/>
           <a:p>
-            <a:pPr indent="0" marL="0">
+            <a:pPr marL="0" indent="0">
               <a:buNone/>
             </a:pPr>
             <a:r>
@@ -20321,16 +19208,34 @@
         </p:nvGraphicFramePr>
         <p:xfrm>
           <a:off x="548640" y="2194560"/>
-          <a:ext cx="5669280" cy="914400"/>
+          <a:ext cx="5669280" cy="2414016"/>
         </p:xfrm>
         <a:graphic>
           <a:graphicData uri="http://schemas.openxmlformats.org/drawingml/2006/table">
             <a:tbl>
               <a:tblPr/>
               <a:tblGrid>
-                <a:gridCol w="1188720"/>
-                <a:gridCol w="2468880"/>
-                <a:gridCol w="2011680"/>
+                <a:gridCol w="1188720">
+                  <a:extLst>
+                    <a:ext uri="{9D8B030D-6E8A-4147-A177-3AD203B41FA5}">
+                      <a16:colId xmlns:a16="http://schemas.microsoft.com/office/drawing/2014/main" val="20000"/>
+                    </a:ext>
+                  </a:extLst>
+                </a:gridCol>
+                <a:gridCol w="2468880">
+                  <a:extLst>
+                    <a:ext uri="{9D8B030D-6E8A-4147-A177-3AD203B41FA5}">
+                      <a16:colId xmlns:a16="http://schemas.microsoft.com/office/drawing/2014/main" val="20001"/>
+                    </a:ext>
+                  </a:extLst>
+                </a:gridCol>
+                <a:gridCol w="2011680">
+                  <a:extLst>
+                    <a:ext uri="{9D8B030D-6E8A-4147-A177-3AD203B41FA5}">
+                      <a16:colId xmlns:a16="http://schemas.microsoft.com/office/drawing/2014/main" val="20002"/>
+                    </a:ext>
+                  </a:extLst>
+                </a:gridCol>
               </a:tblGrid>
               <a:tr h="402336">
                 <a:tc>
@@ -20338,7 +19243,7 @@
                     <a:bodyPr/>
                     <a:lstStyle/>
                     <a:p>
-                      <a:pPr indent="0" marL="0">
+                      <a:pPr marL="0" indent="0">
                         <a:buNone/>
                       </a:pPr>
                       <a:r>
@@ -20359,7 +19264,7 @@
                       </a:endParaRPr>
                     </a:p>
                   </a:txBody>
-                  <a:tcPr marL="91440" marR="91440" marT="91440" marB="91440" anchor="ctr">
+                  <a:tcPr marT="91440" marB="91440" anchor="ctr">
                     <a:lnL w="12700" cap="flat" cmpd="sng" algn="ctr">
                       <a:solidFill>
                         <a:srgbClr val="DCE3F0"/>
@@ -20406,7 +19311,7 @@
                     <a:bodyPr/>
                     <a:lstStyle/>
                     <a:p>
-                      <a:pPr indent="0" marL="0">
+                      <a:pPr marL="0" indent="0">
                         <a:buNone/>
                       </a:pPr>
                       <a:r>
@@ -20427,7 +19332,7 @@
                       </a:endParaRPr>
                     </a:p>
                   </a:txBody>
-                  <a:tcPr marL="91440" marR="91440" marT="91440" marB="91440" anchor="ctr">
+                  <a:tcPr marT="91440" marB="91440" anchor="ctr">
                     <a:lnL w="12700" cap="flat" cmpd="sng" algn="ctr">
                       <a:solidFill>
                         <a:srgbClr val="DCE3F0"/>
@@ -20474,7 +19379,7 @@
                     <a:bodyPr/>
                     <a:lstStyle/>
                     <a:p>
-                      <a:pPr indent="0" marL="0">
+                      <a:pPr marL="0" indent="0">
                         <a:buNone/>
                       </a:pPr>
                       <a:r>
@@ -20495,7 +19400,7 @@
                       </a:endParaRPr>
                     </a:p>
                   </a:txBody>
-                  <a:tcPr marL="91440" marR="91440" marT="91440" marB="91440" anchor="ctr">
+                  <a:tcPr marT="91440" marB="91440" anchor="ctr">
                     <a:lnL w="12700" cap="flat" cmpd="sng" algn="ctr">
                       <a:solidFill>
                         <a:srgbClr val="DCE3F0"/>
@@ -20537,6 +19442,11 @@
                     </a:solidFill>
                   </a:tcPr>
                 </a:tc>
+                <a:extLst>
+                  <a:ext uri="{0D108BD9-81ED-4DB2-BD59-A6C34878D82A}">
+                    <a16:rowId xmlns:a16="http://schemas.microsoft.com/office/drawing/2014/main" val="10000"/>
+                  </a:ext>
+                </a:extLst>
               </a:tr>
               <a:tr h="402336">
                 <a:tc>
@@ -20544,7 +19454,7 @@
                     <a:bodyPr/>
                     <a:lstStyle/>
                     <a:p>
-                      <a:pPr indent="0" marL="0">
+                      <a:pPr marL="0" indent="0">
                         <a:buNone/>
                       </a:pPr>
                       <a:r>
@@ -20565,7 +19475,7 @@
                       </a:endParaRPr>
                     </a:p>
                   </a:txBody>
-                  <a:tcPr marL="91440" marR="91440" marT="91440" marB="91440" anchor="ctr">
+                  <a:tcPr marT="91440" marB="91440" anchor="ctr">
                     <a:lnL w="12700" cap="flat" cmpd="sng" algn="ctr">
                       <a:solidFill>
                         <a:srgbClr val="DCE3F0"/>
@@ -20612,7 +19522,7 @@
                     <a:bodyPr/>
                     <a:lstStyle/>
                     <a:p>
-                      <a:pPr indent="0" marL="0">
+                      <a:pPr marL="0" indent="0">
                         <a:buNone/>
                       </a:pPr>
                       <a:r>
@@ -20633,7 +19543,7 @@
                       </a:endParaRPr>
                     </a:p>
                   </a:txBody>
-                  <a:tcPr marL="91440" marR="91440" marT="91440" marB="91440" anchor="ctr">
+                  <a:tcPr marT="91440" marB="91440" anchor="ctr">
                     <a:lnL w="12700" cap="flat" cmpd="sng" algn="ctr">
                       <a:solidFill>
                         <a:srgbClr val="DCE3F0"/>
@@ -20680,7 +19590,7 @@
                     <a:bodyPr/>
                     <a:lstStyle/>
                     <a:p>
-                      <a:pPr indent="0" marL="0">
+                      <a:pPr marL="0" indent="0">
                         <a:buNone/>
                       </a:pPr>
                       <a:r>
@@ -20701,7 +19611,7 @@
                       </a:endParaRPr>
                     </a:p>
                   </a:txBody>
-                  <a:tcPr marL="91440" marR="91440" marT="91440" marB="91440" anchor="ctr">
+                  <a:tcPr marT="91440" marB="91440" anchor="ctr">
                     <a:lnL w="12700" cap="flat" cmpd="sng" algn="ctr">
                       <a:solidFill>
                         <a:srgbClr val="DCE3F0"/>
@@ -20743,6 +19653,11 @@
                     </a:solidFill>
                   </a:tcPr>
                 </a:tc>
+                <a:extLst>
+                  <a:ext uri="{0D108BD9-81ED-4DB2-BD59-A6C34878D82A}">
+                    <a16:rowId xmlns:a16="http://schemas.microsoft.com/office/drawing/2014/main" val="10001"/>
+                  </a:ext>
+                </a:extLst>
               </a:tr>
               <a:tr h="402336">
                 <a:tc>
@@ -20750,7 +19665,7 @@
                     <a:bodyPr/>
                     <a:lstStyle/>
                     <a:p>
-                      <a:pPr indent="0" marL="0">
+                      <a:pPr marL="0" indent="0">
                         <a:buNone/>
                       </a:pPr>
                       <a:r>
@@ -20771,7 +19686,7 @@
                       </a:endParaRPr>
                     </a:p>
                   </a:txBody>
-                  <a:tcPr marL="91440" marR="91440" marT="91440" marB="91440" anchor="ctr">
+                  <a:tcPr marT="91440" marB="91440" anchor="ctr">
                     <a:lnL w="12700" cap="flat" cmpd="sng" algn="ctr">
                       <a:solidFill>
                         <a:srgbClr val="DCE3F0"/>
@@ -20818,7 +19733,7 @@
                     <a:bodyPr/>
                     <a:lstStyle/>
                     <a:p>
-                      <a:pPr indent="0" marL="0">
+                      <a:pPr marL="0" indent="0">
                         <a:buNone/>
                       </a:pPr>
                       <a:r>
@@ -20839,7 +19754,7 @@
                       </a:endParaRPr>
                     </a:p>
                   </a:txBody>
-                  <a:tcPr marL="91440" marR="91440" marT="91440" marB="91440" anchor="ctr">
+                  <a:tcPr marT="91440" marB="91440" anchor="ctr">
                     <a:lnL w="12700" cap="flat" cmpd="sng" algn="ctr">
                       <a:solidFill>
                         <a:srgbClr val="DCE3F0"/>
@@ -20886,7 +19801,7 @@
                     <a:bodyPr/>
                     <a:lstStyle/>
                     <a:p>
-                      <a:pPr indent="0" marL="0">
+                      <a:pPr marL="0" indent="0">
                         <a:buNone/>
                       </a:pPr>
                       <a:r>
@@ -20907,7 +19822,7 @@
                       </a:endParaRPr>
                     </a:p>
                   </a:txBody>
-                  <a:tcPr marL="91440" marR="91440" marT="91440" marB="91440" anchor="ctr">
+                  <a:tcPr marT="91440" marB="91440" anchor="ctr">
                     <a:lnL w="12700" cap="flat" cmpd="sng" algn="ctr">
                       <a:solidFill>
                         <a:srgbClr val="DCE3F0"/>
@@ -20949,6 +19864,11 @@
                     </a:solidFill>
                   </a:tcPr>
                 </a:tc>
+                <a:extLst>
+                  <a:ext uri="{0D108BD9-81ED-4DB2-BD59-A6C34878D82A}">
+                    <a16:rowId xmlns:a16="http://schemas.microsoft.com/office/drawing/2014/main" val="10002"/>
+                  </a:ext>
+                </a:extLst>
               </a:tr>
               <a:tr h="402336">
                 <a:tc>
@@ -20956,7 +19876,7 @@
                     <a:bodyPr/>
                     <a:lstStyle/>
                     <a:p>
-                      <a:pPr indent="0" marL="0">
+                      <a:pPr marL="0" indent="0">
                         <a:buNone/>
                       </a:pPr>
                       <a:r>
@@ -20977,7 +19897,7 @@
                       </a:endParaRPr>
                     </a:p>
                   </a:txBody>
-                  <a:tcPr marL="91440" marR="91440" marT="91440" marB="91440" anchor="ctr">
+                  <a:tcPr marT="91440" marB="91440" anchor="ctr">
                     <a:lnL w="12700" cap="flat" cmpd="sng" algn="ctr">
                       <a:solidFill>
                         <a:srgbClr val="DCE3F0"/>
@@ -21024,7 +19944,7 @@
                     <a:bodyPr/>
                     <a:lstStyle/>
                     <a:p>
-                      <a:pPr indent="0" marL="0">
+                      <a:pPr marL="0" indent="0">
                         <a:buNone/>
                       </a:pPr>
                       <a:r>
@@ -21045,7 +19965,7 @@
                       </a:endParaRPr>
                     </a:p>
                   </a:txBody>
-                  <a:tcPr marL="91440" marR="91440" marT="91440" marB="91440" anchor="ctr">
+                  <a:tcPr marT="91440" marB="91440" anchor="ctr">
                     <a:lnL w="12700" cap="flat" cmpd="sng" algn="ctr">
                       <a:solidFill>
                         <a:srgbClr val="DCE3F0"/>
@@ -21092,7 +20012,7 @@
                     <a:bodyPr/>
                     <a:lstStyle/>
                     <a:p>
-                      <a:pPr indent="0" marL="0">
+                      <a:pPr marL="0" indent="0">
                         <a:buNone/>
                       </a:pPr>
                       <a:r>
@@ -21113,7 +20033,7 @@
                       </a:endParaRPr>
                     </a:p>
                   </a:txBody>
-                  <a:tcPr marL="91440" marR="91440" marT="91440" marB="91440" anchor="ctr">
+                  <a:tcPr marT="91440" marB="91440" anchor="ctr">
                     <a:lnL w="12700" cap="flat" cmpd="sng" algn="ctr">
                       <a:solidFill>
                         <a:srgbClr val="DCE3F0"/>
@@ -21155,6 +20075,11 @@
                     </a:solidFill>
                   </a:tcPr>
                 </a:tc>
+                <a:extLst>
+                  <a:ext uri="{0D108BD9-81ED-4DB2-BD59-A6C34878D82A}">
+                    <a16:rowId xmlns:a16="http://schemas.microsoft.com/office/drawing/2014/main" val="10003"/>
+                  </a:ext>
+                </a:extLst>
               </a:tr>
               <a:tr h="402336">
                 <a:tc>
@@ -21162,7 +20087,7 @@
                     <a:bodyPr/>
                     <a:lstStyle/>
                     <a:p>
-                      <a:pPr indent="0" marL="0">
+                      <a:pPr marL="0" indent="0">
                         <a:buNone/>
                       </a:pPr>
                       <a:r>
@@ -21183,7 +20108,7 @@
                       </a:endParaRPr>
                     </a:p>
                   </a:txBody>
-                  <a:tcPr marL="91440" marR="91440" marT="91440" marB="91440" anchor="ctr">
+                  <a:tcPr marT="91440" marB="91440" anchor="ctr">
                     <a:lnL w="12700" cap="flat" cmpd="sng" algn="ctr">
                       <a:solidFill>
                         <a:srgbClr val="DCE3F0"/>
@@ -21230,7 +20155,7 @@
                     <a:bodyPr/>
                     <a:lstStyle/>
                     <a:p>
-                      <a:pPr indent="0" marL="0">
+                      <a:pPr marL="0" indent="0">
                         <a:buNone/>
                       </a:pPr>
                       <a:r>
@@ -21251,7 +20176,7 @@
                       </a:endParaRPr>
                     </a:p>
                   </a:txBody>
-                  <a:tcPr marL="91440" marR="91440" marT="91440" marB="91440" anchor="ctr">
+                  <a:tcPr marT="91440" marB="91440" anchor="ctr">
                     <a:lnL w="12700" cap="flat" cmpd="sng" algn="ctr">
                       <a:solidFill>
                         <a:srgbClr val="DCE3F0"/>
@@ -21298,7 +20223,7 @@
                     <a:bodyPr/>
                     <a:lstStyle/>
                     <a:p>
-                      <a:pPr indent="0" marL="0">
+                      <a:pPr marL="0" indent="0">
                         <a:buNone/>
                       </a:pPr>
                       <a:r>
@@ -21319,7 +20244,7 @@
                       </a:endParaRPr>
                     </a:p>
                   </a:txBody>
-                  <a:tcPr marL="91440" marR="91440" marT="91440" marB="91440" anchor="ctr">
+                  <a:tcPr marT="91440" marB="91440" anchor="ctr">
                     <a:lnL w="12700" cap="flat" cmpd="sng" algn="ctr">
                       <a:solidFill>
                         <a:srgbClr val="DCE3F0"/>
@@ -21361,6 +20286,11 @@
                     </a:solidFill>
                   </a:tcPr>
                 </a:tc>
+                <a:extLst>
+                  <a:ext uri="{0D108BD9-81ED-4DB2-BD59-A6C34878D82A}">
+                    <a16:rowId xmlns:a16="http://schemas.microsoft.com/office/drawing/2014/main" val="10004"/>
+                  </a:ext>
+                </a:extLst>
               </a:tr>
               <a:tr h="402336">
                 <a:tc>
@@ -21368,7 +20298,7 @@
                     <a:bodyPr/>
                     <a:lstStyle/>
                     <a:p>
-                      <a:pPr indent="0" marL="0">
+                      <a:pPr marL="0" indent="0">
                         <a:buNone/>
                       </a:pPr>
                       <a:r>
@@ -21389,7 +20319,7 @@
                       </a:endParaRPr>
                     </a:p>
                   </a:txBody>
-                  <a:tcPr marL="91440" marR="91440" marT="91440" marB="91440" anchor="ctr">
+                  <a:tcPr marT="91440" marB="91440" anchor="ctr">
                     <a:lnL w="12700" cap="flat" cmpd="sng" algn="ctr">
                       <a:solidFill>
                         <a:srgbClr val="DCE3F0"/>
@@ -21436,7 +20366,7 @@
                     <a:bodyPr/>
                     <a:lstStyle/>
                     <a:p>
-                      <a:pPr indent="0" marL="0">
+                      <a:pPr marL="0" indent="0">
                         <a:buNone/>
                       </a:pPr>
                       <a:r>
@@ -21457,7 +20387,7 @@
                       </a:endParaRPr>
                     </a:p>
                   </a:txBody>
-                  <a:tcPr marL="91440" marR="91440" marT="91440" marB="91440" anchor="ctr">
+                  <a:tcPr marT="91440" marB="91440" anchor="ctr">
                     <a:lnL w="12700" cap="flat" cmpd="sng" algn="ctr">
                       <a:solidFill>
                         <a:srgbClr val="DCE3F0"/>
@@ -21504,7 +20434,7 @@
                     <a:bodyPr/>
                     <a:lstStyle/>
                     <a:p>
-                      <a:pPr indent="0" marL="0">
+                      <a:pPr marL="0" indent="0">
                         <a:buNone/>
                       </a:pPr>
                       <a:r>
@@ -21525,7 +20455,7 @@
                       </a:endParaRPr>
                     </a:p>
                   </a:txBody>
-                  <a:tcPr marL="91440" marR="91440" marT="91440" marB="91440" anchor="ctr">
+                  <a:tcPr marT="91440" marB="91440" anchor="ctr">
                     <a:lnL w="12700" cap="flat" cmpd="sng" algn="ctr">
                       <a:solidFill>
                         <a:srgbClr val="DCE3F0"/>
@@ -21567,6 +20497,11 @@
                     </a:solidFill>
                   </a:tcPr>
                 </a:tc>
+                <a:extLst>
+                  <a:ext uri="{0D108BD9-81ED-4DB2-BD59-A6C34878D82A}">
+                    <a16:rowId xmlns:a16="http://schemas.microsoft.com/office/drawing/2014/main" val="10005"/>
+                  </a:ext>
+                </a:extLst>
               </a:tr>
             </a:tbl>
           </a:graphicData>
@@ -21598,7 +20533,7 @@
             <a:prstDash val="solid"/>
           </a:ln>
           <a:effectLst>
-            <a:outerShdw sx="100000" sy="100000" kx="0" ky="0" algn="bl" rotWithShape="0" blurRad="101600" dist="12700" dir="5400000">
+            <a:outerShdw blurRad="101600" dist="12700" dir="5400000" algn="bl" rotWithShape="0">
               <a:srgbClr val="9FB0C9">
                 <a:alpha val="18000"/>
               </a:srgbClr>
@@ -21654,7 +20589,7 @@
           <a:bodyPr wrap="square" lIns="0" tIns="0" rIns="0" bIns="0" rtlCol="0" anchor="ctr"/>
           <a:lstStyle/>
           <a:p>
-            <a:pPr algn="ctr" indent="0" marL="0">
+            <a:pPr marL="0" indent="0" algn="ctr">
               <a:buNone/>
             </a:pPr>
             <a:r>
@@ -21693,7 +20628,7 @@
           <a:bodyPr wrap="square" lIns="0" tIns="0" rIns="0" bIns="0" rtlCol="0" anchor="ctr"/>
           <a:lstStyle/>
           <a:p>
-            <a:pPr indent="0" marL="0">
+            <a:pPr marL="0" indent="0">
               <a:buNone/>
             </a:pPr>
             <a:r>
@@ -21732,7 +20667,7 @@
           <a:bodyPr wrap="square" lIns="0" tIns="0" rIns="0" bIns="0" rtlCol="0" anchor="t"/>
           <a:lstStyle/>
           <a:p>
-            <a:pPr algn="l" indent="0" marL="0">
+            <a:pPr marL="0" indent="0" algn="l">
               <a:lnSpc>
                 <a:spcPts val="1600"/>
               </a:lnSpc>
@@ -21747,7 +20682,249 @@
                 <a:ea typeface="Arial" pitchFamily="34" charset="-122"/>
                 <a:cs typeface="Arial" pitchFamily="34" charset="-120"/>
               </a:rPr>
-              <a:t>Un banco no reserva capital para la pérdida promedio: la reserva es para el percentil 99.9 de la distribución de pérdidas. Ese es literalmente el número que pide Basilea.</a:t>
+              <a:t>Un banco no </a:t>
+            </a:r>
+            <a:r>
+              <a:rPr lang="en-US" sz="1250" dirty="0" err="1">
+                <a:solidFill>
+                  <a:srgbClr val="1B2A44"/>
+                </a:solidFill>
+                <a:latin typeface="Arial" pitchFamily="34" charset="0"/>
+                <a:ea typeface="Arial" pitchFamily="34" charset="-122"/>
+                <a:cs typeface="Arial" pitchFamily="34" charset="-120"/>
+              </a:rPr>
+              <a:t>reserva</a:t>
+            </a:r>
+            <a:r>
+              <a:rPr lang="en-US" sz="1250" dirty="0">
+                <a:solidFill>
+                  <a:srgbClr val="1B2A44"/>
+                </a:solidFill>
+                <a:latin typeface="Arial" pitchFamily="34" charset="0"/>
+                <a:ea typeface="Arial" pitchFamily="34" charset="-122"/>
+                <a:cs typeface="Arial" pitchFamily="34" charset="-120"/>
+              </a:rPr>
+              <a:t> capital para la </a:t>
+            </a:r>
+            <a:r>
+              <a:rPr lang="en-US" sz="1250" dirty="0" err="1">
+                <a:solidFill>
+                  <a:srgbClr val="1B2A44"/>
+                </a:solidFill>
+                <a:latin typeface="Arial" pitchFamily="34" charset="0"/>
+                <a:ea typeface="Arial" pitchFamily="34" charset="-122"/>
+                <a:cs typeface="Arial" pitchFamily="34" charset="-120"/>
+              </a:rPr>
+              <a:t>pérdida</a:t>
+            </a:r>
+            <a:r>
+              <a:rPr lang="en-US" sz="1250" dirty="0">
+                <a:solidFill>
+                  <a:srgbClr val="1B2A44"/>
+                </a:solidFill>
+                <a:latin typeface="Arial" pitchFamily="34" charset="0"/>
+                <a:ea typeface="Arial" pitchFamily="34" charset="-122"/>
+                <a:cs typeface="Arial" pitchFamily="34" charset="-120"/>
+              </a:rPr>
+              <a:t> </a:t>
+            </a:r>
+            <a:r>
+              <a:rPr lang="en-US" sz="1250" dirty="0" err="1">
+                <a:solidFill>
+                  <a:srgbClr val="1B2A44"/>
+                </a:solidFill>
+                <a:latin typeface="Arial" pitchFamily="34" charset="0"/>
+                <a:ea typeface="Arial" pitchFamily="34" charset="-122"/>
+                <a:cs typeface="Arial" pitchFamily="34" charset="-120"/>
+              </a:rPr>
+              <a:t>promedio</a:t>
+            </a:r>
+            <a:r>
+              <a:rPr lang="en-US" sz="1250" dirty="0">
+                <a:solidFill>
+                  <a:srgbClr val="1B2A44"/>
+                </a:solidFill>
+                <a:latin typeface="Arial" pitchFamily="34" charset="0"/>
+                <a:ea typeface="Arial" pitchFamily="34" charset="-122"/>
+                <a:cs typeface="Arial" pitchFamily="34" charset="-120"/>
+              </a:rPr>
+              <a:t>: la </a:t>
+            </a:r>
+            <a:r>
+              <a:rPr lang="en-US" sz="1250" dirty="0" err="1">
+                <a:solidFill>
+                  <a:srgbClr val="1B2A44"/>
+                </a:solidFill>
+                <a:latin typeface="Arial" pitchFamily="34" charset="0"/>
+                <a:ea typeface="Arial" pitchFamily="34" charset="-122"/>
+                <a:cs typeface="Arial" pitchFamily="34" charset="-120"/>
+              </a:rPr>
+              <a:t>reserva</a:t>
+            </a:r>
+            <a:r>
+              <a:rPr lang="en-US" sz="1250" dirty="0">
+                <a:solidFill>
+                  <a:srgbClr val="1B2A44"/>
+                </a:solidFill>
+                <a:latin typeface="Arial" pitchFamily="34" charset="0"/>
+                <a:ea typeface="Arial" pitchFamily="34" charset="-122"/>
+                <a:cs typeface="Arial" pitchFamily="34" charset="-120"/>
+              </a:rPr>
+              <a:t> es para el </a:t>
+            </a:r>
+            <a:r>
+              <a:rPr lang="en-US" sz="1250" dirty="0" err="1">
+                <a:solidFill>
+                  <a:srgbClr val="1B2A44"/>
+                </a:solidFill>
+                <a:latin typeface="Arial" pitchFamily="34" charset="0"/>
+                <a:ea typeface="Arial" pitchFamily="34" charset="-122"/>
+                <a:cs typeface="Arial" pitchFamily="34" charset="-120"/>
+              </a:rPr>
+              <a:t>percentil</a:t>
+            </a:r>
+            <a:r>
+              <a:rPr lang="en-US" sz="1250" dirty="0">
+                <a:solidFill>
+                  <a:srgbClr val="1B2A44"/>
+                </a:solidFill>
+                <a:latin typeface="Arial" pitchFamily="34" charset="0"/>
+                <a:ea typeface="Arial" pitchFamily="34" charset="-122"/>
+                <a:cs typeface="Arial" pitchFamily="34" charset="-120"/>
+              </a:rPr>
+              <a:t> 99.9 de la </a:t>
+            </a:r>
+            <a:r>
+              <a:rPr lang="en-US" sz="1250" dirty="0" err="1">
+                <a:solidFill>
+                  <a:srgbClr val="1B2A44"/>
+                </a:solidFill>
+                <a:latin typeface="Arial" pitchFamily="34" charset="0"/>
+                <a:ea typeface="Arial" pitchFamily="34" charset="-122"/>
+                <a:cs typeface="Arial" pitchFamily="34" charset="-120"/>
+              </a:rPr>
+              <a:t>distribución</a:t>
+            </a:r>
+            <a:r>
+              <a:rPr lang="en-US" sz="1250" dirty="0">
+                <a:solidFill>
+                  <a:srgbClr val="1B2A44"/>
+                </a:solidFill>
+                <a:latin typeface="Arial" pitchFamily="34" charset="0"/>
+                <a:ea typeface="Arial" pitchFamily="34" charset="-122"/>
+                <a:cs typeface="Arial" pitchFamily="34" charset="-120"/>
+              </a:rPr>
+              <a:t> de </a:t>
+            </a:r>
+            <a:r>
+              <a:rPr lang="en-US" sz="1250" dirty="0" err="1">
+                <a:solidFill>
+                  <a:srgbClr val="1B2A44"/>
+                </a:solidFill>
+                <a:latin typeface="Arial" pitchFamily="34" charset="0"/>
+                <a:ea typeface="Arial" pitchFamily="34" charset="-122"/>
+                <a:cs typeface="Arial" pitchFamily="34" charset="-120"/>
+              </a:rPr>
+              <a:t>pérdidas</a:t>
+            </a:r>
+            <a:r>
+              <a:rPr lang="en-US" sz="1250" dirty="0">
+                <a:solidFill>
+                  <a:srgbClr val="1B2A44"/>
+                </a:solidFill>
+                <a:latin typeface="Arial" pitchFamily="34" charset="0"/>
+                <a:ea typeface="Arial" pitchFamily="34" charset="-122"/>
+                <a:cs typeface="Arial" pitchFamily="34" charset="-120"/>
+              </a:rPr>
+              <a:t>. Ese es </a:t>
+            </a:r>
+            <a:r>
+              <a:rPr lang="en-US" sz="1250" dirty="0" err="1">
+                <a:solidFill>
+                  <a:srgbClr val="1B2A44"/>
+                </a:solidFill>
+                <a:latin typeface="Arial" pitchFamily="34" charset="0"/>
+                <a:ea typeface="Arial" pitchFamily="34" charset="-122"/>
+                <a:cs typeface="Arial" pitchFamily="34" charset="-120"/>
+              </a:rPr>
+              <a:t>literalmente</a:t>
+            </a:r>
+            <a:r>
+              <a:rPr lang="en-US" sz="1250" dirty="0">
+                <a:solidFill>
+                  <a:srgbClr val="1B2A44"/>
+                </a:solidFill>
+                <a:latin typeface="Arial" pitchFamily="34" charset="0"/>
+                <a:ea typeface="Arial" pitchFamily="34" charset="-122"/>
+                <a:cs typeface="Arial" pitchFamily="34" charset="-120"/>
+              </a:rPr>
+              <a:t> el </a:t>
+            </a:r>
+            <a:r>
+              <a:rPr lang="en-US" sz="1250" dirty="0" err="1">
+                <a:solidFill>
+                  <a:srgbClr val="1B2A44"/>
+                </a:solidFill>
+                <a:latin typeface="Arial" pitchFamily="34" charset="0"/>
+                <a:ea typeface="Arial" pitchFamily="34" charset="-122"/>
+                <a:cs typeface="Arial" pitchFamily="34" charset="-120"/>
+              </a:rPr>
+              <a:t>número</a:t>
+            </a:r>
+            <a:r>
+              <a:rPr lang="en-US" sz="1250" dirty="0">
+                <a:solidFill>
+                  <a:srgbClr val="1B2A44"/>
+                </a:solidFill>
+                <a:latin typeface="Arial" pitchFamily="34" charset="0"/>
+                <a:ea typeface="Arial" pitchFamily="34" charset="-122"/>
+                <a:cs typeface="Arial" pitchFamily="34" charset="-120"/>
+              </a:rPr>
+              <a:t> </a:t>
+            </a:r>
+            <a:r>
+              <a:rPr lang="en-US" sz="1250" dirty="0" err="1">
+                <a:solidFill>
+                  <a:srgbClr val="1B2A44"/>
+                </a:solidFill>
+                <a:latin typeface="Arial" pitchFamily="34" charset="0"/>
+                <a:ea typeface="Arial" pitchFamily="34" charset="-122"/>
+                <a:cs typeface="Arial" pitchFamily="34" charset="-120"/>
+              </a:rPr>
+              <a:t>que</a:t>
+            </a:r>
+            <a:r>
+              <a:rPr lang="en-US" sz="1250" dirty="0">
+                <a:solidFill>
+                  <a:srgbClr val="1B2A44"/>
+                </a:solidFill>
+                <a:latin typeface="Arial" pitchFamily="34" charset="0"/>
+                <a:ea typeface="Arial" pitchFamily="34" charset="-122"/>
+                <a:cs typeface="Arial" pitchFamily="34" charset="-120"/>
+              </a:rPr>
+              <a:t> </a:t>
+            </a:r>
+            <a:r>
+              <a:rPr lang="en-US" sz="1250" dirty="0" err="1">
+                <a:solidFill>
+                  <a:srgbClr val="1B2A44"/>
+                </a:solidFill>
+                <a:latin typeface="Arial" pitchFamily="34" charset="0"/>
+                <a:ea typeface="Arial" pitchFamily="34" charset="-122"/>
+                <a:cs typeface="Arial" pitchFamily="34" charset="-120"/>
+              </a:rPr>
+              <a:t>pide</a:t>
+            </a:r>
+            <a:r>
+              <a:rPr lang="en-US" sz="1250" dirty="0">
+                <a:solidFill>
+                  <a:srgbClr val="1B2A44"/>
+                </a:solidFill>
+                <a:latin typeface="Arial" pitchFamily="34" charset="0"/>
+                <a:ea typeface="Arial" pitchFamily="34" charset="-122"/>
+                <a:cs typeface="Arial" pitchFamily="34" charset="-120"/>
+              </a:rPr>
+              <a:t> Basilea.</a:t>
             </a:r>
             <a:endParaRPr lang="en-US" sz="1250" dirty="0"/>
           </a:p>
@@ -21755,7 +20932,7 @@
       </p:sp>
       <p:sp>
         <p:nvSpPr>
-          <p:cNvPr id="10" name="Text 7"/>
+          <p:cNvPr id="4" name="Text 7"/>
           <p:cNvSpPr/>
           <p:nvPr/>
         </p:nvSpPr>
@@ -21774,7 +20951,7 @@
           <a:bodyPr wrap="square" lIns="0" tIns="0" rIns="0" bIns="0" rtlCol="0" anchor="t"/>
           <a:lstStyle/>
           <a:p>
-            <a:pPr algn="l" indent="0" marL="0">
+            <a:pPr marL="0" indent="0" algn="l">
               <a:lnSpc>
                 <a:spcPts val="1600"/>
               </a:lnSpc>
@@ -21816,7 +20993,7 @@
           <a:bodyPr wrap="square" lIns="0" tIns="0" rIns="0" bIns="0" rtlCol="0" anchor="t"/>
           <a:lstStyle/>
           <a:p>
-            <a:pPr algn="l" indent="0" marL="0">
+            <a:pPr marL="0" indent="0" algn="l">
               <a:lnSpc>
                 <a:spcPts val="1700"/>
               </a:lnSpc>
@@ -21858,7 +21035,7 @@
           <a:bodyPr wrap="square" lIns="0" tIns="0" rIns="0" bIns="0" rtlCol="0" anchor="ctr"/>
           <a:lstStyle/>
           <a:p>
-            <a:pPr indent="0" marL="0">
+            <a:pPr marL="0" indent="0">
               <a:buNone/>
             </a:pPr>
             <a:r>
@@ -21897,7 +21074,7 @@
           <a:bodyPr wrap="square" lIns="0" tIns="0" rIns="0" bIns="0" rtlCol="0" anchor="ctr"/>
           <a:lstStyle/>
           <a:p>
-            <a:pPr algn="r" indent="0" marL="0">
+            <a:pPr marL="0" indent="0" algn="r">
               <a:buNone/>
             </a:pPr>
             <a:r>
@@ -22216,4 +21393,319 @@
     </a:ext>
   </a:extLst>
 </a:theme>
+</file>
+
+<file path=ppt/theme/theme2.xml><?xml version="1.0" encoding="utf-8"?>
+<a:theme xmlns:a="http://schemas.openxmlformats.org/drawingml/2006/main" name="Office Theme">
+  <a:themeElements>
+    <a:clrScheme name="Office">
+      <a:dk1>
+        <a:sysClr val="windowText" lastClr="000000"/>
+      </a:dk1>
+      <a:lt1>
+        <a:sysClr val="window" lastClr="FFFFFF"/>
+      </a:lt1>
+      <a:dk2>
+        <a:srgbClr val="0E2841"/>
+      </a:dk2>
+      <a:lt2>
+        <a:srgbClr val="E8E8E8"/>
+      </a:lt2>
+      <a:accent1>
+        <a:srgbClr val="156082"/>
+      </a:accent1>
+      <a:accent2>
+        <a:srgbClr val="E97132"/>
+      </a:accent2>
+      <a:accent3>
+        <a:srgbClr val="196B24"/>
+      </a:accent3>
+      <a:accent4>
+        <a:srgbClr val="0F9ED5"/>
+      </a:accent4>
+      <a:accent5>
+        <a:srgbClr val="A02B93"/>
+      </a:accent5>
+      <a:accent6>
+        <a:srgbClr val="4EA72E"/>
+      </a:accent6>
+      <a:hlink>
+        <a:srgbClr val="467886"/>
+      </a:hlink>
+      <a:folHlink>
+        <a:srgbClr val="96607D"/>
+      </a:folHlink>
+    </a:clrScheme>
+    <a:fontScheme name="Office">
+      <a:majorFont>
+        <a:latin typeface="Aptos Display" panose="02110004020202020204"/>
+        <a:ea typeface=""/>
+        <a:cs typeface=""/>
+        <a:font script="Jpan" typeface="游ゴシック Light"/>
+        <a:font script="Hang" typeface="맑은 고딕"/>
+        <a:font script="Hans" typeface="等线 Light"/>
+        <a:font script="Hant" typeface="新細明體"/>
+        <a:font script="Arab" typeface="Times New Roman"/>
+        <a:font script="Hebr" typeface="Times New Roman"/>
+        <a:font script="Thai" typeface="Angsana New"/>
+        <a:font script="Ethi" typeface="Nyala"/>
+        <a:font script="Beng" typeface="Vrinda"/>
+        <a:font script="Gujr" typeface="Shruti"/>
+        <a:font script="Khmr" typeface="MoolBoran"/>
+        <a:font script="Knda" typeface="Tunga"/>
+        <a:font script="Guru" typeface="Raavi"/>
+        <a:font script="Cans" typeface="Euphemia"/>
+        <a:font script="Cher" typeface="Plantagenet Cherokee"/>
+        <a:font script="Yiii" typeface="Microsoft Yi Baiti"/>
+        <a:font script="Tibt" typeface="Microsoft Himalaya"/>
+        <a:font script="Thaa" typeface="MV Boli"/>
+        <a:font script="Deva" typeface="Mangal"/>
+        <a:font script="Telu" typeface="Gautami"/>
+        <a:font script="Taml" typeface="Latha"/>
+        <a:font script="Syrc" typeface="Estrangelo Edessa"/>
+        <a:font script="Orya" typeface="Kalinga"/>
+        <a:font script="Mlym" typeface="Kartika"/>
+        <a:font script="Laoo" typeface="DokChampa"/>
+        <a:font script="Sinh" typeface="Iskoola Pota"/>
+        <a:font script="Mong" typeface="Mongolian Baiti"/>
+        <a:font script="Viet" typeface="Times New Roman"/>
+        <a:font script="Uigh" typeface="Microsoft Uighur"/>
+        <a:font script="Geor" typeface="Sylfaen"/>
+        <a:font script="Armn" typeface="Arial"/>
+        <a:font script="Bugi" typeface="Leelawadee UI"/>
+        <a:font script="Bopo" typeface="Microsoft JhengHei"/>
+        <a:font script="Java" typeface="Javanese Text"/>
+        <a:font script="Lisu" typeface="Segoe UI"/>
+        <a:font script="Mymr" typeface="Myanmar Text"/>
+        <a:font script="Nkoo" typeface="Ebrima"/>
+        <a:font script="Olck" typeface="Nirmala UI"/>
+        <a:font script="Osma" typeface="Ebrima"/>
+        <a:font script="Phag" typeface="Phagspa"/>
+        <a:font script="Syrn" typeface="Estrangelo Edessa"/>
+        <a:font script="Syrj" typeface="Estrangelo Edessa"/>
+        <a:font script="Syre" typeface="Estrangelo Edessa"/>
+        <a:font script="Sora" typeface="Nirmala UI"/>
+        <a:font script="Tale" typeface="Microsoft Tai Le"/>
+        <a:font script="Talu" typeface="Microsoft New Tai Lue"/>
+        <a:font script="Tfng" typeface="Ebrima"/>
+      </a:majorFont>
+      <a:minorFont>
+        <a:latin typeface="Aptos" panose="02110004020202020204"/>
+        <a:ea typeface=""/>
+        <a:cs typeface=""/>
+        <a:font script="Jpan" typeface="游ゴシック"/>
+        <a:font script="Hang" typeface="맑은 고딕"/>
+        <a:font script="Hans" typeface="等线"/>
+        <a:font script="Hant" typeface="新細明體"/>
+        <a:font script="Arab" typeface="Arial"/>
+        <a:font script="Hebr" typeface="Arial"/>
+        <a:font script="Thai" typeface="Cordia New"/>
+        <a:font script="Ethi" typeface="Nyala"/>
+        <a:font script="Beng" typeface="Vrinda"/>
+        <a:font script="Gujr" typeface="Shruti"/>
+        <a:font script="Khmr" typeface="DaunPenh"/>
+        <a:font script="Knda" typeface="Tunga"/>
+        <a:font script="Guru" typeface="Raavi"/>
+        <a:font script="Cans" typeface="Euphemia"/>
+        <a:font script="Cher" typeface="Plantagenet Cherokee"/>
+        <a:font script="Yiii" typeface="Microsoft Yi Baiti"/>
+        <a:font script="Tibt" typeface="Microsoft Himalaya"/>
+        <a:font script="Thaa" typeface="MV Boli"/>
+        <a:font script="Deva" typeface="Mangal"/>
+        <a:font script="Telu" typeface="Gautami"/>
+        <a:font script="Taml" typeface="Latha"/>
+        <a:font script="Syrc" typeface="Estrangelo Edessa"/>
+        <a:font script="Orya" typeface="Kalinga"/>
+        <a:font script="Mlym" typeface="Kartika"/>
+        <a:font script="Laoo" typeface="DokChampa"/>
+        <a:font script="Sinh" typeface="Iskoola Pota"/>
+        <a:font script="Mong" typeface="Mongolian Baiti"/>
+        <a:font script="Viet" typeface="Arial"/>
+        <a:font script="Uigh" typeface="Microsoft Uighur"/>
+        <a:font script="Geor" typeface="Sylfaen"/>
+        <a:font script="Armn" typeface="Arial"/>
+        <a:font script="Bugi" typeface="Leelawadee UI"/>
+        <a:font script="Bopo" typeface="Microsoft JhengHei"/>
+        <a:font script="Java" typeface="Javanese Text"/>
+        <a:font script="Lisu" typeface="Segoe UI"/>
+        <a:font script="Mymr" typeface="Myanmar Text"/>
+        <a:font script="Nkoo" typeface="Ebrima"/>
+        <a:font script="Olck" typeface="Nirmala UI"/>
+        <a:font script="Osma" typeface="Ebrima"/>
+        <a:font script="Phag" typeface="Phagspa"/>
+        <a:font script="Syrn" typeface="Estrangelo Edessa"/>
+        <a:font script="Syrj" typeface="Estrangelo Edessa"/>
+        <a:font script="Syre" typeface="Estrangelo Edessa"/>
+        <a:font script="Sora" typeface="Nirmala UI"/>
+        <a:font script="Tale" typeface="Microsoft Tai Le"/>
+        <a:font script="Talu" typeface="Microsoft New Tai Lue"/>
+        <a:font script="Tfng" typeface="Ebrima"/>
+      </a:minorFont>
+    </a:fontScheme>
+    <a:fmtScheme name="Office">
+      <a:fillStyleLst>
+        <a:solidFill>
+          <a:schemeClr val="phClr"/>
+        </a:solidFill>
+        <a:gradFill rotWithShape="1">
+          <a:gsLst>
+            <a:gs pos="0">
+              <a:schemeClr val="phClr">
+                <a:lumMod val="110000"/>
+                <a:satMod val="105000"/>
+                <a:tint val="67000"/>
+              </a:schemeClr>
+            </a:gs>
+            <a:gs pos="50000">
+              <a:schemeClr val="phClr">
+                <a:lumMod val="105000"/>
+                <a:satMod val="103000"/>
+                <a:tint val="73000"/>
+              </a:schemeClr>
+            </a:gs>
+            <a:gs pos="100000">
+              <a:schemeClr val="phClr">
+                <a:lumMod val="105000"/>
+                <a:satMod val="109000"/>
+                <a:tint val="81000"/>
+              </a:schemeClr>
+            </a:gs>
+          </a:gsLst>
+          <a:lin ang="5400000" scaled="0"/>
+        </a:gradFill>
+        <a:gradFill rotWithShape="1">
+          <a:gsLst>
+            <a:gs pos="0">
+              <a:schemeClr val="phClr">
+                <a:satMod val="103000"/>
+                <a:lumMod val="102000"/>
+                <a:tint val="94000"/>
+              </a:schemeClr>
+            </a:gs>
+            <a:gs pos="50000">
+              <a:schemeClr val="phClr">
+                <a:satMod val="110000"/>
+                <a:lumMod val="100000"/>
+                <a:shade val="100000"/>
+              </a:schemeClr>
+            </a:gs>
+            <a:gs pos="100000">
+              <a:schemeClr val="phClr">
+                <a:lumMod val="99000"/>
+                <a:satMod val="120000"/>
+                <a:shade val="78000"/>
+              </a:schemeClr>
+            </a:gs>
+          </a:gsLst>
+          <a:lin ang="5400000" scaled="0"/>
+        </a:gradFill>
+      </a:fillStyleLst>
+      <a:lnStyleLst>
+        <a:ln w="12700" cap="flat" cmpd="sng" algn="ctr">
+          <a:solidFill>
+            <a:schemeClr val="phClr"/>
+          </a:solidFill>
+          <a:prstDash val="solid"/>
+          <a:miter lim="800000"/>
+        </a:ln>
+        <a:ln w="19050" cap="flat" cmpd="sng" algn="ctr">
+          <a:solidFill>
+            <a:schemeClr val="phClr"/>
+          </a:solidFill>
+          <a:prstDash val="solid"/>
+          <a:miter lim="800000"/>
+        </a:ln>
+        <a:ln w="25400" cap="flat" cmpd="sng" algn="ctr">
+          <a:solidFill>
+            <a:schemeClr val="phClr"/>
+          </a:solidFill>
+          <a:prstDash val="solid"/>
+          <a:miter lim="800000"/>
+        </a:ln>
+      </a:lnStyleLst>
+      <a:effectStyleLst>
+        <a:effectStyle>
+          <a:effectLst/>
+        </a:effectStyle>
+        <a:effectStyle>
+          <a:effectLst/>
+        </a:effectStyle>
+        <a:effectStyle>
+          <a:effectLst>
+            <a:outerShdw blurRad="57150" dist="19050" dir="5400000" algn="ctr" rotWithShape="0">
+              <a:srgbClr val="000000">
+                <a:alpha val="63000"/>
+              </a:srgbClr>
+            </a:outerShdw>
+          </a:effectLst>
+        </a:effectStyle>
+      </a:effectStyleLst>
+      <a:bgFillStyleLst>
+        <a:solidFill>
+          <a:schemeClr val="phClr"/>
+        </a:solidFill>
+        <a:solidFill>
+          <a:schemeClr val="phClr">
+            <a:tint val="95000"/>
+            <a:satMod val="170000"/>
+          </a:schemeClr>
+        </a:solidFill>
+        <a:gradFill rotWithShape="1">
+          <a:gsLst>
+            <a:gs pos="0">
+              <a:schemeClr val="phClr">
+                <a:tint val="93000"/>
+                <a:satMod val="150000"/>
+                <a:shade val="98000"/>
+                <a:lumMod val="102000"/>
+              </a:schemeClr>
+            </a:gs>
+            <a:gs pos="50000">
+              <a:schemeClr val="phClr">
+                <a:tint val="98000"/>
+                <a:satMod val="130000"/>
+                <a:shade val="90000"/>
+                <a:lumMod val="103000"/>
+              </a:schemeClr>
+            </a:gs>
+            <a:gs pos="100000">
+              <a:schemeClr val="phClr">
+                <a:shade val="63000"/>
+                <a:satMod val="120000"/>
+              </a:schemeClr>
+            </a:gs>
+          </a:gsLst>
+          <a:lin ang="5400000" scaled="0"/>
+        </a:gradFill>
+      </a:bgFillStyleLst>
+    </a:fmtScheme>
+  </a:themeElements>
+  <a:objectDefaults>
+    <a:lnDef>
+      <a:spPr/>
+      <a:bodyPr/>
+      <a:lstStyle/>
+      <a:style>
+        <a:lnRef idx="2">
+          <a:schemeClr val="accent1"/>
+        </a:lnRef>
+        <a:fillRef idx="0">
+          <a:schemeClr val="accent1"/>
+        </a:fillRef>
+        <a:effectRef idx="1">
+          <a:schemeClr val="accent1"/>
+        </a:effectRef>
+        <a:fontRef idx="minor">
+          <a:schemeClr val="tx1"/>
+        </a:fontRef>
+      </a:style>
+    </a:lnDef>
+  </a:objectDefaults>
+  <a:extraClrSchemeLst/>
+  <a:extLst>
+    <a:ext uri="{05A4C25C-085E-4340-85A3-A5531E510DB2}">
+      <thm15:themeFamily xmlns:thm15="http://schemas.microsoft.com/office/thememl/2012/main" name="Office Theme" id="{2E142A2C-CD16-42D6-873A-C26D2A0506FA}" vid="{1BDDFF52-6CD6-40A5-AB3C-68EB2F1E4D0A}"/>
+    </a:ext>
+  </a:extLst>
+</a:theme>
 </file>